--- a/Round2/out/JSW_Round2_Surface_Defect_Detection.pptx
+++ b/Round2/out/JSW_Round2_Surface_Defect_Detection.pptx
@@ -866,303 +866,6 @@
 </c:chartSpace>
 </file>
 
-<file path=ppt/charts/chart4.xml><?xml version="1.0" encoding="utf-8"?>
-<c:chartSpace xmlns:c="http://schemas.openxmlformats.org/drawingml/2006/chart" xmlns:a="http://schemas.openxmlformats.org/drawingml/2006/main" xmlns:r="http://schemas.openxmlformats.org/officeDocument/2006/relationships">
-  <c:date1904 val="0"/>
-  <c:roundedCorners val="1"/>
-  <c:chart>
-    <c:autoTitleDeleted val="1"/>
-    <c:plotArea>
-      <c:layout/>
-      <c:doughnutChart>
-        <c:varyColors val="1"/>
-        <c:ser>
-          <c:idx val="0"/>
-          <c:order val="0"/>
-          <c:tx>
-            <c:strRef>
-              <c:f>Sheet1!$B$1</c:f>
-              <c:strCache>
-                <c:ptCount val="1"/>
-                <c:pt idx="0">
-                  <c:v>Cost</c:v>
-                </c:pt>
-              </c:strCache>
-            </c:strRef>
-          </c:tx>
-          <c:spPr>
-            <a:solidFill>
-              <a:schemeClr val="accent1"/>
-            </a:solidFill>
-            <a:ln w="9525" cap="flat">
-              <a:solidFill>
-                <a:srgbClr val="F9F9F9"/>
-              </a:solidFill>
-              <a:prstDash val="solid"/>
-              <a:round/>
-            </a:ln>
-            <a:effectLst/>
-          </c:spPr>
-          <c:dPt>
-            <c:idx val="0"/>
-            <c:bubble3D val="0"/>
-            <c:spPr>
-              <a:solidFill>
-                <a:srgbClr val="2B2B2B"/>
-              </a:solidFill>
-              <a:ln w="12700" cap="flat">
-                <a:solidFill>
-                  <a:srgbClr val="FFFFFF"/>
-                </a:solidFill>
-                <a:prstDash val="solid"/>
-                <a:round/>
-              </a:ln>
-              <a:effectLst/>
-            </c:spPr>
-          </c:dPt>
-          <c:dPt>
-            <c:idx val="1"/>
-            <c:bubble3D val="0"/>
-            <c:spPr>
-              <a:solidFill>
-                <a:srgbClr val="C4561A"/>
-              </a:solidFill>
-              <a:ln w="12700" cap="flat">
-                <a:solidFill>
-                  <a:srgbClr val="FFFFFF"/>
-                </a:solidFill>
-                <a:prstDash val="solid"/>
-                <a:round/>
-              </a:ln>
-              <a:effectLst/>
-            </c:spPr>
-          </c:dPt>
-          <c:dPt>
-            <c:idx val="2"/>
-            <c:bubble3D val="0"/>
-            <c:spPr>
-              <a:solidFill>
-                <a:srgbClr val="EC9352"/>
-              </a:solidFill>
-              <a:ln w="12700" cap="flat">
-                <a:solidFill>
-                  <a:srgbClr val="FFFFFF"/>
-                </a:solidFill>
-                <a:prstDash val="solid"/>
-                <a:round/>
-              </a:ln>
-              <a:effectLst/>
-            </c:spPr>
-          </c:dPt>
-          <c:dPt>
-            <c:idx val="3"/>
-            <c:bubble3D val="0"/>
-            <c:spPr>
-              <a:solidFill>
-                <a:srgbClr val="F5BE92"/>
-              </a:solidFill>
-              <a:ln w="12700" cap="flat">
-                <a:solidFill>
-                  <a:srgbClr val="FFFFFF"/>
-                </a:solidFill>
-                <a:prstDash val="solid"/>
-                <a:round/>
-              </a:ln>
-              <a:effectLst/>
-            </c:spPr>
-          </c:dPt>
-          <c:dLbls>
-            <c:dLbl>
-              <c:idx val="0"/>
-              <c:numFmt formatCode="General" sourceLinked="0"/>
-              <c:spPr/>
-              <c:txPr>
-                <a:bodyPr/>
-                <a:lstStyle/>
-                <a:p>
-                  <a:pPr>
-                    <a:defRPr sz="1200" b="0" i="0" u="none" strike="noStrike">
-                      <a:solidFill>
-                        <a:srgbClr val="000000"/>
-                      </a:solidFill>
-                      <a:latin typeface="Arial"/>
-                    </a:defRPr>
-                  </a:pPr>
-                </a:p>
-              </c:txPr>
-              <c:showLegendKey val="0"/>
-              <c:showVal val="0"/>
-              <c:showCatName val="0"/>
-              <c:showSerName val="0"/>
-              <c:showPercent val="0"/>
-              <c:showBubbleSize val="0"/>
-            </c:dLbl>
-            <c:dLbl>
-              <c:idx val="1"/>
-              <c:numFmt formatCode="General" sourceLinked="0"/>
-              <c:spPr/>
-              <c:txPr>
-                <a:bodyPr/>
-                <a:lstStyle/>
-                <a:p>
-                  <a:pPr>
-                    <a:defRPr sz="1200" b="0" i="0" u="none" strike="noStrike">
-                      <a:solidFill>
-                        <a:srgbClr val="000000"/>
-                      </a:solidFill>
-                      <a:latin typeface="Arial"/>
-                    </a:defRPr>
-                  </a:pPr>
-                </a:p>
-              </c:txPr>
-              <c:showLegendKey val="0"/>
-              <c:showVal val="0"/>
-              <c:showCatName val="0"/>
-              <c:showSerName val="0"/>
-              <c:showPercent val="0"/>
-              <c:showBubbleSize val="0"/>
-            </c:dLbl>
-            <c:dLbl>
-              <c:idx val="2"/>
-              <c:numFmt formatCode="General" sourceLinked="0"/>
-              <c:spPr/>
-              <c:txPr>
-                <a:bodyPr/>
-                <a:lstStyle/>
-                <a:p>
-                  <a:pPr>
-                    <a:defRPr sz="1200" b="0" i="0" u="none" strike="noStrike">
-                      <a:solidFill>
-                        <a:srgbClr val="000000"/>
-                      </a:solidFill>
-                      <a:latin typeface="Arial"/>
-                    </a:defRPr>
-                  </a:pPr>
-                </a:p>
-              </c:txPr>
-              <c:showLegendKey val="0"/>
-              <c:showVal val="0"/>
-              <c:showCatName val="0"/>
-              <c:showSerName val="0"/>
-              <c:showPercent val="0"/>
-              <c:showBubbleSize val="0"/>
-            </c:dLbl>
-            <c:dLbl>
-              <c:idx val="3"/>
-              <c:numFmt formatCode="General" sourceLinked="0"/>
-              <c:spPr/>
-              <c:txPr>
-                <a:bodyPr/>
-                <a:lstStyle/>
-                <a:p>
-                  <a:pPr>
-                    <a:defRPr sz="1200" b="0" i="0" u="none" strike="noStrike">
-                      <a:solidFill>
-                        <a:srgbClr val="000000"/>
-                      </a:solidFill>
-                      <a:latin typeface="Arial"/>
-                    </a:defRPr>
-                  </a:pPr>
-                </a:p>
-              </c:txPr>
-              <c:showLegendKey val="0"/>
-              <c:showVal val="0"/>
-              <c:showCatName val="0"/>
-              <c:showSerName val="0"/>
-              <c:showPercent val="0"/>
-              <c:showBubbleSize val="0"/>
-            </c:dLbl>
-            <c:numFmt formatCode="General" sourceLinked="0"/>
-            <c:txPr>
-              <a:bodyPr/>
-              <a:lstStyle/>
-              <a:p>
-                <a:pPr>
-                  <a:defRPr sz="1800" b="0" i="0" u="none" strike="noStrike">
-                    <a:solidFill>
-                      <a:srgbClr val="000000"/>
-                    </a:solidFill>
-                    <a:latin typeface="Arial"/>
-                  </a:defRPr>
-                </a:pPr>
-              </a:p>
-            </c:txPr>
-            <c:showLegendKey val="0"/>
-            <c:showVal val="0"/>
-            <c:showCatName val="1"/>
-            <c:showSerName val="0"/>
-            <c:showPercent val="1"/>
-            <c:showBubbleSize val="0"/>
-            <c:showLeaderLines val="0"/>
-          </c:dLbls>
-          <c:cat>
-            <c:strRef>
-              <c:f>Sheet1!$A$2:$A$5</c:f>
-              <c:strCache>
-                <c:ptCount val="4"/>
-                <c:pt idx="0">
-                  <c:v>Cameras &amp; lighting</c:v>
-                </c:pt>
-                <c:pt idx="1">
-                  <c:v>Installation &amp; integration</c:v>
-                </c:pt>
-                <c:pt idx="2">
-                  <c:v>Computing hardware</c:v>
-                </c:pt>
-                <c:pt idx="3">
-                  <c:v>Labelling JSL strip</c:v>
-                </c:pt>
-              </c:strCache>
-            </c:strRef>
-          </c:cat>
-          <c:val>
-            <c:numRef>
-              <c:f>Sheet1!$B$2:$B$5</c:f>
-              <c:numCache>
-                <c:ptCount val="4"/>
-                <c:pt idx="0">
-                  <c:v>115</c:v>
-                </c:pt>
-                <c:pt idx="1">
-                  <c:v>120</c:v>
-                </c:pt>
-                <c:pt idx="2">
-                  <c:v>60</c:v>
-                </c:pt>
-                <c:pt idx="3">
-                  <c:v>40</c:v>
-                </c:pt>
-              </c:numCache>
-            </c:numRef>
-          </c:val>
-        </c:ser>
-        <c:firstSliceAng val="0"/>
-        <c:holeSize val="62"/>
-      </c:doughnutChart>
-      <c:spPr>
-        <a:noFill/>
-        <a:ln>
-          <a:noFill/>
-        </a:ln>
-        <a:effectLst/>
-      </c:spPr>
-    </c:plotArea>
-    <c:plotVisOnly val="1"/>
-    <c:dispBlanksAs val="span"/>
-  </c:chart>
-  <c:spPr>
-    <a:noFill/>
-    <a:ln>
-      <a:noFill/>
-    </a:ln>
-    <a:effectLst/>
-  </c:spPr>
-  <c:externalData r:id="rId1">
-    <c:autoUpdate val="0"/>
-  </c:externalData>
-</c:chartSpace>
-</file>
-
 <file path=ppt/notesMasters/notesMaster1.xml><?xml version="1.0" encoding="utf-8"?>
 <p:notesMaster xmlns:a="http://schemas.openxmlformats.org/drawingml/2006/main" xmlns:r="http://schemas.openxmlformats.org/officeDocument/2006/relationships" xmlns:p="http://schemas.openxmlformats.org/presentationml/2006/main">
   <p:cSld>
@@ -1558,7 +1261,7 @@
           <a:p>
             <a:r>
               <a:rPr lang="en-US" dirty="0"/>
-              <a:t>Cover. The six images are real output from our system on steel images it had never seen. The QR opens the live demo in the judge's browser. Four numbers tell the story: on real mill strip it catches 9 in 10 defects and wrongly flags fewer than 1 in 20 clean images, at a fraction of commercial cost, paying back in about two years on one line.</a:t>
+              <a:t>Cover. The six images are real output from our system on steel images it had never seen. The QR opens the live demo in the judge's browser. Four numbers tell the story: on real mill strip it catches 9 in 10 defects and wrongly flags fewer than 1 in 20 clean images; each line has about INR 6.7 crore a year at stake from downgrades even at a conservative 1%; and one line reaches shadow mode in seven months, with a go/no-go before anything touches the mill.</a:t>
             </a:r>
             <a:endParaRPr lang="en-US" dirty="0"/>
           </a:p>
@@ -1910,7 +1613,7 @@
           <a:p>
             <a:r>
               <a:rPr lang="en-US" dirty="0"/>
-              <a:t>Solution. Stages 2 to 4 are built and running today in the browser demo. Stage 5 has coil rules built, but grade- and finish-specific limits need JSL input. Stages 1 and 6 are the plant-side pilot work. The strip underneath shows where each stage runs: cameras at the line, an edge server beside it that works offline, the plant network behind IEC 62443 zones, and people on screens and work orders. What JSL gets that a standard system does not: alarms it can act on, routing to the owning process, one verdict per coil, and ownership of its own system. Build vs buy: commercial systems are proven but cost USD 1-3M per line and are closed; hybrid is never weak.</a:t>
+              <a:t>Solution. Stages 2 to 4 are built and running today in the browser demo. Stage 5 has coil rules built, but grade- and finish-specific limits need JSL input. Stages 1 and 6 are the plant-side pilot work. The strip underneath shows where each stage runs: cameras at the line, an edge server beside it that works offline, the plant network behind IEC 62443 zones, and people on screens and work orders. What JSL gets that a standard system does not: alarms it can act on, routing to the owning process, one verdict per coil, and ownership of its own system. Build vs buy: commercial systems are proven but closed and vendor-owned; fully in-house is slowest to prove; hybrid is never weak.</a:t>
             </a:r>
             <a:endParaRPr lang="en-US" dirty="0"/>
           </a:p>
@@ -2086,7 +1789,7 @@
           <a:p>
             <a:r>
               <a:rPr lang="en-US" dirty="0"/>
-              <a:t>Implementation. Five phases, 20 months, with a hard go/no-go at month 7 after shadow mode. The system never acts on the mill until P3; before that it only reads data and advises. P0 plugs into Project Pragati, JSL's own digitalisation programme with Dassault Systemes and Capgemini, whose Phase 2 brings Level-2 process data at Jajpur, so each defect is tied to its heat and coil without a new integration project. Mirror-like BA and 2B finishes are handled the way stainless lines already do it: bright and dark-field light, with deflectometry for BA. The plant network is protected by IEC 62443 zones and the system runs offline. Every update must beat the live system on a fixed JSL test set before it ships. Cost is INR 2.5-4.2 crore per line, against USD 1-3M for a commercial system.</a:t>
+              <a:t>Implementation. Five phases, 20 months, with a hard go/no-go at month 7 after shadow mode. The system never acts on the mill until P3; before that it only reads data and advises. The pilot scope is deliberately narrow: one 300-series cold-rolled line, both faces, 2B and BA finishes, the six defect families plus unclassified defects. The hot end, edge cracks, automatic process correction and other plants wait until the pilot has proved itself. JSL Quality owns every go/no-go; the Pragati team owns integration, because Pragati Phase 2 already brings Level-2 process data at Jajpur. Mirror-like BA and 2B finishes are handled the way stainless lines already do it: bright and dark-field light, with deflectometry for BA. The plant network is protected by IEC 62443 zones and the system runs offline. Every update must beat the live system on a fixed JSL test set before it ships.</a:t>
             </a:r>
             <a:endParaRPr lang="en-US" dirty="0"/>
           </a:p>
@@ -2174,7 +1877,7 @@
           <a:p>
             <a:r>
               <a:rPr lang="en-US" dirty="0"/>
-              <a:t>Impact. At 1% of volume downgraded at a 10% discount, one 0.4 Mt line loses INR 6.7 crore a year; recovering 30%, less INR 0.5 crore run cost, pays back INR 3.35 crore capex in about 2.2 years, against 12.7 years for a commercial system. Our discounts are conservative: non-prime coil typically trades 10-30% below prime. Downgrade rate and recovery share dominate the tornado; neither is public, so both are measured in P2-P3. Beyond the P&amp;L: JSL supplies stainless for Vande Bharat sleeper coaches, Vande Metro and several metros, and those buyers see the surface; a defect map per coil is a sales tool. Less rework and remelting supports JSL's target of halving emission intensity by 2035 and net zero by 2050; intensity was 1.76 tCO2e per tonne in FY26. Close on the ask.</a:t>
+              <a:t>Impact. We size the prize, not the price. At a conservative 1% of volume downgraded at a 10% discount, one 0.4 Mt line puts about INR 6.7 crore a year at stake; across JSL's 2.57 Mt it is about INR 43 crore. Non-prime coil typically sells 10-30% below prime, so the discounts are conservative. The value comes through five levers: fewer downgrades, fewer customer claims, less rework, faster root-cause fixes, and premium exposed-finish orders. Each has a measure the pilot tracks, so the fleet decision rests on JSL's own numbers rather than our assumptions. Beyond the P&amp;L: coverage, customers, process, safety, sustainability and people. Close on the ask.</a:t>
             </a:r>
             <a:endParaRPr lang="en-US" dirty="0"/>
           </a:p>
@@ -3122,7 +2825,7 @@
               <a:buNone/>
             </a:pPr>
             <a:r>
-              <a:rPr lang="en-US" sz="2100" b="1" dirty="0">
+              <a:rPr lang="en-US" sz="2200" b="1" dirty="0">
                 <a:solidFill>
                   <a:srgbClr val="E4803A"/>
                 </a:solidFill>
@@ -3130,9 +2833,9 @@
                 <a:ea typeface="Calibri" pitchFamily="34" charset="-122"/>
                 <a:cs typeface="Calibri" pitchFamily="34" charset="-120"/>
               </a:rPr>
-              <a:t>₹2.5-4.2 cr</a:t>
-            </a:r>
-            <a:endParaRPr lang="en-US" sz="2100" dirty="0"/>
+              <a:t>~₹6.7 cr</a:t>
+            </a:r>
+            <a:endParaRPr lang="en-US" sz="2200" dirty="0"/>
           </a:p>
         </p:txBody>
       </p:sp>
@@ -3169,7 +2872,7 @@
                 <a:ea typeface="Calibri" pitchFamily="34" charset="-122"/>
                 <a:cs typeface="Calibri" pitchFamily="34" charset="-120"/>
               </a:rPr>
-              <a:t>per line, vs ₹10-29 cr for a</a:t>
+              <a:t>a year at stake per line, at a</a:t>
             </a:r>
             <a:endParaRPr lang="en-US" sz="950" dirty="0"/>
           </a:p>
@@ -3186,7 +2889,7 @@
                 <a:ea typeface="Calibri" pitchFamily="34" charset="-122"/>
                 <a:cs typeface="Calibri" pitchFamily="34" charset="-120"/>
               </a:rPr>
-              <a:t>commercial system</a:t>
+              <a:t>1% downgrade rate</a:t>
             </a:r>
             <a:endParaRPr lang="en-US" sz="950" dirty="0"/>
           </a:p>
@@ -3250,7 +2953,7 @@
                 <a:ea typeface="Calibri" pitchFamily="34" charset="-122"/>
                 <a:cs typeface="Calibri" pitchFamily="34" charset="-120"/>
               </a:rPr>
-              <a:t>~2.2 years</a:t>
+              <a:t>7 months</a:t>
             </a:r>
             <a:endParaRPr lang="en-US" sz="2200" dirty="0"/>
           </a:p>
@@ -3289,7 +2992,7 @@
                 <a:ea typeface="Calibri" pitchFamily="34" charset="-122"/>
                 <a:cs typeface="Calibri" pitchFamily="34" charset="-120"/>
               </a:rPr>
-              <a:t>payback on one line at a</a:t>
+              <a:t>to shadow mode on one line,</a:t>
             </a:r>
             <a:endParaRPr lang="en-US" sz="950" dirty="0"/>
           </a:p>
@@ -3306,7 +3009,7 @@
                 <a:ea typeface="Calibri" pitchFamily="34" charset="-122"/>
                 <a:cs typeface="Calibri" pitchFamily="34" charset="-120"/>
               </a:rPr>
-              <a:t>1% downgrade rate</a:t>
+              <a:t>go / no-go at month 7</a:t>
             </a:r>
             <a:endParaRPr lang="en-US" sz="950" dirty="0"/>
           </a:p>
@@ -16514,7 +16217,7 @@
                 <a:ea typeface="Calibri" pitchFamily="34" charset="-122"/>
                 <a:cs typeface="Calibri" pitchFamily="34" charset="-120"/>
               </a:rPr>
-              <a:t>BUILT = working in our prototype today, live at surface-vision.github.io. Commercial price range: industry figure, unverified.</a:t>
+              <a:t>BUILT = working in our prototype today, live at surface-vision.github.io.</a:t>
             </a:r>
             <a:endParaRPr lang="en-US" sz="900" dirty="0"/>
           </a:p>
@@ -19475,7 +19178,7 @@
                 <a:ea typeface="Calibri" pitchFamily="34" charset="-122"/>
                 <a:cs typeface="Calibri" pitchFamily="34" charset="-120"/>
               </a:rPr>
-              <a:t>USD 1-3M (unverified)</a:t>
+              <a:t>proven; the vendor owns it</a:t>
             </a:r>
             <a:endParaRPr lang="en-US" sz="900" dirty="0"/>
           </a:p>
@@ -19653,7 +19356,7 @@
                 <a:ea typeface="Calibri" pitchFamily="34" charset="-122"/>
                 <a:cs typeface="Calibri" pitchFamily="34" charset="-120"/>
               </a:rPr>
-              <a:t>₹2-3 cr (est.)</a:t>
+              <a:t>JSL owns it; slow to prove</a:t>
             </a:r>
             <a:endParaRPr lang="en-US" sz="900" dirty="0"/>
           </a:p>
@@ -19858,7 +19561,7 @@
                 <a:ea typeface="Calibri" pitchFamily="34" charset="-122"/>
                 <a:cs typeface="Calibri" pitchFamily="34" charset="-120"/>
               </a:rPr>
-              <a:t>₹2.5-4.2 cr (est.)</a:t>
+              <a:t>vendor cameras, JSL software</a:t>
             </a:r>
             <a:endParaRPr lang="en-US" sz="900" dirty="0"/>
           </a:p>
@@ -24565,7 +24268,7 @@
                 <a:ea typeface="Calibri" pitchFamily="34" charset="-122"/>
                 <a:cs typeface="Calibri" pitchFamily="34" charset="-120"/>
               </a:rPr>
-              <a:t>Commit ₹2.5-4.2 cr and one line for seven months. The month-7 go/no-go is decided on JSL's own alarm and recall numbers.</a:t>
+              <a:t>Commit one line for seven months. The month-7 go/no-go is decided on JSL's own alarm and recall numbers.</a:t>
             </a:r>
             <a:endParaRPr lang="en-US" sz="1200" dirty="0"/>
           </a:p>
@@ -24604,7 +24307,7 @@
                 <a:ea typeface="Calibri" pitchFamily="34" charset="-122"/>
                 <a:cs typeface="Calibri" pitchFamily="34" charset="-120"/>
               </a:rPr>
-              <a:t>Costs: team estimates for a 1.3-1.6 m line, both faces, at INR 95.8/USD; vendor quotes replace them in P0. Pragati: JSL digitalisation, Phase 2 brings Level-2 data at Jajpur.</a:t>
+              <a:t>Pragati: JSL's digitalisation programme; Phase 2 brings Level-2 process data at Jajpur. KPI targets to be agreed with JSL Quality in P0.</a:t>
             </a:r>
             <a:endParaRPr lang="en-US" sz="900" dirty="0"/>
           </a:p>
@@ -25901,7 +25604,7 @@
                 <a:ea typeface="Calibri" pitchFamily="34" charset="-122"/>
                 <a:cs typeface="Calibri" pitchFamily="34" charset="-120"/>
               </a:rPr>
-              <a:t>Fleet decision on real payback</a:t>
+              <a:t>Fleet decision on measured value</a:t>
             </a:r>
             <a:endParaRPr lang="en-US" sz="900" dirty="0"/>
           </a:p>
@@ -26029,74 +25732,77 @@
                 <a:ea typeface="Calibri" pitchFamily="34" charset="-122"/>
                 <a:cs typeface="Calibri" pitchFamily="34" charset="-120"/>
               </a:rPr>
-              <a:t>Cost per line, estimated</a:t>
+              <a:t>Pilot scope: in and out</a:t>
             </a:r>
             <a:endParaRPr lang="en-US" sz="1100" dirty="0"/>
           </a:p>
         </p:txBody>
       </p:sp>
-      <p:graphicFrame>
-        <p:nvGraphicFramePr>
-          <p:cNvPr id="65" name="Chart 0" descr=""/>
-          <p:cNvGraphicFramePr/>
-          <p:nvPr/>
-        </p:nvGraphicFramePr>
-        <p:xfrm>
-          <a:off x="7863840" y="1554480"/>
-          <a:ext cx="1783080" cy="1783080"/>
-        </p:xfrm>
-        <a:graphic xmlns:a="http://schemas.openxmlformats.org/drawingml/2006/main">
-          <a:graphicData uri="http://schemas.openxmlformats.org/drawingml/2006/chart">
-            <c:chart xmlns:c="http://schemas.openxmlformats.org/drawingml/2006/chart" r:id="rId3"/>
-          </a:graphicData>
-        </a:graphic>
-      </p:graphicFrame>
-      <p:sp>
-        <p:nvSpPr>
-          <p:cNvPr id="66" name="Text 61"/>
-          <p:cNvSpPr txBox="1"/>
-          <p:nvPr/>
-        </p:nvSpPr>
-        <p:spPr>
-          <a:xfrm>
-            <a:off x="8092440" y="2176272"/>
-            <a:ext cx="1325880" cy="548640"/>
-          </a:xfrm>
-          <a:prstGeom prst="rect">
-            <a:avLst/>
-          </a:prstGeom>
-          <a:noFill/>
-          <a:ln/>
-        </p:spPr>
-        <p:txBody>
-          <a:bodyPr wrap="square" lIns="0" tIns="0" rIns="0" bIns="0" rtlCol="0" anchor="ctr"/>
-          <a:lstStyle/>
-          <a:p>
-            <a:pPr algn="ctr" indent="0" marL="0">
-              <a:buNone/>
-            </a:pPr>
-            <a:r>
-              <a:rPr lang="en-US" sz="1300" b="1" dirty="0">
-                <a:solidFill>
-                  <a:srgbClr val="2B2B2B"/>
-                </a:solidFill>
-                <a:latin typeface="Calibri" pitchFamily="34" charset="0"/>
-                <a:ea typeface="Calibri" pitchFamily="34" charset="-122"/>
-                <a:cs typeface="Calibri" pitchFamily="34" charset="-120"/>
-              </a:rPr>
-              <a:t>₹2.5-4.2</a:t>
-            </a:r>
-            <a:pPr algn="ctr" indent="0" marL="0">
-              <a:buNone/>
-            </a:pPr>
-            <a:endParaRPr lang="en-US" sz="1000" dirty="0"/>
-          </a:p>
-          <a:p>
-            <a:pPr algn="ctr" indent="0" marL="0">
-              <a:buNone/>
-            </a:pPr>
-            <a:r>
-              <a:rPr lang="en-US" sz="900" dirty="0">
+      <p:sp>
+        <p:nvSpPr>
+          <p:cNvPr id="65" name="Text 61"/>
+          <p:cNvSpPr txBox="1"/>
+          <p:nvPr/>
+        </p:nvSpPr>
+        <p:spPr>
+          <a:xfrm>
+            <a:off x="7955280" y="1572768"/>
+            <a:ext cx="1828800" cy="201168"/>
+          </a:xfrm>
+          <a:prstGeom prst="rect">
+            <a:avLst/>
+          </a:prstGeom>
+          <a:noFill/>
+          <a:ln/>
+        </p:spPr>
+        <p:txBody>
+          <a:bodyPr wrap="square" lIns="0" tIns="0" rIns="0" bIns="0" rtlCol="0" anchor="t"/>
+          <a:lstStyle/>
+          <a:p>
+            <a:pPr indent="0" marL="0">
+              <a:buNone/>
+            </a:pPr>
+            <a:r>
+              <a:rPr lang="en-US" sz="950" b="1" spc="100" kern="0" dirty="0">
+                <a:solidFill>
+                  <a:srgbClr val="D2651F"/>
+                </a:solidFill>
+                <a:latin typeface="Calibri" pitchFamily="34" charset="0"/>
+                <a:ea typeface="Calibri" pitchFamily="34" charset="-122"/>
+                <a:cs typeface="Calibri" pitchFamily="34" charset="-120"/>
+              </a:rPr>
+              <a:t>IN THE PILOT</a:t>
+            </a:r>
+            <a:endParaRPr lang="en-US" sz="950" dirty="0"/>
+          </a:p>
+        </p:txBody>
+      </p:sp>
+      <p:sp>
+        <p:nvSpPr>
+          <p:cNvPr id="66" name="Text 62"/>
+          <p:cNvSpPr txBox="1"/>
+          <p:nvPr/>
+        </p:nvSpPr>
+        <p:spPr>
+          <a:xfrm>
+            <a:off x="9921240" y="1572768"/>
+            <a:ext cx="1737360" cy="201168"/>
+          </a:xfrm>
+          <a:prstGeom prst="rect">
+            <a:avLst/>
+          </a:prstGeom>
+          <a:noFill/>
+          <a:ln/>
+        </p:spPr>
+        <p:txBody>
+          <a:bodyPr wrap="square" lIns="0" tIns="0" rIns="0" bIns="0" rtlCol="0" anchor="t"/>
+          <a:lstStyle/>
+          <a:p>
+            <a:pPr indent="0" marL="0">
+              <a:buNone/>
+            </a:pPr>
+            <a:r>
+              <a:rPr lang="en-US" sz="950" b="1" spc="100" kern="0" dirty="0">
                 <a:solidFill>
                   <a:srgbClr val="6E6E6E"/>
                 </a:solidFill>
@@ -26104,32 +25810,32 @@
                 <a:ea typeface="Calibri" pitchFamily="34" charset="-122"/>
                 <a:cs typeface="Calibri" pitchFamily="34" charset="-120"/>
               </a:rPr>
-              <a:t>cr per line</a:t>
-            </a:r>
-            <a:endParaRPr lang="en-US" sz="1000" dirty="0"/>
-          </a:p>
-        </p:txBody>
-      </p:sp>
-      <p:sp>
-        <p:nvSpPr>
-          <p:cNvPr id="67" name="Shape 62"/>
+              <a:t>LATER</a:t>
+            </a:r>
+            <a:endParaRPr lang="en-US" sz="950" dirty="0"/>
+          </a:p>
+        </p:txBody>
+      </p:sp>
+      <p:sp>
+        <p:nvSpPr>
+          <p:cNvPr id="67" name="Shape 63"/>
           <p:cNvSpPr/>
           <p:nvPr/>
         </p:nvSpPr>
         <p:spPr>
           <a:xfrm>
-            <a:off x="9738360" y="1746504"/>
-            <a:ext cx="146304" cy="146304"/>
-          </a:xfrm>
-          <a:prstGeom prst="rect">
+            <a:off x="7973568" y="1901952"/>
+            <a:ext cx="91440" cy="91440"/>
+          </a:xfrm>
+          <a:prstGeom prst="ellipse">
             <a:avLst/>
           </a:prstGeom>
           <a:solidFill>
-            <a:srgbClr val="2B2B2B"/>
+            <a:srgbClr val="D2651F"/>
           </a:solidFill>
           <a:ln w="12700">
             <a:solidFill>
-              <a:srgbClr val="2B2B2B"/>
+              <a:srgbClr val="D2651F"/>
             </a:solidFill>
             <a:prstDash val="solid"/>
           </a:ln>
@@ -26137,30 +25843,30 @@
       </p:sp>
       <p:sp>
         <p:nvSpPr>
-          <p:cNvPr id="68" name="Text 63"/>
-          <p:cNvSpPr txBox="1"/>
-          <p:nvPr/>
-        </p:nvSpPr>
-        <p:spPr>
-          <a:xfrm>
-            <a:off x="9948672" y="1673352"/>
-            <a:ext cx="1783080" cy="182880"/>
-          </a:xfrm>
-          <a:prstGeom prst="rect">
-            <a:avLst/>
-          </a:prstGeom>
-          <a:noFill/>
-          <a:ln/>
-        </p:spPr>
-        <p:txBody>
-          <a:bodyPr wrap="square" lIns="0" tIns="0" rIns="0" bIns="0" rtlCol="0" anchor="t"/>
+          <p:cNvPr id="68" name="Text 64"/>
+          <p:cNvSpPr txBox="1"/>
+          <p:nvPr/>
+        </p:nvSpPr>
+        <p:spPr>
+          <a:xfrm>
+            <a:off x="8119872" y="1810512"/>
+            <a:ext cx="1737360" cy="329184"/>
+          </a:xfrm>
+          <a:prstGeom prst="rect">
+            <a:avLst/>
+          </a:prstGeom>
+          <a:noFill/>
+          <a:ln/>
+        </p:spPr>
+        <p:txBody>
+          <a:bodyPr wrap="square" lIns="0" tIns="0" rIns="0" bIns="0" rtlCol="0" anchor="ctr"/>
           <a:lstStyle/>
           <a:p>
             <a:pPr indent="0" marL="0">
               <a:buNone/>
             </a:pPr>
             <a:r>
-              <a:rPr lang="en-US" sz="900" dirty="0">
+              <a:rPr lang="en-US" sz="950" dirty="0">
                 <a:solidFill>
                   <a:srgbClr val="1A1A1A"/>
                 </a:solidFill>
@@ -26168,71 +25874,32 @@
                 <a:ea typeface="Calibri" pitchFamily="34" charset="-122"/>
                 <a:cs typeface="Calibri" pitchFamily="34" charset="-120"/>
               </a:rPr>
-              <a:t>Cameras &amp; lighting</a:t>
-            </a:r>
-            <a:endParaRPr lang="en-US" sz="900" dirty="0"/>
-          </a:p>
-        </p:txBody>
-      </p:sp>
-      <p:sp>
-        <p:nvSpPr>
-          <p:cNvPr id="69" name="Text 64"/>
-          <p:cNvSpPr txBox="1"/>
-          <p:nvPr/>
-        </p:nvSpPr>
-        <p:spPr>
-          <a:xfrm>
-            <a:off x="9948672" y="1837944"/>
-            <a:ext cx="1783080" cy="182880"/>
-          </a:xfrm>
-          <a:prstGeom prst="rect">
-            <a:avLst/>
-          </a:prstGeom>
-          <a:noFill/>
-          <a:ln/>
-        </p:spPr>
-        <p:txBody>
-          <a:bodyPr wrap="square" lIns="0" tIns="0" rIns="0" bIns="0" rtlCol="0" anchor="t"/>
-          <a:lstStyle/>
-          <a:p>
-            <a:pPr indent="0" marL="0">
-              <a:buNone/>
-            </a:pPr>
-            <a:r>
-              <a:rPr lang="en-US" sz="900" b="1" dirty="0">
-                <a:solidFill>
-                  <a:srgbClr val="404040"/>
-                </a:solidFill>
-                <a:latin typeface="Calibri" pitchFamily="34" charset="0"/>
-                <a:ea typeface="Calibri" pitchFamily="34" charset="-122"/>
-                <a:cs typeface="Calibri" pitchFamily="34" charset="-120"/>
-              </a:rPr>
-              <a:t>₹0.85-1.45 cr</a:t>
-            </a:r>
-            <a:endParaRPr lang="en-US" sz="900" dirty="0"/>
-          </a:p>
-        </p:txBody>
-      </p:sp>
-      <p:sp>
-        <p:nvSpPr>
-          <p:cNvPr id="70" name="Shape 65"/>
+              <a:t>One 300-series cold-rolled line, both faces</a:t>
+            </a:r>
+            <a:endParaRPr lang="en-US" sz="950" dirty="0"/>
+          </a:p>
+        </p:txBody>
+      </p:sp>
+      <p:sp>
+        <p:nvSpPr>
+          <p:cNvPr id="69" name="Shape 65"/>
           <p:cNvSpPr/>
           <p:nvPr/>
         </p:nvSpPr>
         <p:spPr>
           <a:xfrm>
-            <a:off x="9738360" y="2112264"/>
-            <a:ext cx="146304" cy="146304"/>
-          </a:xfrm>
-          <a:prstGeom prst="rect">
+            <a:off x="9939528" y="1901952"/>
+            <a:ext cx="91440" cy="91440"/>
+          </a:xfrm>
+          <a:prstGeom prst="ellipse">
             <a:avLst/>
           </a:prstGeom>
           <a:solidFill>
-            <a:srgbClr val="C4561A"/>
+            <a:srgbClr val="9E9E9E"/>
           </a:solidFill>
           <a:ln w="12700">
             <a:solidFill>
-              <a:srgbClr val="C4561A"/>
+              <a:srgbClr val="9E9E9E"/>
             </a:solidFill>
             <a:prstDash val="solid"/>
           </a:ln>
@@ -26240,69 +25907,30 @@
       </p:sp>
       <p:sp>
         <p:nvSpPr>
-          <p:cNvPr id="71" name="Text 66"/>
-          <p:cNvSpPr txBox="1"/>
-          <p:nvPr/>
-        </p:nvSpPr>
-        <p:spPr>
-          <a:xfrm>
-            <a:off x="9948672" y="2039112"/>
-            <a:ext cx="1783080" cy="182880"/>
-          </a:xfrm>
-          <a:prstGeom prst="rect">
-            <a:avLst/>
-          </a:prstGeom>
-          <a:noFill/>
-          <a:ln/>
-        </p:spPr>
-        <p:txBody>
-          <a:bodyPr wrap="square" lIns="0" tIns="0" rIns="0" bIns="0" rtlCol="0" anchor="t"/>
+          <p:cNvPr id="70" name="Text 66"/>
+          <p:cNvSpPr txBox="1"/>
+          <p:nvPr/>
+        </p:nvSpPr>
+        <p:spPr>
+          <a:xfrm>
+            <a:off x="10085832" y="1810512"/>
+            <a:ext cx="1645920" cy="329184"/>
+          </a:xfrm>
+          <a:prstGeom prst="rect">
+            <a:avLst/>
+          </a:prstGeom>
+          <a:noFill/>
+          <a:ln/>
+        </p:spPr>
+        <p:txBody>
+          <a:bodyPr wrap="square" lIns="0" tIns="0" rIns="0" bIns="0" rtlCol="0" anchor="ctr"/>
           <a:lstStyle/>
           <a:p>
             <a:pPr indent="0" marL="0">
               <a:buNone/>
             </a:pPr>
             <a:r>
-              <a:rPr lang="en-US" sz="900" dirty="0">
-                <a:solidFill>
-                  <a:srgbClr val="1A1A1A"/>
-                </a:solidFill>
-                <a:latin typeface="Calibri" pitchFamily="34" charset="0"/>
-                <a:ea typeface="Calibri" pitchFamily="34" charset="-122"/>
-                <a:cs typeface="Calibri" pitchFamily="34" charset="-120"/>
-              </a:rPr>
-              <a:t>Installation &amp; integration</a:t>
-            </a:r>
-            <a:endParaRPr lang="en-US" sz="900" dirty="0"/>
-          </a:p>
-        </p:txBody>
-      </p:sp>
-      <p:sp>
-        <p:nvSpPr>
-          <p:cNvPr id="72" name="Text 67"/>
-          <p:cNvSpPr txBox="1"/>
-          <p:nvPr/>
-        </p:nvSpPr>
-        <p:spPr>
-          <a:xfrm>
-            <a:off x="9948672" y="2203704"/>
-            <a:ext cx="1783080" cy="182880"/>
-          </a:xfrm>
-          <a:prstGeom prst="rect">
-            <a:avLst/>
-          </a:prstGeom>
-          <a:noFill/>
-          <a:ln/>
-        </p:spPr>
-        <p:txBody>
-          <a:bodyPr wrap="square" lIns="0" tIns="0" rIns="0" bIns="0" rtlCol="0" anchor="t"/>
-          <a:lstStyle/>
-          <a:p>
-            <a:pPr indent="0" marL="0">
-              <a:buNone/>
-            </a:pPr>
-            <a:r>
-              <a:rPr lang="en-US" sz="900" b="1" dirty="0">
+              <a:rPr lang="en-US" sz="950" dirty="0">
                 <a:solidFill>
                   <a:srgbClr val="404040"/>
                 </a:solidFill>
@@ -26310,32 +25938,32 @@
                 <a:ea typeface="Calibri" pitchFamily="34" charset="-122"/>
                 <a:cs typeface="Calibri" pitchFamily="34" charset="-120"/>
               </a:rPr>
-              <a:t>₹0.9-1.5 cr</a:t>
-            </a:r>
-            <a:endParaRPr lang="en-US" sz="900" dirty="0"/>
-          </a:p>
-        </p:txBody>
-      </p:sp>
-      <p:sp>
-        <p:nvSpPr>
-          <p:cNvPr id="73" name="Shape 68"/>
+              <a:t>Hot end and caster-side inspection</a:t>
+            </a:r>
+            <a:endParaRPr lang="en-US" sz="950" dirty="0"/>
+          </a:p>
+        </p:txBody>
+      </p:sp>
+      <p:sp>
+        <p:nvSpPr>
+          <p:cNvPr id="71" name="Shape 67"/>
           <p:cNvSpPr/>
           <p:nvPr/>
         </p:nvSpPr>
         <p:spPr>
           <a:xfrm>
-            <a:off x="9738360" y="2478024"/>
-            <a:ext cx="146304" cy="146304"/>
-          </a:xfrm>
-          <a:prstGeom prst="rect">
+            <a:off x="7973568" y="2267712"/>
+            <a:ext cx="91440" cy="91440"/>
+          </a:xfrm>
+          <a:prstGeom prst="ellipse">
             <a:avLst/>
           </a:prstGeom>
           <a:solidFill>
-            <a:srgbClr val="EC9352"/>
+            <a:srgbClr val="D2651F"/>
           </a:solidFill>
           <a:ln w="12700">
             <a:solidFill>
-              <a:srgbClr val="EC9352"/>
+              <a:srgbClr val="D2651F"/>
             </a:solidFill>
             <a:prstDash val="solid"/>
           </a:ln>
@@ -26343,30 +25971,30 @@
       </p:sp>
       <p:sp>
         <p:nvSpPr>
-          <p:cNvPr id="74" name="Text 69"/>
-          <p:cNvSpPr txBox="1"/>
-          <p:nvPr/>
-        </p:nvSpPr>
-        <p:spPr>
-          <a:xfrm>
-            <a:off x="9948672" y="2404872"/>
-            <a:ext cx="1783080" cy="182880"/>
-          </a:xfrm>
-          <a:prstGeom prst="rect">
-            <a:avLst/>
-          </a:prstGeom>
-          <a:noFill/>
-          <a:ln/>
-        </p:spPr>
-        <p:txBody>
-          <a:bodyPr wrap="square" lIns="0" tIns="0" rIns="0" bIns="0" rtlCol="0" anchor="t"/>
+          <p:cNvPr id="72" name="Text 68"/>
+          <p:cNvSpPr txBox="1"/>
+          <p:nvPr/>
+        </p:nvSpPr>
+        <p:spPr>
+          <a:xfrm>
+            <a:off x="8119872" y="2176272"/>
+            <a:ext cx="1737360" cy="329184"/>
+          </a:xfrm>
+          <a:prstGeom prst="rect">
+            <a:avLst/>
+          </a:prstGeom>
+          <a:noFill/>
+          <a:ln/>
+        </p:spPr>
+        <p:txBody>
+          <a:bodyPr wrap="square" lIns="0" tIns="0" rIns="0" bIns="0" rtlCol="0" anchor="ctr"/>
           <a:lstStyle/>
           <a:p>
             <a:pPr indent="0" marL="0">
               <a:buNone/>
             </a:pPr>
             <a:r>
-              <a:rPr lang="en-US" sz="900" dirty="0">
+              <a:rPr lang="en-US" sz="950" dirty="0">
                 <a:solidFill>
                   <a:srgbClr val="1A1A1A"/>
                 </a:solidFill>
@@ -26374,71 +26002,32 @@
                 <a:ea typeface="Calibri" pitchFamily="34" charset="-122"/>
                 <a:cs typeface="Calibri" pitchFamily="34" charset="-120"/>
               </a:rPr>
-              <a:t>Computing hardware</a:t>
-            </a:r>
-            <a:endParaRPr lang="en-US" sz="900" dirty="0"/>
-          </a:p>
-        </p:txBody>
-      </p:sp>
-      <p:sp>
-        <p:nvSpPr>
-          <p:cNvPr id="75" name="Text 70"/>
-          <p:cNvSpPr txBox="1"/>
-          <p:nvPr/>
-        </p:nvSpPr>
-        <p:spPr>
-          <a:xfrm>
-            <a:off x="9948672" y="2569464"/>
-            <a:ext cx="1783080" cy="182880"/>
-          </a:xfrm>
-          <a:prstGeom prst="rect">
-            <a:avLst/>
-          </a:prstGeom>
-          <a:noFill/>
-          <a:ln/>
-        </p:spPr>
-        <p:txBody>
-          <a:bodyPr wrap="square" lIns="0" tIns="0" rIns="0" bIns="0" rtlCol="0" anchor="t"/>
-          <a:lstStyle/>
-          <a:p>
-            <a:pPr indent="0" marL="0">
-              <a:buNone/>
-            </a:pPr>
-            <a:r>
-              <a:rPr lang="en-US" sz="900" b="1" dirty="0">
-                <a:solidFill>
-                  <a:srgbClr val="404040"/>
-                </a:solidFill>
-                <a:latin typeface="Calibri" pitchFamily="34" charset="0"/>
-                <a:ea typeface="Calibri" pitchFamily="34" charset="-122"/>
-                <a:cs typeface="Calibri" pitchFamily="34" charset="-120"/>
-              </a:rPr>
-              <a:t>₹0.45-0.75 cr</a:t>
-            </a:r>
-            <a:endParaRPr lang="en-US" sz="900" dirty="0"/>
-          </a:p>
-        </p:txBody>
-      </p:sp>
-      <p:sp>
-        <p:nvSpPr>
-          <p:cNvPr id="76" name="Shape 71"/>
+              <a:t>2B and BA finishes</a:t>
+            </a:r>
+            <a:endParaRPr lang="en-US" sz="950" dirty="0"/>
+          </a:p>
+        </p:txBody>
+      </p:sp>
+      <p:sp>
+        <p:nvSpPr>
+          <p:cNvPr id="73" name="Shape 69"/>
           <p:cNvSpPr/>
           <p:nvPr/>
         </p:nvSpPr>
         <p:spPr>
           <a:xfrm>
-            <a:off x="9738360" y="2843784"/>
-            <a:ext cx="146304" cy="146304"/>
-          </a:xfrm>
-          <a:prstGeom prst="rect">
+            <a:off x="9939528" y="2267712"/>
+            <a:ext cx="91440" cy="91440"/>
+          </a:xfrm>
+          <a:prstGeom prst="ellipse">
             <a:avLst/>
           </a:prstGeom>
           <a:solidFill>
-            <a:srgbClr val="F5BE92"/>
+            <a:srgbClr val="9E9E9E"/>
           </a:solidFill>
           <a:ln w="12700">
             <a:solidFill>
-              <a:srgbClr val="F5BE92"/>
+              <a:srgbClr val="9E9E9E"/>
             </a:solidFill>
             <a:prstDash val="solid"/>
           </a:ln>
@@ -26446,30 +26035,94 @@
       </p:sp>
       <p:sp>
         <p:nvSpPr>
-          <p:cNvPr id="77" name="Text 72"/>
-          <p:cNvSpPr txBox="1"/>
-          <p:nvPr/>
-        </p:nvSpPr>
-        <p:spPr>
-          <a:xfrm>
-            <a:off x="9948672" y="2770632"/>
-            <a:ext cx="1783080" cy="182880"/>
-          </a:xfrm>
-          <a:prstGeom prst="rect">
-            <a:avLst/>
-          </a:prstGeom>
-          <a:noFill/>
-          <a:ln/>
-        </p:spPr>
-        <p:txBody>
-          <a:bodyPr wrap="square" lIns="0" tIns="0" rIns="0" bIns="0" rtlCol="0" anchor="t"/>
+          <p:cNvPr id="74" name="Text 70"/>
+          <p:cNvSpPr txBox="1"/>
+          <p:nvPr/>
+        </p:nvSpPr>
+        <p:spPr>
+          <a:xfrm>
+            <a:off x="10085832" y="2176272"/>
+            <a:ext cx="1645920" cy="329184"/>
+          </a:xfrm>
+          <a:prstGeom prst="rect">
+            <a:avLst/>
+          </a:prstGeom>
+          <a:noFill/>
+          <a:ln/>
+        </p:spPr>
+        <p:txBody>
+          <a:bodyPr wrap="square" lIns="0" tIns="0" rIns="0" bIns="0" rtlCol="0" anchor="ctr"/>
           <a:lstStyle/>
           <a:p>
             <a:pPr indent="0" marL="0">
               <a:buNone/>
             </a:pPr>
             <a:r>
-              <a:rPr lang="en-US" sz="900" dirty="0">
+              <a:rPr lang="en-US" sz="950" dirty="0">
+                <a:solidFill>
+                  <a:srgbClr val="404040"/>
+                </a:solidFill>
+                <a:latin typeface="Calibri" pitchFamily="34" charset="0"/>
+                <a:ea typeface="Calibri" pitchFamily="34" charset="-122"/>
+                <a:cs typeface="Calibri" pitchFamily="34" charset="-120"/>
+              </a:rPr>
+              <a:t>Edge cracks: needs edge cameras</a:t>
+            </a:r>
+            <a:endParaRPr lang="en-US" sz="950" dirty="0"/>
+          </a:p>
+        </p:txBody>
+      </p:sp>
+      <p:sp>
+        <p:nvSpPr>
+          <p:cNvPr id="75" name="Shape 71"/>
+          <p:cNvSpPr/>
+          <p:nvPr/>
+        </p:nvSpPr>
+        <p:spPr>
+          <a:xfrm>
+            <a:off x="7973568" y="2633472"/>
+            <a:ext cx="91440" cy="91440"/>
+          </a:xfrm>
+          <a:prstGeom prst="ellipse">
+            <a:avLst/>
+          </a:prstGeom>
+          <a:solidFill>
+            <a:srgbClr val="D2651F"/>
+          </a:solidFill>
+          <a:ln w="12700">
+            <a:solidFill>
+              <a:srgbClr val="D2651F"/>
+            </a:solidFill>
+            <a:prstDash val="solid"/>
+          </a:ln>
+        </p:spPr>
+      </p:sp>
+      <p:sp>
+        <p:nvSpPr>
+          <p:cNvPr id="76" name="Text 72"/>
+          <p:cNvSpPr txBox="1"/>
+          <p:nvPr/>
+        </p:nvSpPr>
+        <p:spPr>
+          <a:xfrm>
+            <a:off x="8119872" y="2542032"/>
+            <a:ext cx="1737360" cy="329184"/>
+          </a:xfrm>
+          <a:prstGeom prst="rect">
+            <a:avLst/>
+          </a:prstGeom>
+          <a:noFill/>
+          <a:ln/>
+        </p:spPr>
+        <p:txBody>
+          <a:bodyPr wrap="square" lIns="0" tIns="0" rIns="0" bIns="0" rtlCol="0" anchor="ctr"/>
+          <a:lstStyle/>
+          <a:p>
+            <a:pPr indent="0" marL="0">
+              <a:buNone/>
+            </a:pPr>
+            <a:r>
+              <a:rPr lang="en-US" sz="950" dirty="0">
                 <a:solidFill>
                   <a:srgbClr val="1A1A1A"/>
                 </a:solidFill>
@@ -26477,38 +26130,63 @@
                 <a:ea typeface="Calibri" pitchFamily="34" charset="-122"/>
                 <a:cs typeface="Calibri" pitchFamily="34" charset="-120"/>
               </a:rPr>
-              <a:t>Labelling JSL strip</a:t>
-            </a:r>
-            <a:endParaRPr lang="en-US" sz="900" dirty="0"/>
-          </a:p>
-        </p:txBody>
-      </p:sp>
-      <p:sp>
-        <p:nvSpPr>
-          <p:cNvPr id="78" name="Text 73"/>
-          <p:cNvSpPr txBox="1"/>
-          <p:nvPr/>
-        </p:nvSpPr>
-        <p:spPr>
-          <a:xfrm>
-            <a:off x="9948672" y="2935224"/>
-            <a:ext cx="1783080" cy="182880"/>
-          </a:xfrm>
-          <a:prstGeom prst="rect">
-            <a:avLst/>
-          </a:prstGeom>
-          <a:noFill/>
-          <a:ln/>
-        </p:spPr>
-        <p:txBody>
-          <a:bodyPr wrap="square" lIns="0" tIns="0" rIns="0" bIns="0" rtlCol="0" anchor="t"/>
+              <a:t>Six defect families, plus unclassified</a:t>
+            </a:r>
+            <a:endParaRPr lang="en-US" sz="950" dirty="0"/>
+          </a:p>
+        </p:txBody>
+      </p:sp>
+      <p:sp>
+        <p:nvSpPr>
+          <p:cNvPr id="77" name="Shape 73"/>
+          <p:cNvSpPr/>
+          <p:nvPr/>
+        </p:nvSpPr>
+        <p:spPr>
+          <a:xfrm>
+            <a:off x="9939528" y="2633472"/>
+            <a:ext cx="91440" cy="91440"/>
+          </a:xfrm>
+          <a:prstGeom prst="ellipse">
+            <a:avLst/>
+          </a:prstGeom>
+          <a:solidFill>
+            <a:srgbClr val="9E9E9E"/>
+          </a:solidFill>
+          <a:ln w="12700">
+            <a:solidFill>
+              <a:srgbClr val="9E9E9E"/>
+            </a:solidFill>
+            <a:prstDash val="solid"/>
+          </a:ln>
+        </p:spPr>
+      </p:sp>
+      <p:sp>
+        <p:nvSpPr>
+          <p:cNvPr id="78" name="Text 74"/>
+          <p:cNvSpPr txBox="1"/>
+          <p:nvPr/>
+        </p:nvSpPr>
+        <p:spPr>
+          <a:xfrm>
+            <a:off x="10085832" y="2542032"/>
+            <a:ext cx="1645920" cy="329184"/>
+          </a:xfrm>
+          <a:prstGeom prst="rect">
+            <a:avLst/>
+          </a:prstGeom>
+          <a:noFill/>
+          <a:ln/>
+        </p:spPr>
+        <p:txBody>
+          <a:bodyPr wrap="square" lIns="0" tIns="0" rIns="0" bIns="0" rtlCol="0" anchor="ctr"/>
           <a:lstStyle/>
           <a:p>
             <a:pPr indent="0" marL="0">
               <a:buNone/>
             </a:pPr>
             <a:r>
-              <a:rPr lang="en-US" sz="900" b="1" dirty="0">
+              <a:rPr lang="en-US" sz="950" dirty="0">
                 <a:solidFill>
                   <a:srgbClr val="404040"/>
                 </a:solidFill>
@@ -26516,38 +26194,191 @@
                 <a:ea typeface="Calibri" pitchFamily="34" charset="-122"/>
                 <a:cs typeface="Calibri" pitchFamily="34" charset="-120"/>
               </a:rPr>
-              <a:t>₹0.3-0.5 cr</a:t>
-            </a:r>
-            <a:endParaRPr lang="en-US" sz="900" dirty="0"/>
-          </a:p>
-        </p:txBody>
-      </p:sp>
-      <p:sp>
-        <p:nvSpPr>
-          <p:cNvPr id="79" name="Text 74"/>
-          <p:cNvSpPr txBox="1"/>
-          <p:nvPr/>
-        </p:nvSpPr>
-        <p:spPr>
-          <a:xfrm>
-            <a:off x="9738360" y="3172968"/>
-            <a:ext cx="1965960" cy="201168"/>
-          </a:xfrm>
-          <a:prstGeom prst="rect">
-            <a:avLst/>
-          </a:prstGeom>
-          <a:noFill/>
-          <a:ln/>
-        </p:spPr>
-        <p:txBody>
-          <a:bodyPr wrap="square" lIns="0" tIns="0" rIns="0" bIns="0" rtlCol="0" anchor="t"/>
+              <a:t>Automatic process correction</a:t>
+            </a:r>
+            <a:endParaRPr lang="en-US" sz="950" dirty="0"/>
+          </a:p>
+        </p:txBody>
+      </p:sp>
+      <p:sp>
+        <p:nvSpPr>
+          <p:cNvPr id="79" name="Shape 75"/>
+          <p:cNvSpPr/>
+          <p:nvPr/>
+        </p:nvSpPr>
+        <p:spPr>
+          <a:xfrm>
+            <a:off x="7973568" y="2999232"/>
+            <a:ext cx="91440" cy="91440"/>
+          </a:xfrm>
+          <a:prstGeom prst="ellipse">
+            <a:avLst/>
+          </a:prstGeom>
+          <a:solidFill>
+            <a:srgbClr val="D2651F"/>
+          </a:solidFill>
+          <a:ln w="12700">
+            <a:solidFill>
+              <a:srgbClr val="D2651F"/>
+            </a:solidFill>
+            <a:prstDash val="solid"/>
+          </a:ln>
+        </p:spPr>
+      </p:sp>
+      <p:sp>
+        <p:nvSpPr>
+          <p:cNvPr id="80" name="Text 76"/>
+          <p:cNvSpPr txBox="1"/>
+          <p:nvPr/>
+        </p:nvSpPr>
+        <p:spPr>
+          <a:xfrm>
+            <a:off x="8119872" y="2907792"/>
+            <a:ext cx="1737360" cy="329184"/>
+          </a:xfrm>
+          <a:prstGeom prst="rect">
+            <a:avLst/>
+          </a:prstGeom>
+          <a:noFill/>
+          <a:ln/>
+        </p:spPr>
+        <p:txBody>
+          <a:bodyPr wrap="square" lIns="0" tIns="0" rIns="0" bIns="0" rtlCol="0" anchor="ctr"/>
           <a:lstStyle/>
           <a:p>
             <a:pPr indent="0" marL="0">
               <a:buNone/>
             </a:pPr>
             <a:r>
-              <a:rPr lang="en-US" sz="900" i="1" dirty="0">
+              <a:rPr lang="en-US" sz="950" dirty="0">
+                <a:solidFill>
+                  <a:srgbClr val="1A1A1A"/>
+                </a:solidFill>
+                <a:latin typeface="Calibri" pitchFamily="34" charset="0"/>
+                <a:ea typeface="Calibri" pitchFamily="34" charset="-122"/>
+                <a:cs typeface="Calibri" pitchFamily="34" charset="-120"/>
+              </a:rPr>
+              <a:t>Read-only until P3; one write path</a:t>
+            </a:r>
+            <a:endParaRPr lang="en-US" sz="950" dirty="0"/>
+          </a:p>
+        </p:txBody>
+      </p:sp>
+      <p:sp>
+        <p:nvSpPr>
+          <p:cNvPr id="81" name="Shape 77"/>
+          <p:cNvSpPr/>
+          <p:nvPr/>
+        </p:nvSpPr>
+        <p:spPr>
+          <a:xfrm>
+            <a:off x="9939528" y="2999232"/>
+            <a:ext cx="91440" cy="91440"/>
+          </a:xfrm>
+          <a:prstGeom prst="ellipse">
+            <a:avLst/>
+          </a:prstGeom>
+          <a:solidFill>
+            <a:srgbClr val="9E9E9E"/>
+          </a:solidFill>
+          <a:ln w="12700">
+            <a:solidFill>
+              <a:srgbClr val="9E9E9E"/>
+            </a:solidFill>
+            <a:prstDash val="solid"/>
+          </a:ln>
+        </p:spPr>
+      </p:sp>
+      <p:sp>
+        <p:nvSpPr>
+          <p:cNvPr id="82" name="Text 78"/>
+          <p:cNvSpPr txBox="1"/>
+          <p:nvPr/>
+        </p:nvSpPr>
+        <p:spPr>
+          <a:xfrm>
+            <a:off x="10085832" y="2907792"/>
+            <a:ext cx="1645920" cy="329184"/>
+          </a:xfrm>
+          <a:prstGeom prst="rect">
+            <a:avLst/>
+          </a:prstGeom>
+          <a:noFill/>
+          <a:ln/>
+        </p:spPr>
+        <p:txBody>
+          <a:bodyPr wrap="square" lIns="0" tIns="0" rIns="0" bIns="0" rtlCol="0" anchor="ctr"/>
+          <a:lstStyle/>
+          <a:p>
+            <a:pPr indent="0" marL="0">
+              <a:buNone/>
+            </a:pPr>
+            <a:r>
+              <a:rPr lang="en-US" sz="950" dirty="0">
+                <a:solidFill>
+                  <a:srgbClr val="404040"/>
+                </a:solidFill>
+                <a:latin typeface="Calibri" pitchFamily="34" charset="0"/>
+                <a:ea typeface="Calibri" pitchFamily="34" charset="-122"/>
+                <a:cs typeface="Calibri" pitchFamily="34" charset="-120"/>
+              </a:rPr>
+              <a:t>Other plants: after P4</a:t>
+            </a:r>
+            <a:endParaRPr lang="en-US" sz="950" dirty="0"/>
+          </a:p>
+        </p:txBody>
+      </p:sp>
+      <p:sp>
+        <p:nvSpPr>
+          <p:cNvPr id="83" name="Shape 79"/>
+          <p:cNvSpPr/>
+          <p:nvPr/>
+        </p:nvSpPr>
+        <p:spPr>
+          <a:xfrm>
+            <a:off x="7955280" y="3310128"/>
+            <a:ext cx="3730752" cy="9144"/>
+          </a:xfrm>
+          <a:prstGeom prst="rect">
+            <a:avLst/>
+          </a:prstGeom>
+          <a:solidFill>
+            <a:srgbClr val="D9D9D9"/>
+          </a:solidFill>
+          <a:ln w="12700">
+            <a:solidFill>
+              <a:srgbClr val="D9D9D9"/>
+            </a:solidFill>
+            <a:prstDash val="solid"/>
+          </a:ln>
+        </p:spPr>
+      </p:sp>
+      <p:sp>
+        <p:nvSpPr>
+          <p:cNvPr id="84" name="Text 80"/>
+          <p:cNvSpPr txBox="1"/>
+          <p:nvPr/>
+        </p:nvSpPr>
+        <p:spPr>
+          <a:xfrm>
+            <a:off x="7955280" y="3346704"/>
+            <a:ext cx="3749040" cy="237744"/>
+          </a:xfrm>
+          <a:prstGeom prst="rect">
+            <a:avLst/>
+          </a:prstGeom>
+          <a:noFill/>
+          <a:ln/>
+        </p:spPr>
+        <p:txBody>
+          <a:bodyPr wrap="square" lIns="0" tIns="0" rIns="0" bIns="0" rtlCol="0" anchor="ctr"/>
+          <a:lstStyle/>
+          <a:p>
+            <a:pPr indent="0" marL="0">
+              <a:buNone/>
+            </a:pPr>
+            <a:r>
+              <a:rPr lang="en-US" sz="950" dirty="0">
                 <a:solidFill>
                   <a:srgbClr val="6E6E6E"/>
                 </a:solidFill>
@@ -26555,52 +26386,41 @@
                 <a:ea typeface="Calibri" pitchFamily="34" charset="-122"/>
                 <a:cs typeface="Calibri" pitchFamily="34" charset="-120"/>
               </a:rPr>
-              <a:t>Running cost ~₹0.5 cr a year</a:t>
-            </a:r>
-            <a:endParaRPr lang="en-US" sz="900" dirty="0"/>
-          </a:p>
-        </p:txBody>
-      </p:sp>
-      <p:sp>
-        <p:nvSpPr>
-          <p:cNvPr id="80" name="Text 75"/>
-          <p:cNvSpPr txBox="1"/>
-          <p:nvPr/>
-        </p:nvSpPr>
-        <p:spPr>
-          <a:xfrm>
-            <a:off x="7909560" y="3401568"/>
-            <a:ext cx="3749040" cy="201168"/>
-          </a:xfrm>
-          <a:prstGeom prst="rect">
-            <a:avLst/>
-          </a:prstGeom>
-          <a:noFill/>
-          <a:ln/>
-        </p:spPr>
-        <p:txBody>
-          <a:bodyPr wrap="square" lIns="0" tIns="0" rIns="0" bIns="0" rtlCol="0" anchor="t"/>
-          <a:lstStyle/>
-          <a:p>
+              <a:t>Decision owner: </a:t>
+            </a:r>
             <a:pPr indent="0" marL="0">
               <a:buNone/>
             </a:pPr>
             <a:r>
-              <a:rPr lang="en-US" sz="900" dirty="0">
-                <a:solidFill>
-                  <a:srgbClr val="404040"/>
-                </a:solidFill>
-                <a:latin typeface="Calibri" pitchFamily="34" charset="0"/>
-                <a:ea typeface="Calibri" pitchFamily="34" charset="-122"/>
-                <a:cs typeface="Calibri" pitchFamily="34" charset="-120"/>
-              </a:rPr>
-              <a:t>Commercial system: </a:t>
+              <a:rPr lang="en-US" sz="950" b="1" dirty="0">
+                <a:solidFill>
+                  <a:srgbClr val="1A1A1A"/>
+                </a:solidFill>
+                <a:latin typeface="Calibri" pitchFamily="34" charset="0"/>
+                <a:ea typeface="Calibri" pitchFamily="34" charset="-122"/>
+                <a:cs typeface="Calibri" pitchFamily="34" charset="-120"/>
+              </a:rPr>
+              <a:t>JSL Quality</a:t>
             </a:r>
             <a:pPr indent="0" marL="0">
               <a:buNone/>
             </a:pPr>
             <a:r>
-              <a:rPr lang="en-US" sz="900" b="1" dirty="0">
+              <a:rPr lang="en-US" sz="950" dirty="0">
+                <a:solidFill>
+                  <a:srgbClr val="6E6E6E"/>
+                </a:solidFill>
+                <a:latin typeface="Calibri" pitchFamily="34" charset="0"/>
+                <a:ea typeface="Calibri" pitchFamily="34" charset="-122"/>
+                <a:cs typeface="Calibri" pitchFamily="34" charset="-120"/>
+              </a:rPr>
+              <a:t>   Integration: </a:t>
+            </a:r>
+            <a:pPr indent="0" marL="0">
+              <a:buNone/>
+            </a:pPr>
+            <a:r>
+              <a:rPr lang="en-US" sz="950" b="1" dirty="0">
                 <a:solidFill>
                   <a:srgbClr val="1A1A1A"/>
                 </a:solidFill>
@@ -26608,15 +26428,15 @@
                 <a:ea typeface="Calibri" pitchFamily="34" charset="-122"/>
                 <a:cs typeface="Calibri" pitchFamily="34" charset="-120"/>
               </a:rPr>
-              <a:t>₹10-29 cr per line</a:t>
-            </a:r>
-            <a:endParaRPr lang="en-US" sz="900" dirty="0"/>
-          </a:p>
-        </p:txBody>
-      </p:sp>
-      <p:sp>
-        <p:nvSpPr>
-          <p:cNvPr id="81" name="Shape 76"/>
+              <a:t>Pragati team</a:t>
+            </a:r>
+            <a:endParaRPr lang="en-US" sz="950" dirty="0"/>
+          </a:p>
+        </p:txBody>
+      </p:sp>
+      <p:sp>
+        <p:nvSpPr>
+          <p:cNvPr id="85" name="Shape 81"/>
           <p:cNvSpPr/>
           <p:nvPr/>
         </p:nvSpPr>
@@ -26641,7 +26461,7 @@
       </p:sp>
       <p:sp>
         <p:nvSpPr>
-          <p:cNvPr id="82" name="Text 77"/>
+          <p:cNvPr id="86" name="Text 82"/>
           <p:cNvSpPr txBox="1"/>
           <p:nvPr/>
         </p:nvSpPr>
@@ -28099,7 +27919,7 @@
       </p:graphicFrame>
       <p:sp>
         <p:nvSpPr>
-          <p:cNvPr id="84" name="Shape 78"/>
+          <p:cNvPr id="88" name="Shape 83"/>
           <p:cNvSpPr/>
           <p:nvPr/>
         </p:nvSpPr>
@@ -28124,7 +27944,7 @@
       </p:sp>
       <p:sp>
         <p:nvSpPr>
-          <p:cNvPr id="85" name="Text 79"/>
+          <p:cNvPr id="89" name="Text 84"/>
           <p:cNvSpPr txBox="1"/>
           <p:nvPr/>
         </p:nvSpPr>
@@ -28163,7 +27983,7 @@
       </p:sp>
       <p:sp>
         <p:nvSpPr>
-          <p:cNvPr id="86" name="Shape 80"/>
+          <p:cNvPr id="90" name="Shape 85"/>
           <p:cNvSpPr/>
           <p:nvPr/>
         </p:nvSpPr>
@@ -28190,7 +28010,7 @@
       </p:sp>
       <p:sp>
         <p:nvSpPr>
-          <p:cNvPr id="87" name="Text 81"/>
+          <p:cNvPr id="91" name="Text 86"/>
           <p:cNvSpPr txBox="1"/>
           <p:nvPr/>
         </p:nvSpPr>
@@ -28229,7 +28049,7 @@
       </p:sp>
       <p:sp>
         <p:nvSpPr>
-          <p:cNvPr id="88" name="Text 82"/>
+          <p:cNvPr id="92" name="Text 87"/>
           <p:cNvSpPr txBox="1"/>
           <p:nvPr/>
         </p:nvSpPr>
@@ -28268,7 +28088,7 @@
       </p:sp>
       <p:sp>
         <p:nvSpPr>
-          <p:cNvPr id="89" name="Text 83"/>
+          <p:cNvPr id="93" name="Text 88"/>
           <p:cNvSpPr txBox="1"/>
           <p:nvPr/>
         </p:nvSpPr>
@@ -28307,7 +28127,7 @@
       </p:sp>
       <p:sp>
         <p:nvSpPr>
-          <p:cNvPr id="90" name="Shape 84"/>
+          <p:cNvPr id="94" name="Shape 89"/>
           <p:cNvSpPr/>
           <p:nvPr/>
         </p:nvSpPr>
@@ -28334,7 +28154,7 @@
       </p:sp>
       <p:sp>
         <p:nvSpPr>
-          <p:cNvPr id="91" name="Text 85"/>
+          <p:cNvPr id="95" name="Text 90"/>
           <p:cNvSpPr txBox="1"/>
           <p:nvPr/>
         </p:nvSpPr>
@@ -28373,7 +28193,7 @@
       </p:sp>
       <p:sp>
         <p:nvSpPr>
-          <p:cNvPr id="92" name="Text 86"/>
+          <p:cNvPr id="96" name="Text 91"/>
           <p:cNvSpPr txBox="1"/>
           <p:nvPr/>
         </p:nvSpPr>
@@ -28412,7 +28232,7 @@
       </p:sp>
       <p:sp>
         <p:nvSpPr>
-          <p:cNvPr id="93" name="Text 87"/>
+          <p:cNvPr id="97" name="Text 92"/>
           <p:cNvSpPr txBox="1"/>
           <p:nvPr/>
         </p:nvSpPr>
@@ -28451,7 +28271,7 @@
       </p:sp>
       <p:sp>
         <p:nvSpPr>
-          <p:cNvPr id="94" name="Shape 88"/>
+          <p:cNvPr id="98" name="Shape 93"/>
           <p:cNvSpPr/>
           <p:nvPr/>
         </p:nvSpPr>
@@ -28478,7 +28298,7 @@
       </p:sp>
       <p:sp>
         <p:nvSpPr>
-          <p:cNvPr id="95" name="Text 89"/>
+          <p:cNvPr id="99" name="Text 94"/>
           <p:cNvSpPr txBox="1"/>
           <p:nvPr/>
         </p:nvSpPr>
@@ -28517,7 +28337,7 @@
       </p:sp>
       <p:sp>
         <p:nvSpPr>
-          <p:cNvPr id="96" name="Text 90"/>
+          <p:cNvPr id="100" name="Text 95"/>
           <p:cNvSpPr txBox="1"/>
           <p:nvPr/>
         </p:nvSpPr>
@@ -28556,7 +28376,7 @@
       </p:sp>
       <p:sp>
         <p:nvSpPr>
-          <p:cNvPr id="97" name="Text 91"/>
+          <p:cNvPr id="101" name="Text 96"/>
           <p:cNvSpPr txBox="1"/>
           <p:nvPr/>
         </p:nvSpPr>
@@ -28595,7 +28415,7 @@
       </p:sp>
       <p:sp>
         <p:nvSpPr>
-          <p:cNvPr id="98" name="Shape 92"/>
+          <p:cNvPr id="102" name="Shape 97"/>
           <p:cNvSpPr/>
           <p:nvPr/>
         </p:nvSpPr>
@@ -28622,7 +28442,7 @@
       </p:sp>
       <p:sp>
         <p:nvSpPr>
-          <p:cNvPr id="99" name="Text 93"/>
+          <p:cNvPr id="103" name="Text 98"/>
           <p:cNvSpPr txBox="1"/>
           <p:nvPr/>
         </p:nvSpPr>
@@ -28661,7 +28481,7 @@
       </p:sp>
       <p:sp>
         <p:nvSpPr>
-          <p:cNvPr id="100" name="Text 94"/>
+          <p:cNvPr id="104" name="Text 99"/>
           <p:cNvSpPr txBox="1"/>
           <p:nvPr/>
         </p:nvSpPr>
@@ -28700,7 +28520,7 @@
       </p:sp>
       <p:sp>
         <p:nvSpPr>
-          <p:cNvPr id="101" name="Text 95"/>
+          <p:cNvPr id="105" name="Text 100"/>
           <p:cNvSpPr txBox="1"/>
           <p:nvPr/>
         </p:nvSpPr>
@@ -28739,7 +28559,7 @@
       </p:sp>
       <p:sp>
         <p:nvSpPr>
-          <p:cNvPr id="102" name="Shape 96"/>
+          <p:cNvPr id="106" name="Shape 101"/>
           <p:cNvSpPr/>
           <p:nvPr/>
         </p:nvSpPr>
@@ -28766,7 +28586,7 @@
       </p:sp>
       <p:sp>
         <p:nvSpPr>
-          <p:cNvPr id="103" name="Text 97"/>
+          <p:cNvPr id="107" name="Text 102"/>
           <p:cNvSpPr txBox="1"/>
           <p:nvPr/>
         </p:nvSpPr>
@@ -28805,7 +28625,7 @@
       </p:sp>
       <p:sp>
         <p:nvSpPr>
-          <p:cNvPr id="104" name="Text 98"/>
+          <p:cNvPr id="108" name="Text 103"/>
           <p:cNvSpPr txBox="1"/>
           <p:nvPr/>
         </p:nvSpPr>
@@ -28844,7 +28664,7 @@
       </p:sp>
       <p:sp>
         <p:nvSpPr>
-          <p:cNvPr id="105" name="Text 99"/>
+          <p:cNvPr id="109" name="Text 104"/>
           <p:cNvSpPr txBox="1"/>
           <p:nvPr/>
         </p:nvSpPr>
@@ -28883,7 +28703,7 @@
       </p:sp>
       <p:sp>
         <p:nvSpPr>
-          <p:cNvPr id="106" name="Shape 100"/>
+          <p:cNvPr id="110" name="Shape 105"/>
           <p:cNvSpPr/>
           <p:nvPr/>
         </p:nvSpPr>
@@ -28910,7 +28730,7 @@
       </p:sp>
       <p:sp>
         <p:nvSpPr>
-          <p:cNvPr id="107" name="Text 101"/>
+          <p:cNvPr id="111" name="Text 106"/>
           <p:cNvSpPr txBox="1"/>
           <p:nvPr/>
         </p:nvSpPr>
@@ -28949,7 +28769,7 @@
       </p:sp>
       <p:sp>
         <p:nvSpPr>
-          <p:cNvPr id="108" name="Text 102"/>
+          <p:cNvPr id="112" name="Text 107"/>
           <p:cNvSpPr txBox="1"/>
           <p:nvPr/>
         </p:nvSpPr>
@@ -28988,7 +28808,7 @@
       </p:sp>
       <p:sp>
         <p:nvSpPr>
-          <p:cNvPr id="109" name="Text 103"/>
+          <p:cNvPr id="113" name="Text 108"/>
           <p:cNvSpPr txBox="1"/>
           <p:nvPr/>
         </p:nvSpPr>
@@ -29542,7 +29362,7 @@
                 <a:ea typeface="Calibri" pitchFamily="34" charset="-122"/>
                 <a:cs typeface="Calibri" pitchFamily="34" charset="-120"/>
               </a:rPr>
-              <a:t>At a conservative 1% downgrade rate one line pays back in ~2.2 years; the fleet protects ~₹13 cr a year</a:t>
+              <a:t>At a conservative 1% downgrade rate, each line has ~₹6.7 cr a year at stake; ~₹43 cr across the fleet</a:t>
             </a:r>
             <a:endParaRPr lang="en-US" sz="2000" dirty="0"/>
           </a:p>
@@ -29606,7 +29426,7 @@
                 <a:ea typeface="Calibri" pitchFamily="34" charset="-122"/>
                 <a:cs typeface="Calibri" pitchFamily="34" charset="-120"/>
               </a:rPr>
-              <a:t>IMPACT  ·  ECONOMICS  ·  ASK</a:t>
+              <a:t>IMPACT  ·  VALUE  ·  ASK</a:t>
             </a:r>
             <a:endParaRPr lang="en-US" sz="1000" dirty="0"/>
           </a:p>
@@ -29709,7 +29529,7 @@
                 <a:ea typeface="Calibri" pitchFamily="34" charset="-122"/>
                 <a:cs typeface="Calibri" pitchFamily="34" charset="-120"/>
               </a:rPr>
-              <a:t>Inputs: JSL FY26 (INR 167,407/t; 2,565,902 t). Base: 0.4 Mt line, 30% of loss recovered, ₹3.35 cr capex, ₹0.5 cr/yr run cost, 12% rate. Commercial: USD 2M at INR 95.8.</a:t>
+              <a:t>Inputs: JSL FY26 (INR 167,407/t; 2,565,902 t sold). Base case: a 0.4 Mt line, 1% downgraded at a 10% discount. Value at stake, not a savings forecast: JSL's own data sets the real figure.</a:t>
             </a:r>
             <a:endParaRPr lang="en-US" sz="900" dirty="0"/>
           </a:p>
@@ -30984,7 +30804,7 @@
                 <a:ea typeface="Calibri" pitchFamily="34" charset="-122"/>
                 <a:cs typeface="Calibri" pitchFamily="34" charset="-120"/>
               </a:rPr>
-              <a:t>₹6.7 cr pool, ₹2.0 cr/yr recovered (₹1.5 cr net). Fleet: ₹12.9 cr/yr. Non-prime coil sells 10-30% below prime, so these discounts are conservative.</a:t>
+              <a:t>₹6.7 cr a year per line; ~₹43 cr across JSL's 2.57 Mt. Non-prime coil sells 10-30% below prime, so these discounts are conservative.</a:t>
             </a:r>
             <a:endParaRPr lang="en-US" sz="950" dirty="0"/>
           </a:p>
@@ -30999,7 +30819,7 @@
         <p:spPr>
           <a:xfrm>
             <a:off x="4617720" y="1234440"/>
-            <a:ext cx="3520440" cy="274320"/>
+            <a:ext cx="7114032" cy="274320"/>
           </a:xfrm>
           <a:prstGeom prst="rect">
             <a:avLst/>
@@ -31024,7 +30844,7 @@
         <p:spPr>
           <a:xfrm>
             <a:off x="4709160" y="1234440"/>
-            <a:ext cx="3337560" cy="274320"/>
+            <a:ext cx="6931152" cy="274320"/>
           </a:xfrm>
           <a:prstGeom prst="rect">
             <a:avLst/>
@@ -31048,32 +30868,1254 @@
                 <a:ea typeface="Calibri" pitchFamily="34" charset="-122"/>
                 <a:cs typeface="Calibri" pitchFamily="34" charset="-120"/>
               </a:rPr>
-              <a:t>Cumulative cash per line, ₹ cr</a:t>
+              <a:t>Value levers, and how the pilot measures each</a:t>
             </a:r>
             <a:endParaRPr lang="en-US" sz="1100" dirty="0"/>
           </a:p>
         </p:txBody>
       </p:sp>
-      <p:sp>
-        <p:nvSpPr>
-          <p:cNvPr id="29" name="Shape 24"/>
+      <p:graphicFrame>
+        <p:nvGraphicFramePr>
+          <p:cNvPr id="17" name="Table 1"/>
+          <p:cNvGraphicFramePr>
+            <a:graphicFrameLocks noGrp="1"/>
+          </p:cNvGraphicFramePr>
+          <p:nvPr>
+            <p:extLst>
+              <p:ext uri="{D42A27DB-BD31-4B8C-83A1-F6EECF244321}">
+                <p14:modId xmlns:p14="http://schemas.microsoft.com/office/powerpoint/2010/main" val="1579011935"/>
+              </p:ext>
+            </p:extLst>
+          </p:nvPr>
+        </p:nvGraphicFramePr>
+        <p:xfrm>
+          <a:off x="4617720" y="1554480"/>
+          <a:ext cx="7114032" cy="914400"/>
+        </p:xfrm>
+        <a:graphic>
+          <a:graphicData uri="http://schemas.openxmlformats.org/drawingml/2006/table">
+            <a:tbl>
+              <a:tblPr/>
+              <a:tblGrid>
+                <a:gridCol w="1691640"/>
+                <a:gridCol w="3063240"/>
+                <a:gridCol w="2359152"/>
+              </a:tblGrid>
+              <a:tr h="274320">
+                <a:tc>
+                  <a:txBody>
+                    <a:bodyPr/>
+                    <a:lstStyle/>
+                    <a:p>
+                      <a:pPr indent="0" marL="0">
+                        <a:buNone/>
+                      </a:pPr>
+                      <a:r>
+                        <a:rPr lang="en-US" sz="950" b="1" dirty="0">
+                          <a:solidFill>
+                            <a:srgbClr val="FFFFFF"/>
+                          </a:solidFill>
+                          <a:latin typeface="Calibri" pitchFamily="34" charset="0"/>
+                          <a:ea typeface="Calibri" pitchFamily="34" charset="-122"/>
+                          <a:cs typeface="Calibri" pitchFamily="34" charset="-120"/>
+                        </a:rPr>
+                        <a:t>Value lever</a:t>
+                      </a:r>
+                      <a:endParaRPr lang="en-US" sz="950" dirty="0">
+                        <a:latin typeface="Calibri" charset="0"/>
+                        <a:ea typeface="Calibri" charset="0"/>
+                        <a:cs typeface="Calibri" charset="0"/>
+                      </a:endParaRPr>
+                    </a:p>
+                  </a:txBody>
+                  <a:tcPr marL="45720" marR="45720" marT="27432" marB="27432" anchor="ctr">
+                    <a:lnL w="6350" cap="flat" cmpd="sng" algn="ctr">
+                      <a:solidFill>
+                        <a:srgbClr val="D9D9D9"/>
+                      </a:solidFill>
+                      <a:prstDash val="solid"/>
+                      <a:round/>
+                      <a:headEnd type="none" w="med" len="med"/>
+                      <a:tailEnd type="none" w="med" len="med"/>
+                    </a:lnL>
+                    <a:lnR w="6350" cap="flat" cmpd="sng" algn="ctr">
+                      <a:solidFill>
+                        <a:srgbClr val="D9D9D9"/>
+                      </a:solidFill>
+                      <a:prstDash val="solid"/>
+                      <a:round/>
+                      <a:headEnd type="none" w="med" len="med"/>
+                      <a:tailEnd type="none" w="med" len="med"/>
+                    </a:lnR>
+                    <a:lnT w="6350" cap="flat" cmpd="sng" algn="ctr">
+                      <a:solidFill>
+                        <a:srgbClr val="D9D9D9"/>
+                      </a:solidFill>
+                      <a:prstDash val="solid"/>
+                      <a:round/>
+                      <a:headEnd type="none" w="med" len="med"/>
+                      <a:tailEnd type="none" w="med" len="med"/>
+                    </a:lnT>
+                    <a:lnB w="6350" cap="flat" cmpd="sng" algn="ctr">
+                      <a:solidFill>
+                        <a:srgbClr val="D9D9D9"/>
+                      </a:solidFill>
+                      <a:prstDash val="solid"/>
+                      <a:round/>
+                      <a:headEnd type="none" w="med" len="med"/>
+                      <a:tailEnd type="none" w="med" len="med"/>
+                    </a:lnB>
+                    <a:solidFill>
+                      <a:srgbClr val="2B2B2B"/>
+                    </a:solidFill>
+                  </a:tcPr>
+                </a:tc>
+                <a:tc>
+                  <a:txBody>
+                    <a:bodyPr/>
+                    <a:lstStyle/>
+                    <a:p>
+                      <a:pPr indent="0" marL="0">
+                        <a:buNone/>
+                      </a:pPr>
+                      <a:r>
+                        <a:rPr lang="en-US" sz="950" b="1" dirty="0">
+                          <a:solidFill>
+                            <a:srgbClr val="FFFFFF"/>
+                          </a:solidFill>
+                          <a:latin typeface="Calibri" pitchFamily="34" charset="0"/>
+                          <a:ea typeface="Calibri" pitchFamily="34" charset="-122"/>
+                          <a:cs typeface="Calibri" pitchFamily="34" charset="-120"/>
+                        </a:rPr>
+                        <a:t>How the system creates it</a:t>
+                      </a:r>
+                      <a:endParaRPr lang="en-US" sz="950" dirty="0">
+                        <a:latin typeface="Calibri" charset="0"/>
+                        <a:ea typeface="Calibri" charset="0"/>
+                        <a:cs typeface="Calibri" charset="0"/>
+                      </a:endParaRPr>
+                    </a:p>
+                  </a:txBody>
+                  <a:tcPr marL="45720" marR="45720" marT="27432" marB="27432" anchor="ctr">
+                    <a:lnL w="6350" cap="flat" cmpd="sng" algn="ctr">
+                      <a:solidFill>
+                        <a:srgbClr val="D9D9D9"/>
+                      </a:solidFill>
+                      <a:prstDash val="solid"/>
+                      <a:round/>
+                      <a:headEnd type="none" w="med" len="med"/>
+                      <a:tailEnd type="none" w="med" len="med"/>
+                    </a:lnL>
+                    <a:lnR w="6350" cap="flat" cmpd="sng" algn="ctr">
+                      <a:solidFill>
+                        <a:srgbClr val="D9D9D9"/>
+                      </a:solidFill>
+                      <a:prstDash val="solid"/>
+                      <a:round/>
+                      <a:headEnd type="none" w="med" len="med"/>
+                      <a:tailEnd type="none" w="med" len="med"/>
+                    </a:lnR>
+                    <a:lnT w="6350" cap="flat" cmpd="sng" algn="ctr">
+                      <a:solidFill>
+                        <a:srgbClr val="D9D9D9"/>
+                      </a:solidFill>
+                      <a:prstDash val="solid"/>
+                      <a:round/>
+                      <a:headEnd type="none" w="med" len="med"/>
+                      <a:tailEnd type="none" w="med" len="med"/>
+                    </a:lnT>
+                    <a:lnB w="6350" cap="flat" cmpd="sng" algn="ctr">
+                      <a:solidFill>
+                        <a:srgbClr val="D9D9D9"/>
+                      </a:solidFill>
+                      <a:prstDash val="solid"/>
+                      <a:round/>
+                      <a:headEnd type="none" w="med" len="med"/>
+                      <a:tailEnd type="none" w="med" len="med"/>
+                    </a:lnB>
+                    <a:solidFill>
+                      <a:srgbClr val="2B2B2B"/>
+                    </a:solidFill>
+                  </a:tcPr>
+                </a:tc>
+                <a:tc>
+                  <a:txBody>
+                    <a:bodyPr/>
+                    <a:lstStyle/>
+                    <a:p>
+                      <a:pPr indent="0" marL="0">
+                        <a:buNone/>
+                      </a:pPr>
+                      <a:r>
+                        <a:rPr lang="en-US" sz="950" b="1" dirty="0">
+                          <a:solidFill>
+                            <a:srgbClr val="FFFFFF"/>
+                          </a:solidFill>
+                          <a:latin typeface="Calibri" pitchFamily="34" charset="0"/>
+                          <a:ea typeface="Calibri" pitchFamily="34" charset="-122"/>
+                          <a:cs typeface="Calibri" pitchFamily="34" charset="-120"/>
+                        </a:rPr>
+                        <a:t>Measured in the pilot as</a:t>
+                      </a:r>
+                      <a:endParaRPr lang="en-US" sz="950" dirty="0">
+                        <a:latin typeface="Calibri" charset="0"/>
+                        <a:ea typeface="Calibri" charset="0"/>
+                        <a:cs typeface="Calibri" charset="0"/>
+                      </a:endParaRPr>
+                    </a:p>
+                  </a:txBody>
+                  <a:tcPr marL="45720" marR="45720" marT="27432" marB="27432" anchor="ctr">
+                    <a:lnL w="6350" cap="flat" cmpd="sng" algn="ctr">
+                      <a:solidFill>
+                        <a:srgbClr val="D9D9D9"/>
+                      </a:solidFill>
+                      <a:prstDash val="solid"/>
+                      <a:round/>
+                      <a:headEnd type="none" w="med" len="med"/>
+                      <a:tailEnd type="none" w="med" len="med"/>
+                    </a:lnL>
+                    <a:lnR w="6350" cap="flat" cmpd="sng" algn="ctr">
+                      <a:solidFill>
+                        <a:srgbClr val="D9D9D9"/>
+                      </a:solidFill>
+                      <a:prstDash val="solid"/>
+                      <a:round/>
+                      <a:headEnd type="none" w="med" len="med"/>
+                      <a:tailEnd type="none" w="med" len="med"/>
+                    </a:lnR>
+                    <a:lnT w="6350" cap="flat" cmpd="sng" algn="ctr">
+                      <a:solidFill>
+                        <a:srgbClr val="D9D9D9"/>
+                      </a:solidFill>
+                      <a:prstDash val="solid"/>
+                      <a:round/>
+                      <a:headEnd type="none" w="med" len="med"/>
+                      <a:tailEnd type="none" w="med" len="med"/>
+                    </a:lnT>
+                    <a:lnB w="6350" cap="flat" cmpd="sng" algn="ctr">
+                      <a:solidFill>
+                        <a:srgbClr val="D9D9D9"/>
+                      </a:solidFill>
+                      <a:prstDash val="solid"/>
+                      <a:round/>
+                      <a:headEnd type="none" w="med" len="med"/>
+                      <a:tailEnd type="none" w="med" len="med"/>
+                    </a:lnB>
+                    <a:solidFill>
+                      <a:srgbClr val="2B2B2B"/>
+                    </a:solidFill>
+                  </a:tcPr>
+                </a:tc>
+              </a:tr>
+              <a:tr h="402336">
+                <a:tc>
+                  <a:txBody>
+                    <a:bodyPr/>
+                    <a:lstStyle/>
+                    <a:p>
+                      <a:pPr indent="0" marL="0">
+                        <a:buNone/>
+                      </a:pPr>
+                      <a:r>
+                        <a:rPr lang="en-US" sz="950" b="1" dirty="0">
+                          <a:solidFill>
+                            <a:srgbClr val="1A1A1A"/>
+                          </a:solidFill>
+                          <a:latin typeface="Calibri" pitchFamily="34" charset="0"/>
+                          <a:ea typeface="Calibri" pitchFamily="34" charset="-122"/>
+                          <a:cs typeface="Calibri" pitchFamily="34" charset="-120"/>
+                        </a:rPr>
+                        <a:t>Fewer downgrades</a:t>
+                      </a:r>
+                      <a:endParaRPr lang="en-US" sz="950" dirty="0">
+                        <a:latin typeface="Calibri" charset="0"/>
+                        <a:ea typeface="Calibri" charset="0"/>
+                        <a:cs typeface="Calibri" charset="0"/>
+                      </a:endParaRPr>
+                    </a:p>
+                  </a:txBody>
+                  <a:tcPr marL="45720" marR="45720" marT="27432" marB="27432" anchor="ctr">
+                    <a:lnL w="6350" cap="flat" cmpd="sng" algn="ctr">
+                      <a:solidFill>
+                        <a:srgbClr val="D9D9D9"/>
+                      </a:solidFill>
+                      <a:prstDash val="solid"/>
+                      <a:round/>
+                      <a:headEnd type="none" w="med" len="med"/>
+                      <a:tailEnd type="none" w="med" len="med"/>
+                    </a:lnL>
+                    <a:lnR w="6350" cap="flat" cmpd="sng" algn="ctr">
+                      <a:solidFill>
+                        <a:srgbClr val="D9D9D9"/>
+                      </a:solidFill>
+                      <a:prstDash val="solid"/>
+                      <a:round/>
+                      <a:headEnd type="none" w="med" len="med"/>
+                      <a:tailEnd type="none" w="med" len="med"/>
+                    </a:lnR>
+                    <a:lnT w="6350" cap="flat" cmpd="sng" algn="ctr">
+                      <a:solidFill>
+                        <a:srgbClr val="D9D9D9"/>
+                      </a:solidFill>
+                      <a:prstDash val="solid"/>
+                      <a:round/>
+                      <a:headEnd type="none" w="med" len="med"/>
+                      <a:tailEnd type="none" w="med" len="med"/>
+                    </a:lnT>
+                    <a:lnB w="6350" cap="flat" cmpd="sng" algn="ctr">
+                      <a:solidFill>
+                        <a:srgbClr val="D9D9D9"/>
+                      </a:solidFill>
+                      <a:prstDash val="solid"/>
+                      <a:round/>
+                      <a:headEnd type="none" w="med" len="med"/>
+                      <a:tailEnd type="none" w="med" len="med"/>
+                    </a:lnB>
+                  </a:tcPr>
+                </a:tc>
+                <a:tc>
+                  <a:txBody>
+                    <a:bodyPr/>
+                    <a:lstStyle/>
+                    <a:p>
+                      <a:pPr indent="0" marL="0">
+                        <a:buNone/>
+                      </a:pPr>
+                      <a:r>
+                        <a:rPr lang="en-US" sz="950" dirty="0">
+                          <a:solidFill>
+                            <a:srgbClr val="1A1A1A"/>
+                          </a:solidFill>
+                          <a:latin typeface="Calibri" pitchFamily="34" charset="0"/>
+                          <a:ea typeface="Calibri" pitchFamily="34" charset="-122"/>
+                          <a:cs typeface="Calibri" pitchFamily="34" charset="-120"/>
+                        </a:rPr>
+                        <a:t>defects caught upstream, before more value is added</a:t>
+                      </a:r>
+                      <a:endParaRPr lang="en-US" sz="950" dirty="0">
+                        <a:latin typeface="Calibri" charset="0"/>
+                        <a:ea typeface="Calibri" charset="0"/>
+                        <a:cs typeface="Calibri" charset="0"/>
+                      </a:endParaRPr>
+                    </a:p>
+                  </a:txBody>
+                  <a:tcPr marL="45720" marR="45720" marT="27432" marB="27432" anchor="ctr">
+                    <a:lnL w="6350" cap="flat" cmpd="sng" algn="ctr">
+                      <a:solidFill>
+                        <a:srgbClr val="D9D9D9"/>
+                      </a:solidFill>
+                      <a:prstDash val="solid"/>
+                      <a:round/>
+                      <a:headEnd type="none" w="med" len="med"/>
+                      <a:tailEnd type="none" w="med" len="med"/>
+                    </a:lnL>
+                    <a:lnR w="6350" cap="flat" cmpd="sng" algn="ctr">
+                      <a:solidFill>
+                        <a:srgbClr val="D9D9D9"/>
+                      </a:solidFill>
+                      <a:prstDash val="solid"/>
+                      <a:round/>
+                      <a:headEnd type="none" w="med" len="med"/>
+                      <a:tailEnd type="none" w="med" len="med"/>
+                    </a:lnR>
+                    <a:lnT w="6350" cap="flat" cmpd="sng" algn="ctr">
+                      <a:solidFill>
+                        <a:srgbClr val="D9D9D9"/>
+                      </a:solidFill>
+                      <a:prstDash val="solid"/>
+                      <a:round/>
+                      <a:headEnd type="none" w="med" len="med"/>
+                      <a:tailEnd type="none" w="med" len="med"/>
+                    </a:lnT>
+                    <a:lnB w="6350" cap="flat" cmpd="sng" algn="ctr">
+                      <a:solidFill>
+                        <a:srgbClr val="D9D9D9"/>
+                      </a:solidFill>
+                      <a:prstDash val="solid"/>
+                      <a:round/>
+                      <a:headEnd type="none" w="med" len="med"/>
+                      <a:tailEnd type="none" w="med" len="med"/>
+                    </a:lnB>
+                  </a:tcPr>
+                </a:tc>
+                <a:tc>
+                  <a:txBody>
+                    <a:bodyPr/>
+                    <a:lstStyle/>
+                    <a:p>
+                      <a:pPr indent="0" marL="0">
+                        <a:buNone/>
+                      </a:pPr>
+                      <a:r>
+                        <a:rPr lang="en-US" sz="950" dirty="0">
+                          <a:solidFill>
+                            <a:srgbClr val="1A1A1A"/>
+                          </a:solidFill>
+                          <a:latin typeface="Calibri" pitchFamily="34" charset="0"/>
+                          <a:ea typeface="Calibri" pitchFamily="34" charset="-122"/>
+                          <a:cs typeface="Calibri" pitchFamily="34" charset="-120"/>
+                        </a:rPr>
+                        <a:t>downgrade rate by line and grade</a:t>
+                      </a:r>
+                      <a:endParaRPr lang="en-US" sz="950" dirty="0">
+                        <a:latin typeface="Calibri" charset="0"/>
+                        <a:ea typeface="Calibri" charset="0"/>
+                        <a:cs typeface="Calibri" charset="0"/>
+                      </a:endParaRPr>
+                    </a:p>
+                  </a:txBody>
+                  <a:tcPr marL="45720" marR="45720" marT="27432" marB="27432" anchor="ctr">
+                    <a:lnL w="6350" cap="flat" cmpd="sng" algn="ctr">
+                      <a:solidFill>
+                        <a:srgbClr val="D9D9D9"/>
+                      </a:solidFill>
+                      <a:prstDash val="solid"/>
+                      <a:round/>
+                      <a:headEnd type="none" w="med" len="med"/>
+                      <a:tailEnd type="none" w="med" len="med"/>
+                    </a:lnL>
+                    <a:lnR w="6350" cap="flat" cmpd="sng" algn="ctr">
+                      <a:solidFill>
+                        <a:srgbClr val="D9D9D9"/>
+                      </a:solidFill>
+                      <a:prstDash val="solid"/>
+                      <a:round/>
+                      <a:headEnd type="none" w="med" len="med"/>
+                      <a:tailEnd type="none" w="med" len="med"/>
+                    </a:lnR>
+                    <a:lnT w="6350" cap="flat" cmpd="sng" algn="ctr">
+                      <a:solidFill>
+                        <a:srgbClr val="D9D9D9"/>
+                      </a:solidFill>
+                      <a:prstDash val="solid"/>
+                      <a:round/>
+                      <a:headEnd type="none" w="med" len="med"/>
+                      <a:tailEnd type="none" w="med" len="med"/>
+                    </a:lnT>
+                    <a:lnB w="6350" cap="flat" cmpd="sng" algn="ctr">
+                      <a:solidFill>
+                        <a:srgbClr val="D9D9D9"/>
+                      </a:solidFill>
+                      <a:prstDash val="solid"/>
+                      <a:round/>
+                      <a:headEnd type="none" w="med" len="med"/>
+                      <a:tailEnd type="none" w="med" len="med"/>
+                    </a:lnB>
+                  </a:tcPr>
+                </a:tc>
+              </a:tr>
+              <a:tr h="402336">
+                <a:tc>
+                  <a:txBody>
+                    <a:bodyPr/>
+                    <a:lstStyle/>
+                    <a:p>
+                      <a:pPr indent="0" marL="0">
+                        <a:buNone/>
+                      </a:pPr>
+                      <a:r>
+                        <a:rPr lang="en-US" sz="950" b="1" dirty="0">
+                          <a:solidFill>
+                            <a:srgbClr val="1A1A1A"/>
+                          </a:solidFill>
+                          <a:latin typeface="Calibri" pitchFamily="34" charset="0"/>
+                          <a:ea typeface="Calibri" pitchFamily="34" charset="-122"/>
+                          <a:cs typeface="Calibri" pitchFamily="34" charset="-120"/>
+                        </a:rPr>
+                        <a:t>Fewer customer claims</a:t>
+                      </a:r>
+                      <a:endParaRPr lang="en-US" sz="950" dirty="0">
+                        <a:latin typeface="Calibri" charset="0"/>
+                        <a:ea typeface="Calibri" charset="0"/>
+                        <a:cs typeface="Calibri" charset="0"/>
+                      </a:endParaRPr>
+                    </a:p>
+                  </a:txBody>
+                  <a:tcPr marL="45720" marR="45720" marT="27432" marB="27432" anchor="ctr">
+                    <a:lnL w="6350" cap="flat" cmpd="sng" algn="ctr">
+                      <a:solidFill>
+                        <a:srgbClr val="D9D9D9"/>
+                      </a:solidFill>
+                      <a:prstDash val="solid"/>
+                      <a:round/>
+                      <a:headEnd type="none" w="med" len="med"/>
+                      <a:tailEnd type="none" w="med" len="med"/>
+                    </a:lnL>
+                    <a:lnR w="6350" cap="flat" cmpd="sng" algn="ctr">
+                      <a:solidFill>
+                        <a:srgbClr val="D9D9D9"/>
+                      </a:solidFill>
+                      <a:prstDash val="solid"/>
+                      <a:round/>
+                      <a:headEnd type="none" w="med" len="med"/>
+                      <a:tailEnd type="none" w="med" len="med"/>
+                    </a:lnR>
+                    <a:lnT w="6350" cap="flat" cmpd="sng" algn="ctr">
+                      <a:solidFill>
+                        <a:srgbClr val="D9D9D9"/>
+                      </a:solidFill>
+                      <a:prstDash val="solid"/>
+                      <a:round/>
+                      <a:headEnd type="none" w="med" len="med"/>
+                      <a:tailEnd type="none" w="med" len="med"/>
+                    </a:lnT>
+                    <a:lnB w="6350" cap="flat" cmpd="sng" algn="ctr">
+                      <a:solidFill>
+                        <a:srgbClr val="D9D9D9"/>
+                      </a:solidFill>
+                      <a:prstDash val="solid"/>
+                      <a:round/>
+                      <a:headEnd type="none" w="med" len="med"/>
+                      <a:tailEnd type="none" w="med" len="med"/>
+                    </a:lnB>
+                  </a:tcPr>
+                </a:tc>
+                <a:tc>
+                  <a:txBody>
+                    <a:bodyPr/>
+                    <a:lstStyle/>
+                    <a:p>
+                      <a:pPr indent="0" marL="0">
+                        <a:buNone/>
+                      </a:pPr>
+                      <a:r>
+                        <a:rPr lang="en-US" sz="950" dirty="0">
+                          <a:solidFill>
+                            <a:srgbClr val="1A1A1A"/>
+                          </a:solidFill>
+                          <a:latin typeface="Calibri" pitchFamily="34" charset="0"/>
+                          <a:ea typeface="Calibri" pitchFamily="34" charset="-122"/>
+                          <a:cs typeface="Calibri" pitchFamily="34" charset="-120"/>
+                        </a:rPr>
+                        <a:t>a defect map travels with every coil</a:t>
+                      </a:r>
+                      <a:endParaRPr lang="en-US" sz="950" dirty="0">
+                        <a:latin typeface="Calibri" charset="0"/>
+                        <a:ea typeface="Calibri" charset="0"/>
+                        <a:cs typeface="Calibri" charset="0"/>
+                      </a:endParaRPr>
+                    </a:p>
+                  </a:txBody>
+                  <a:tcPr marL="45720" marR="45720" marT="27432" marB="27432" anchor="ctr">
+                    <a:lnL w="6350" cap="flat" cmpd="sng" algn="ctr">
+                      <a:solidFill>
+                        <a:srgbClr val="D9D9D9"/>
+                      </a:solidFill>
+                      <a:prstDash val="solid"/>
+                      <a:round/>
+                      <a:headEnd type="none" w="med" len="med"/>
+                      <a:tailEnd type="none" w="med" len="med"/>
+                    </a:lnL>
+                    <a:lnR w="6350" cap="flat" cmpd="sng" algn="ctr">
+                      <a:solidFill>
+                        <a:srgbClr val="D9D9D9"/>
+                      </a:solidFill>
+                      <a:prstDash val="solid"/>
+                      <a:round/>
+                      <a:headEnd type="none" w="med" len="med"/>
+                      <a:tailEnd type="none" w="med" len="med"/>
+                    </a:lnR>
+                    <a:lnT w="6350" cap="flat" cmpd="sng" algn="ctr">
+                      <a:solidFill>
+                        <a:srgbClr val="D9D9D9"/>
+                      </a:solidFill>
+                      <a:prstDash val="solid"/>
+                      <a:round/>
+                      <a:headEnd type="none" w="med" len="med"/>
+                      <a:tailEnd type="none" w="med" len="med"/>
+                    </a:lnT>
+                    <a:lnB w="6350" cap="flat" cmpd="sng" algn="ctr">
+                      <a:solidFill>
+                        <a:srgbClr val="D9D9D9"/>
+                      </a:solidFill>
+                      <a:prstDash val="solid"/>
+                      <a:round/>
+                      <a:headEnd type="none" w="med" len="med"/>
+                      <a:tailEnd type="none" w="med" len="med"/>
+                    </a:lnB>
+                  </a:tcPr>
+                </a:tc>
+                <a:tc>
+                  <a:txBody>
+                    <a:bodyPr/>
+                    <a:lstStyle/>
+                    <a:p>
+                      <a:pPr indent="0" marL="0">
+                        <a:buNone/>
+                      </a:pPr>
+                      <a:r>
+                        <a:rPr lang="en-US" sz="950" dirty="0">
+                          <a:solidFill>
+                            <a:srgbClr val="1A1A1A"/>
+                          </a:solidFill>
+                          <a:latin typeface="Calibri" pitchFamily="34" charset="0"/>
+                          <a:ea typeface="Calibri" pitchFamily="34" charset="-122"/>
+                          <a:cs typeface="Calibri" pitchFamily="34" charset="-120"/>
+                        </a:rPr>
+                        <a:t>claims per 1,000 t shipped</a:t>
+                      </a:r>
+                      <a:endParaRPr lang="en-US" sz="950" dirty="0">
+                        <a:latin typeface="Calibri" charset="0"/>
+                        <a:ea typeface="Calibri" charset="0"/>
+                        <a:cs typeface="Calibri" charset="0"/>
+                      </a:endParaRPr>
+                    </a:p>
+                  </a:txBody>
+                  <a:tcPr marL="45720" marR="45720" marT="27432" marB="27432" anchor="ctr">
+                    <a:lnL w="6350" cap="flat" cmpd="sng" algn="ctr">
+                      <a:solidFill>
+                        <a:srgbClr val="D9D9D9"/>
+                      </a:solidFill>
+                      <a:prstDash val="solid"/>
+                      <a:round/>
+                      <a:headEnd type="none" w="med" len="med"/>
+                      <a:tailEnd type="none" w="med" len="med"/>
+                    </a:lnL>
+                    <a:lnR w="6350" cap="flat" cmpd="sng" algn="ctr">
+                      <a:solidFill>
+                        <a:srgbClr val="D9D9D9"/>
+                      </a:solidFill>
+                      <a:prstDash val="solid"/>
+                      <a:round/>
+                      <a:headEnd type="none" w="med" len="med"/>
+                      <a:tailEnd type="none" w="med" len="med"/>
+                    </a:lnR>
+                    <a:lnT w="6350" cap="flat" cmpd="sng" algn="ctr">
+                      <a:solidFill>
+                        <a:srgbClr val="D9D9D9"/>
+                      </a:solidFill>
+                      <a:prstDash val="solid"/>
+                      <a:round/>
+                      <a:headEnd type="none" w="med" len="med"/>
+                      <a:tailEnd type="none" w="med" len="med"/>
+                    </a:lnT>
+                    <a:lnB w="6350" cap="flat" cmpd="sng" algn="ctr">
+                      <a:solidFill>
+                        <a:srgbClr val="D9D9D9"/>
+                      </a:solidFill>
+                      <a:prstDash val="solid"/>
+                      <a:round/>
+                      <a:headEnd type="none" w="med" len="med"/>
+                      <a:tailEnd type="none" w="med" len="med"/>
+                    </a:lnB>
+                  </a:tcPr>
+                </a:tc>
+              </a:tr>
+              <a:tr h="402336">
+                <a:tc>
+                  <a:txBody>
+                    <a:bodyPr/>
+                    <a:lstStyle/>
+                    <a:p>
+                      <a:pPr indent="0" marL="0">
+                        <a:buNone/>
+                      </a:pPr>
+                      <a:r>
+                        <a:rPr lang="en-US" sz="950" b="1" dirty="0">
+                          <a:solidFill>
+                            <a:srgbClr val="1A1A1A"/>
+                          </a:solidFill>
+                          <a:latin typeface="Calibri" pitchFamily="34" charset="0"/>
+                          <a:ea typeface="Calibri" pitchFamily="34" charset="-122"/>
+                          <a:cs typeface="Calibri" pitchFamily="34" charset="-120"/>
+                        </a:rPr>
+                        <a:t>Less rework</a:t>
+                      </a:r>
+                      <a:endParaRPr lang="en-US" sz="950" dirty="0">
+                        <a:latin typeface="Calibri" charset="0"/>
+                        <a:ea typeface="Calibri" charset="0"/>
+                        <a:cs typeface="Calibri" charset="0"/>
+                      </a:endParaRPr>
+                    </a:p>
+                  </a:txBody>
+                  <a:tcPr marL="45720" marR="45720" marT="27432" marB="27432" anchor="ctr">
+                    <a:lnL w="6350" cap="flat" cmpd="sng" algn="ctr">
+                      <a:solidFill>
+                        <a:srgbClr val="D9D9D9"/>
+                      </a:solidFill>
+                      <a:prstDash val="solid"/>
+                      <a:round/>
+                      <a:headEnd type="none" w="med" len="med"/>
+                      <a:tailEnd type="none" w="med" len="med"/>
+                    </a:lnL>
+                    <a:lnR w="6350" cap="flat" cmpd="sng" algn="ctr">
+                      <a:solidFill>
+                        <a:srgbClr val="D9D9D9"/>
+                      </a:solidFill>
+                      <a:prstDash val="solid"/>
+                      <a:round/>
+                      <a:headEnd type="none" w="med" len="med"/>
+                      <a:tailEnd type="none" w="med" len="med"/>
+                    </a:lnR>
+                    <a:lnT w="6350" cap="flat" cmpd="sng" algn="ctr">
+                      <a:solidFill>
+                        <a:srgbClr val="D9D9D9"/>
+                      </a:solidFill>
+                      <a:prstDash val="solid"/>
+                      <a:round/>
+                      <a:headEnd type="none" w="med" len="med"/>
+                      <a:tailEnd type="none" w="med" len="med"/>
+                    </a:lnT>
+                    <a:lnB w="6350" cap="flat" cmpd="sng" algn="ctr">
+                      <a:solidFill>
+                        <a:srgbClr val="D9D9D9"/>
+                      </a:solidFill>
+                      <a:prstDash val="solid"/>
+                      <a:round/>
+                      <a:headEnd type="none" w="med" len="med"/>
+                      <a:tailEnd type="none" w="med" len="med"/>
+                    </a:lnB>
+                  </a:tcPr>
+                </a:tc>
+                <a:tc>
+                  <a:txBody>
+                    <a:bodyPr/>
+                    <a:lstStyle/>
+                    <a:p>
+                      <a:pPr indent="0" marL="0">
+                        <a:buNone/>
+                      </a:pPr>
+                      <a:r>
+                        <a:rPr lang="en-US" sz="950" dirty="0">
+                          <a:solidFill>
+                            <a:srgbClr val="1A1A1A"/>
+                          </a:solidFill>
+                          <a:latin typeface="Calibri" pitchFamily="34" charset="0"/>
+                          <a:ea typeface="Calibri" pitchFamily="34" charset="-122"/>
+                          <a:cs typeface="Calibri" pitchFamily="34" charset="-120"/>
+                        </a:rPr>
+                        <a:t>no re-pickling or re-grinding of defects found late</a:t>
+                      </a:r>
+                      <a:endParaRPr lang="en-US" sz="950" dirty="0">
+                        <a:latin typeface="Calibri" charset="0"/>
+                        <a:ea typeface="Calibri" charset="0"/>
+                        <a:cs typeface="Calibri" charset="0"/>
+                      </a:endParaRPr>
+                    </a:p>
+                  </a:txBody>
+                  <a:tcPr marL="45720" marR="45720" marT="27432" marB="27432" anchor="ctr">
+                    <a:lnL w="6350" cap="flat" cmpd="sng" algn="ctr">
+                      <a:solidFill>
+                        <a:srgbClr val="D9D9D9"/>
+                      </a:solidFill>
+                      <a:prstDash val="solid"/>
+                      <a:round/>
+                      <a:headEnd type="none" w="med" len="med"/>
+                      <a:tailEnd type="none" w="med" len="med"/>
+                    </a:lnL>
+                    <a:lnR w="6350" cap="flat" cmpd="sng" algn="ctr">
+                      <a:solidFill>
+                        <a:srgbClr val="D9D9D9"/>
+                      </a:solidFill>
+                      <a:prstDash val="solid"/>
+                      <a:round/>
+                      <a:headEnd type="none" w="med" len="med"/>
+                      <a:tailEnd type="none" w="med" len="med"/>
+                    </a:lnR>
+                    <a:lnT w="6350" cap="flat" cmpd="sng" algn="ctr">
+                      <a:solidFill>
+                        <a:srgbClr val="D9D9D9"/>
+                      </a:solidFill>
+                      <a:prstDash val="solid"/>
+                      <a:round/>
+                      <a:headEnd type="none" w="med" len="med"/>
+                      <a:tailEnd type="none" w="med" len="med"/>
+                    </a:lnT>
+                    <a:lnB w="6350" cap="flat" cmpd="sng" algn="ctr">
+                      <a:solidFill>
+                        <a:srgbClr val="D9D9D9"/>
+                      </a:solidFill>
+                      <a:prstDash val="solid"/>
+                      <a:round/>
+                      <a:headEnd type="none" w="med" len="med"/>
+                      <a:tailEnd type="none" w="med" len="med"/>
+                    </a:lnB>
+                  </a:tcPr>
+                </a:tc>
+                <a:tc>
+                  <a:txBody>
+                    <a:bodyPr/>
+                    <a:lstStyle/>
+                    <a:p>
+                      <a:pPr indent="0" marL="0">
+                        <a:buNone/>
+                      </a:pPr>
+                      <a:r>
+                        <a:rPr lang="en-US" sz="950" dirty="0">
+                          <a:solidFill>
+                            <a:srgbClr val="1A1A1A"/>
+                          </a:solidFill>
+                          <a:latin typeface="Calibri" pitchFamily="34" charset="0"/>
+                          <a:ea typeface="Calibri" pitchFamily="34" charset="-122"/>
+                          <a:cs typeface="Calibri" pitchFamily="34" charset="-120"/>
+                        </a:rPr>
+                        <a:t>rework tonnes per month</a:t>
+                      </a:r>
+                      <a:endParaRPr lang="en-US" sz="950" dirty="0">
+                        <a:latin typeface="Calibri" charset="0"/>
+                        <a:ea typeface="Calibri" charset="0"/>
+                        <a:cs typeface="Calibri" charset="0"/>
+                      </a:endParaRPr>
+                    </a:p>
+                  </a:txBody>
+                  <a:tcPr marL="45720" marR="45720" marT="27432" marB="27432" anchor="ctr">
+                    <a:lnL w="6350" cap="flat" cmpd="sng" algn="ctr">
+                      <a:solidFill>
+                        <a:srgbClr val="D9D9D9"/>
+                      </a:solidFill>
+                      <a:prstDash val="solid"/>
+                      <a:round/>
+                      <a:headEnd type="none" w="med" len="med"/>
+                      <a:tailEnd type="none" w="med" len="med"/>
+                    </a:lnL>
+                    <a:lnR w="6350" cap="flat" cmpd="sng" algn="ctr">
+                      <a:solidFill>
+                        <a:srgbClr val="D9D9D9"/>
+                      </a:solidFill>
+                      <a:prstDash val="solid"/>
+                      <a:round/>
+                      <a:headEnd type="none" w="med" len="med"/>
+                      <a:tailEnd type="none" w="med" len="med"/>
+                    </a:lnR>
+                    <a:lnT w="6350" cap="flat" cmpd="sng" algn="ctr">
+                      <a:solidFill>
+                        <a:srgbClr val="D9D9D9"/>
+                      </a:solidFill>
+                      <a:prstDash val="solid"/>
+                      <a:round/>
+                      <a:headEnd type="none" w="med" len="med"/>
+                      <a:tailEnd type="none" w="med" len="med"/>
+                    </a:lnT>
+                    <a:lnB w="6350" cap="flat" cmpd="sng" algn="ctr">
+                      <a:solidFill>
+                        <a:srgbClr val="D9D9D9"/>
+                      </a:solidFill>
+                      <a:prstDash val="solid"/>
+                      <a:round/>
+                      <a:headEnd type="none" w="med" len="med"/>
+                      <a:tailEnd type="none" w="med" len="med"/>
+                    </a:lnB>
+                  </a:tcPr>
+                </a:tc>
+              </a:tr>
+              <a:tr h="402336">
+                <a:tc>
+                  <a:txBody>
+                    <a:bodyPr/>
+                    <a:lstStyle/>
+                    <a:p>
+                      <a:pPr indent="0" marL="0">
+                        <a:buNone/>
+                      </a:pPr>
+                      <a:r>
+                        <a:rPr lang="en-US" sz="950" b="1" dirty="0">
+                          <a:solidFill>
+                            <a:srgbClr val="1A1A1A"/>
+                          </a:solidFill>
+                          <a:latin typeface="Calibri" pitchFamily="34" charset="0"/>
+                          <a:ea typeface="Calibri" pitchFamily="34" charset="-122"/>
+                          <a:cs typeface="Calibri" pitchFamily="34" charset="-120"/>
+                        </a:rPr>
+                        <a:t>Faster root-cause fixes</a:t>
+                      </a:r>
+                      <a:endParaRPr lang="en-US" sz="950" dirty="0">
+                        <a:latin typeface="Calibri" charset="0"/>
+                        <a:ea typeface="Calibri" charset="0"/>
+                        <a:cs typeface="Calibri" charset="0"/>
+                      </a:endParaRPr>
+                    </a:p>
+                  </a:txBody>
+                  <a:tcPr marL="45720" marR="45720" marT="27432" marB="27432" anchor="ctr">
+                    <a:lnL w="6350" cap="flat" cmpd="sng" algn="ctr">
+                      <a:solidFill>
+                        <a:srgbClr val="D9D9D9"/>
+                      </a:solidFill>
+                      <a:prstDash val="solid"/>
+                      <a:round/>
+                      <a:headEnd type="none" w="med" len="med"/>
+                      <a:tailEnd type="none" w="med" len="med"/>
+                    </a:lnL>
+                    <a:lnR w="6350" cap="flat" cmpd="sng" algn="ctr">
+                      <a:solidFill>
+                        <a:srgbClr val="D9D9D9"/>
+                      </a:solidFill>
+                      <a:prstDash val="solid"/>
+                      <a:round/>
+                      <a:headEnd type="none" w="med" len="med"/>
+                      <a:tailEnd type="none" w="med" len="med"/>
+                    </a:lnR>
+                    <a:lnT w="6350" cap="flat" cmpd="sng" algn="ctr">
+                      <a:solidFill>
+                        <a:srgbClr val="D9D9D9"/>
+                      </a:solidFill>
+                      <a:prstDash val="solid"/>
+                      <a:round/>
+                      <a:headEnd type="none" w="med" len="med"/>
+                      <a:tailEnd type="none" w="med" len="med"/>
+                    </a:lnT>
+                    <a:lnB w="6350" cap="flat" cmpd="sng" algn="ctr">
+                      <a:solidFill>
+                        <a:srgbClr val="D9D9D9"/>
+                      </a:solidFill>
+                      <a:prstDash val="solid"/>
+                      <a:round/>
+                      <a:headEnd type="none" w="med" len="med"/>
+                      <a:tailEnd type="none" w="med" len="med"/>
+                    </a:lnB>
+                  </a:tcPr>
+                </a:tc>
+                <a:tc>
+                  <a:txBody>
+                    <a:bodyPr/>
+                    <a:lstStyle/>
+                    <a:p>
+                      <a:pPr indent="0" marL="0">
+                        <a:buNone/>
+                      </a:pPr>
+                      <a:r>
+                        <a:rPr lang="en-US" sz="950" dirty="0">
+                          <a:solidFill>
+                            <a:srgbClr val="1A1A1A"/>
+                          </a:solidFill>
+                          <a:latin typeface="Calibri" pitchFamily="34" charset="0"/>
+                          <a:ea typeface="Calibri" pitchFamily="34" charset="-122"/>
+                          <a:cs typeface="Calibri" pitchFamily="34" charset="-120"/>
+                        </a:rPr>
+                        <a:t>each alarm reaches the process that caused it</a:t>
+                      </a:r>
+                      <a:endParaRPr lang="en-US" sz="950" dirty="0">
+                        <a:latin typeface="Calibri" charset="0"/>
+                        <a:ea typeface="Calibri" charset="0"/>
+                        <a:cs typeface="Calibri" charset="0"/>
+                      </a:endParaRPr>
+                    </a:p>
+                  </a:txBody>
+                  <a:tcPr marL="45720" marR="45720" marT="27432" marB="27432" anchor="ctr">
+                    <a:lnL w="6350" cap="flat" cmpd="sng" algn="ctr">
+                      <a:solidFill>
+                        <a:srgbClr val="D9D9D9"/>
+                      </a:solidFill>
+                      <a:prstDash val="solid"/>
+                      <a:round/>
+                      <a:headEnd type="none" w="med" len="med"/>
+                      <a:tailEnd type="none" w="med" len="med"/>
+                    </a:lnL>
+                    <a:lnR w="6350" cap="flat" cmpd="sng" algn="ctr">
+                      <a:solidFill>
+                        <a:srgbClr val="D9D9D9"/>
+                      </a:solidFill>
+                      <a:prstDash val="solid"/>
+                      <a:round/>
+                      <a:headEnd type="none" w="med" len="med"/>
+                      <a:tailEnd type="none" w="med" len="med"/>
+                    </a:lnR>
+                    <a:lnT w="6350" cap="flat" cmpd="sng" algn="ctr">
+                      <a:solidFill>
+                        <a:srgbClr val="D9D9D9"/>
+                      </a:solidFill>
+                      <a:prstDash val="solid"/>
+                      <a:round/>
+                      <a:headEnd type="none" w="med" len="med"/>
+                      <a:tailEnd type="none" w="med" len="med"/>
+                    </a:lnT>
+                    <a:lnB w="6350" cap="flat" cmpd="sng" algn="ctr">
+                      <a:solidFill>
+                        <a:srgbClr val="D9D9D9"/>
+                      </a:solidFill>
+                      <a:prstDash val="solid"/>
+                      <a:round/>
+                      <a:headEnd type="none" w="med" len="med"/>
+                      <a:tailEnd type="none" w="med" len="med"/>
+                    </a:lnB>
+                  </a:tcPr>
+                </a:tc>
+                <a:tc>
+                  <a:txBody>
+                    <a:bodyPr/>
+                    <a:lstStyle/>
+                    <a:p>
+                      <a:pPr indent="0" marL="0">
+                        <a:buNone/>
+                      </a:pPr>
+                      <a:r>
+                        <a:rPr lang="en-US" sz="950" dirty="0">
+                          <a:solidFill>
+                            <a:srgbClr val="1A1A1A"/>
+                          </a:solidFill>
+                          <a:latin typeface="Calibri" pitchFamily="34" charset="0"/>
+                          <a:ea typeface="Calibri" pitchFamily="34" charset="-122"/>
+                          <a:cs typeface="Calibri" pitchFamily="34" charset="-120"/>
+                        </a:rPr>
+                        <a:t>hours from defect to corrective action</a:t>
+                      </a:r>
+                      <a:endParaRPr lang="en-US" sz="950" dirty="0">
+                        <a:latin typeface="Calibri" charset="0"/>
+                        <a:ea typeface="Calibri" charset="0"/>
+                        <a:cs typeface="Calibri" charset="0"/>
+                      </a:endParaRPr>
+                    </a:p>
+                  </a:txBody>
+                  <a:tcPr marL="45720" marR="45720" marT="27432" marB="27432" anchor="ctr">
+                    <a:lnL w="6350" cap="flat" cmpd="sng" algn="ctr">
+                      <a:solidFill>
+                        <a:srgbClr val="D9D9D9"/>
+                      </a:solidFill>
+                      <a:prstDash val="solid"/>
+                      <a:round/>
+                      <a:headEnd type="none" w="med" len="med"/>
+                      <a:tailEnd type="none" w="med" len="med"/>
+                    </a:lnL>
+                    <a:lnR w="6350" cap="flat" cmpd="sng" algn="ctr">
+                      <a:solidFill>
+                        <a:srgbClr val="D9D9D9"/>
+                      </a:solidFill>
+                      <a:prstDash val="solid"/>
+                      <a:round/>
+                      <a:headEnd type="none" w="med" len="med"/>
+                      <a:tailEnd type="none" w="med" len="med"/>
+                    </a:lnR>
+                    <a:lnT w="6350" cap="flat" cmpd="sng" algn="ctr">
+                      <a:solidFill>
+                        <a:srgbClr val="D9D9D9"/>
+                      </a:solidFill>
+                      <a:prstDash val="solid"/>
+                      <a:round/>
+                      <a:headEnd type="none" w="med" len="med"/>
+                      <a:tailEnd type="none" w="med" len="med"/>
+                    </a:lnT>
+                    <a:lnB w="6350" cap="flat" cmpd="sng" algn="ctr">
+                      <a:solidFill>
+                        <a:srgbClr val="D9D9D9"/>
+                      </a:solidFill>
+                      <a:prstDash val="solid"/>
+                      <a:round/>
+                      <a:headEnd type="none" w="med" len="med"/>
+                      <a:tailEnd type="none" w="med" len="med"/>
+                    </a:lnB>
+                  </a:tcPr>
+                </a:tc>
+              </a:tr>
+              <a:tr h="402336">
+                <a:tc>
+                  <a:txBody>
+                    <a:bodyPr/>
+                    <a:lstStyle/>
+                    <a:p>
+                      <a:pPr indent="0" marL="0">
+                        <a:buNone/>
+                      </a:pPr>
+                      <a:r>
+                        <a:rPr lang="en-US" sz="950" b="1" dirty="0">
+                          <a:solidFill>
+                            <a:srgbClr val="1A1A1A"/>
+                          </a:solidFill>
+                          <a:latin typeface="Calibri" pitchFamily="34" charset="0"/>
+                          <a:ea typeface="Calibri" pitchFamily="34" charset="-122"/>
+                          <a:cs typeface="Calibri" pitchFamily="34" charset="-120"/>
+                        </a:rPr>
+                        <a:t>Premium orders</a:t>
+                      </a:r>
+                      <a:endParaRPr lang="en-US" sz="950" dirty="0">
+                        <a:latin typeface="Calibri" charset="0"/>
+                        <a:ea typeface="Calibri" charset="0"/>
+                        <a:cs typeface="Calibri" charset="0"/>
+                      </a:endParaRPr>
+                    </a:p>
+                  </a:txBody>
+                  <a:tcPr marL="45720" marR="45720" marT="27432" marB="27432" anchor="ctr">
+                    <a:lnL w="6350" cap="flat" cmpd="sng" algn="ctr">
+                      <a:solidFill>
+                        <a:srgbClr val="D9D9D9"/>
+                      </a:solidFill>
+                      <a:prstDash val="solid"/>
+                      <a:round/>
+                      <a:headEnd type="none" w="med" len="med"/>
+                      <a:tailEnd type="none" w="med" len="med"/>
+                    </a:lnL>
+                    <a:lnR w="6350" cap="flat" cmpd="sng" algn="ctr">
+                      <a:solidFill>
+                        <a:srgbClr val="D9D9D9"/>
+                      </a:solidFill>
+                      <a:prstDash val="solid"/>
+                      <a:round/>
+                      <a:headEnd type="none" w="med" len="med"/>
+                      <a:tailEnd type="none" w="med" len="med"/>
+                    </a:lnR>
+                    <a:lnT w="6350" cap="flat" cmpd="sng" algn="ctr">
+                      <a:solidFill>
+                        <a:srgbClr val="D9D9D9"/>
+                      </a:solidFill>
+                      <a:prstDash val="solid"/>
+                      <a:round/>
+                      <a:headEnd type="none" w="med" len="med"/>
+                      <a:tailEnd type="none" w="med" len="med"/>
+                    </a:lnT>
+                    <a:lnB w="6350" cap="flat" cmpd="sng" algn="ctr">
+                      <a:solidFill>
+                        <a:srgbClr val="D9D9D9"/>
+                      </a:solidFill>
+                      <a:prstDash val="solid"/>
+                      <a:round/>
+                      <a:headEnd type="none" w="med" len="med"/>
+                      <a:tailEnd type="none" w="med" len="med"/>
+                    </a:lnB>
+                  </a:tcPr>
+                </a:tc>
+                <a:tc>
+                  <a:txBody>
+                    <a:bodyPr/>
+                    <a:lstStyle/>
+                    <a:p>
+                      <a:pPr indent="0" marL="0">
+                        <a:buNone/>
+                      </a:pPr>
+                      <a:r>
+                        <a:rPr lang="en-US" sz="950" dirty="0">
+                          <a:solidFill>
+                            <a:srgbClr val="1A1A1A"/>
+                          </a:solidFill>
+                          <a:latin typeface="Calibri" pitchFamily="34" charset="0"/>
+                          <a:ea typeface="Calibri" pitchFamily="34" charset="-122"/>
+                          <a:cs typeface="Calibri" pitchFamily="34" charset="-120"/>
+                        </a:rPr>
+                        <a:t>documented surface quality for rail, appliances, exports</a:t>
+                      </a:r>
+                      <a:endParaRPr lang="en-US" sz="950" dirty="0">
+                        <a:latin typeface="Calibri" charset="0"/>
+                        <a:ea typeface="Calibri" charset="0"/>
+                        <a:cs typeface="Calibri" charset="0"/>
+                      </a:endParaRPr>
+                    </a:p>
+                  </a:txBody>
+                  <a:tcPr marL="45720" marR="45720" marT="27432" marB="27432" anchor="ctr">
+                    <a:lnL w="6350" cap="flat" cmpd="sng" algn="ctr">
+                      <a:solidFill>
+                        <a:srgbClr val="D9D9D9"/>
+                      </a:solidFill>
+                      <a:prstDash val="solid"/>
+                      <a:round/>
+                      <a:headEnd type="none" w="med" len="med"/>
+                      <a:tailEnd type="none" w="med" len="med"/>
+                    </a:lnL>
+                    <a:lnR w="6350" cap="flat" cmpd="sng" algn="ctr">
+                      <a:solidFill>
+                        <a:srgbClr val="D9D9D9"/>
+                      </a:solidFill>
+                      <a:prstDash val="solid"/>
+                      <a:round/>
+                      <a:headEnd type="none" w="med" len="med"/>
+                      <a:tailEnd type="none" w="med" len="med"/>
+                    </a:lnR>
+                    <a:lnT w="6350" cap="flat" cmpd="sng" algn="ctr">
+                      <a:solidFill>
+                        <a:srgbClr val="D9D9D9"/>
+                      </a:solidFill>
+                      <a:prstDash val="solid"/>
+                      <a:round/>
+                      <a:headEnd type="none" w="med" len="med"/>
+                      <a:tailEnd type="none" w="med" len="med"/>
+                    </a:lnT>
+                    <a:lnB w="6350" cap="flat" cmpd="sng" algn="ctr">
+                      <a:solidFill>
+                        <a:srgbClr val="D9D9D9"/>
+                      </a:solidFill>
+                      <a:prstDash val="solid"/>
+                      <a:round/>
+                      <a:headEnd type="none" w="med" len="med"/>
+                      <a:tailEnd type="none" w="med" len="med"/>
+                    </a:lnB>
+                  </a:tcPr>
+                </a:tc>
+                <a:tc>
+                  <a:txBody>
+                    <a:bodyPr/>
+                    <a:lstStyle/>
+                    <a:p>
+                      <a:pPr indent="0" marL="0">
+                        <a:buNone/>
+                      </a:pPr>
+                      <a:r>
+                        <a:rPr lang="en-US" sz="950" dirty="0">
+                          <a:solidFill>
+                            <a:srgbClr val="1A1A1A"/>
+                          </a:solidFill>
+                          <a:latin typeface="Calibri" pitchFamily="34" charset="0"/>
+                          <a:ea typeface="Calibri" pitchFamily="34" charset="-122"/>
+                          <a:cs typeface="Calibri" pitchFamily="34" charset="-120"/>
+                        </a:rPr>
+                        <a:t>share of exposed-finish orders</a:t>
+                      </a:r>
+                      <a:endParaRPr lang="en-US" sz="950" dirty="0">
+                        <a:latin typeface="Calibri" charset="0"/>
+                        <a:ea typeface="Calibri" charset="0"/>
+                        <a:cs typeface="Calibri" charset="0"/>
+                      </a:endParaRPr>
+                    </a:p>
+                  </a:txBody>
+                  <a:tcPr marL="45720" marR="45720" marT="27432" marB="27432" anchor="ctr">
+                    <a:lnL w="6350" cap="flat" cmpd="sng" algn="ctr">
+                      <a:solidFill>
+                        <a:srgbClr val="D9D9D9"/>
+                      </a:solidFill>
+                      <a:prstDash val="solid"/>
+                      <a:round/>
+                      <a:headEnd type="none" w="med" len="med"/>
+                      <a:tailEnd type="none" w="med" len="med"/>
+                    </a:lnL>
+                    <a:lnR w="6350" cap="flat" cmpd="sng" algn="ctr">
+                      <a:solidFill>
+                        <a:srgbClr val="D9D9D9"/>
+                      </a:solidFill>
+                      <a:prstDash val="solid"/>
+                      <a:round/>
+                      <a:headEnd type="none" w="med" len="med"/>
+                      <a:tailEnd type="none" w="med" len="med"/>
+                    </a:lnR>
+                    <a:lnT w="6350" cap="flat" cmpd="sng" algn="ctr">
+                      <a:solidFill>
+                        <a:srgbClr val="D9D9D9"/>
+                      </a:solidFill>
+                      <a:prstDash val="solid"/>
+                      <a:round/>
+                      <a:headEnd type="none" w="med" len="med"/>
+                      <a:tailEnd type="none" w="med" len="med"/>
+                    </a:lnT>
+                    <a:lnB w="6350" cap="flat" cmpd="sng" algn="ctr">
+                      <a:solidFill>
+                        <a:srgbClr val="D9D9D9"/>
+                      </a:solidFill>
+                      <a:prstDash val="solid"/>
+                      <a:round/>
+                      <a:headEnd type="none" w="med" len="med"/>
+                      <a:tailEnd type="none" w="med" len="med"/>
+                    </a:lnB>
+                  </a:tcPr>
+                </a:tc>
+              </a:tr>
+            </a:tbl>
+          </a:graphicData>
+        </a:graphic>
+      </p:graphicFrame>
+      <p:sp>
+        <p:nvSpPr>
+          <p:cNvPr id="30" name="Shape 24"/>
           <p:cNvSpPr/>
           <p:nvPr/>
         </p:nvSpPr>
         <p:spPr>
           <a:xfrm>
-            <a:off x="4709160" y="2278959"/>
-            <a:ext cx="3337560" cy="10973"/>
+            <a:off x="457200" y="4005072"/>
+            <a:ext cx="7680960" cy="274320"/>
           </a:xfrm>
           <a:prstGeom prst="rect">
             <a:avLst/>
           </a:prstGeom>
           <a:solidFill>
-            <a:srgbClr val="404040"/>
+            <a:srgbClr val="E4803A"/>
           </a:solidFill>
           <a:ln w="12700">
             <a:solidFill>
-              <a:srgbClr val="404040"/>
+              <a:srgbClr val="E4803A"/>
             </a:solidFill>
             <a:prstDash val="solid"/>
           </a:ln>
@@ -31081,24 +32123,65 @@
       </p:sp>
       <p:sp>
         <p:nvSpPr>
-          <p:cNvPr id="30" name="Shape 25"/>
+          <p:cNvPr id="31" name="Text 25"/>
+          <p:cNvSpPr txBox="1"/>
+          <p:nvPr/>
+        </p:nvSpPr>
+        <p:spPr>
+          <a:xfrm>
+            <a:off x="548640" y="4005072"/>
+            <a:ext cx="7498080" cy="274320"/>
+          </a:xfrm>
+          <a:prstGeom prst="rect">
+            <a:avLst/>
+          </a:prstGeom>
+          <a:noFill/>
+          <a:ln/>
+        </p:spPr>
+        <p:txBody>
+          <a:bodyPr wrap="square" lIns="0" tIns="0" rIns="0" bIns="0" rtlCol="0" anchor="ctr"/>
+          <a:lstStyle/>
+          <a:p>
+            <a:pPr indent="0" marL="0">
+              <a:buNone/>
+            </a:pPr>
+            <a:r>
+              <a:rPr lang="en-US" sz="1100" b="1" dirty="0">
+                <a:solidFill>
+                  <a:srgbClr val="FFFFFF"/>
+                </a:solidFill>
+                <a:latin typeface="Calibri" pitchFamily="34" charset="0"/>
+                <a:ea typeface="Calibri" pitchFamily="34" charset="-122"/>
+                <a:cs typeface="Calibri" pitchFamily="34" charset="-120"/>
+              </a:rPr>
+              <a:t>Impact beyond the P&amp;L</a:t>
+            </a:r>
+            <a:endParaRPr lang="en-US" sz="1100" dirty="0"/>
+          </a:p>
+        </p:txBody>
+      </p:sp>
+      <p:sp>
+        <p:nvSpPr>
+          <p:cNvPr id="32" name="Shape 26"/>
           <p:cNvSpPr/>
           <p:nvPr/>
         </p:nvSpPr>
         <p:spPr>
           <a:xfrm>
-            <a:off x="4846320" y="2278959"/>
-            <a:ext cx="347472" cy="520751"/>
-          </a:xfrm>
-          <a:prstGeom prst="rect">
-            <a:avLst/>
+            <a:off x="457200" y="4334256"/>
+            <a:ext cx="1234440" cy="1554480"/>
+          </a:xfrm>
+          <a:prstGeom prst="roundRect">
+            <a:avLst>
+              <a:gd name="adj" fmla="val 4444"/>
+            </a:avLst>
           </a:prstGeom>
           <a:solidFill>
-            <a:srgbClr val="9E9E9E"/>
+            <a:srgbClr val="F3F3F3"/>
           </a:solidFill>
           <a:ln w="12700">
             <a:solidFill>
-              <a:srgbClr val="9E9E9E"/>
+              <a:srgbClr val="F3F3F3"/>
             </a:solidFill>
             <a:prstDash val="solid"/>
           </a:ln>
@@ -31106,300 +32189,16 @@
       </p:sp>
       <p:sp>
         <p:nvSpPr>
-          <p:cNvPr id="31" name="Text 26"/>
-          <p:cNvSpPr txBox="1"/>
-          <p:nvPr/>
-        </p:nvSpPr>
-        <p:spPr>
-          <a:xfrm>
-            <a:off x="4791456" y="2871216"/>
-            <a:ext cx="457200" cy="164592"/>
-          </a:xfrm>
-          <a:prstGeom prst="rect">
-            <a:avLst/>
-          </a:prstGeom>
-          <a:noFill/>
-          <a:ln/>
-        </p:spPr>
-        <p:txBody>
-          <a:bodyPr wrap="square" lIns="0" tIns="0" rIns="0" bIns="0" rtlCol="0" anchor="t"/>
-          <a:lstStyle/>
-          <a:p>
-            <a:pPr algn="ctr" indent="0" marL="0">
-              <a:buNone/>
-            </a:pPr>
-            <a:r>
-              <a:rPr lang="en-US" sz="900" dirty="0">
-                <a:solidFill>
-                  <a:srgbClr val="6E6E6E"/>
-                </a:solidFill>
-                <a:latin typeface="Calibri" pitchFamily="34" charset="0"/>
-                <a:ea typeface="Calibri" pitchFamily="34" charset="-122"/>
-                <a:cs typeface="Calibri" pitchFamily="34" charset="-120"/>
-              </a:rPr>
-              <a:t>Y0</a:t>
-            </a:r>
-            <a:endParaRPr lang="en-US" sz="900" dirty="0"/>
-          </a:p>
-        </p:txBody>
-      </p:sp>
-      <p:sp>
-        <p:nvSpPr>
-          <p:cNvPr id="32" name="Text 27"/>
-          <p:cNvSpPr txBox="1"/>
-          <p:nvPr/>
-        </p:nvSpPr>
-        <p:spPr>
-          <a:xfrm>
-            <a:off x="4791456" y="3026664"/>
-            <a:ext cx="457200" cy="164592"/>
-          </a:xfrm>
-          <a:prstGeom prst="rect">
-            <a:avLst/>
-          </a:prstGeom>
-          <a:noFill/>
-          <a:ln/>
-        </p:spPr>
-        <p:txBody>
-          <a:bodyPr wrap="square" lIns="0" tIns="0" rIns="0" bIns="0" rtlCol="0" anchor="t"/>
-          <a:lstStyle/>
-          <a:p>
-            <a:pPr algn="ctr" indent="0" marL="0">
-              <a:buNone/>
-            </a:pPr>
-            <a:r>
-              <a:rPr lang="en-US" sz="900" b="1" dirty="0">
-                <a:solidFill>
-                  <a:srgbClr val="404040"/>
-                </a:solidFill>
-                <a:latin typeface="Calibri" pitchFamily="34" charset="0"/>
-                <a:ea typeface="Calibri" pitchFamily="34" charset="-122"/>
-                <a:cs typeface="Calibri" pitchFamily="34" charset="-120"/>
-              </a:rPr>
-              <a:t>-3.4</a:t>
-            </a:r>
-            <a:endParaRPr lang="en-US" sz="900" dirty="0"/>
-          </a:p>
-        </p:txBody>
-      </p:sp>
-      <p:sp>
-        <p:nvSpPr>
-          <p:cNvPr id="33" name="Shape 28"/>
+          <p:cNvPr id="33" name="Shape 27"/>
           <p:cNvSpPr/>
           <p:nvPr/>
         </p:nvSpPr>
         <p:spPr>
           <a:xfrm>
-            <a:off x="5394960" y="2278959"/>
-            <a:ext cx="347472" cy="286024"/>
-          </a:xfrm>
-          <a:prstGeom prst="rect">
-            <a:avLst/>
-          </a:prstGeom>
-          <a:solidFill>
-            <a:srgbClr val="9E9E9E"/>
-          </a:solidFill>
-          <a:ln w="12700">
-            <a:solidFill>
-              <a:srgbClr val="9E9E9E"/>
-            </a:solidFill>
-            <a:prstDash val="solid"/>
-          </a:ln>
-        </p:spPr>
-      </p:sp>
-      <p:sp>
-        <p:nvSpPr>
-          <p:cNvPr id="34" name="Text 29"/>
-          <p:cNvSpPr txBox="1"/>
-          <p:nvPr/>
-        </p:nvSpPr>
-        <p:spPr>
-          <a:xfrm>
-            <a:off x="5340096" y="2871216"/>
-            <a:ext cx="457200" cy="164592"/>
-          </a:xfrm>
-          <a:prstGeom prst="rect">
-            <a:avLst/>
-          </a:prstGeom>
-          <a:noFill/>
-          <a:ln/>
-        </p:spPr>
-        <p:txBody>
-          <a:bodyPr wrap="square" lIns="0" tIns="0" rIns="0" bIns="0" rtlCol="0" anchor="t"/>
-          <a:lstStyle/>
-          <a:p>
-            <a:pPr algn="ctr" indent="0" marL="0">
-              <a:buNone/>
-            </a:pPr>
-            <a:r>
-              <a:rPr lang="en-US" sz="900" dirty="0">
-                <a:solidFill>
-                  <a:srgbClr val="6E6E6E"/>
-                </a:solidFill>
-                <a:latin typeface="Calibri" pitchFamily="34" charset="0"/>
-                <a:ea typeface="Calibri" pitchFamily="34" charset="-122"/>
-                <a:cs typeface="Calibri" pitchFamily="34" charset="-120"/>
-              </a:rPr>
-              <a:t>Y1</a:t>
-            </a:r>
-            <a:endParaRPr lang="en-US" sz="900" dirty="0"/>
-          </a:p>
-        </p:txBody>
-      </p:sp>
-      <p:sp>
-        <p:nvSpPr>
-          <p:cNvPr id="35" name="Text 30"/>
-          <p:cNvSpPr txBox="1"/>
-          <p:nvPr/>
-        </p:nvSpPr>
-        <p:spPr>
-          <a:xfrm>
-            <a:off x="5340096" y="3026664"/>
-            <a:ext cx="457200" cy="164592"/>
-          </a:xfrm>
-          <a:prstGeom prst="rect">
-            <a:avLst/>
-          </a:prstGeom>
-          <a:noFill/>
-          <a:ln/>
-        </p:spPr>
-        <p:txBody>
-          <a:bodyPr wrap="square" lIns="0" tIns="0" rIns="0" bIns="0" rtlCol="0" anchor="t"/>
-          <a:lstStyle/>
-          <a:p>
-            <a:pPr algn="ctr" indent="0" marL="0">
-              <a:buNone/>
-            </a:pPr>
-            <a:r>
-              <a:rPr lang="en-US" sz="900" b="1" dirty="0">
-                <a:solidFill>
-                  <a:srgbClr val="404040"/>
-                </a:solidFill>
-                <a:latin typeface="Calibri" pitchFamily="34" charset="0"/>
-                <a:ea typeface="Calibri" pitchFamily="34" charset="-122"/>
-                <a:cs typeface="Calibri" pitchFamily="34" charset="-120"/>
-              </a:rPr>
-              <a:t>-1.8</a:t>
-            </a:r>
-            <a:endParaRPr lang="en-US" sz="900" dirty="0"/>
-          </a:p>
-        </p:txBody>
-      </p:sp>
-      <p:sp>
-        <p:nvSpPr>
-          <p:cNvPr id="36" name="Shape 31"/>
-          <p:cNvSpPr/>
-          <p:nvPr/>
-        </p:nvSpPr>
-        <p:spPr>
-          <a:xfrm>
-            <a:off x="5943600" y="2278959"/>
-            <a:ext cx="347472" cy="51298"/>
-          </a:xfrm>
-          <a:prstGeom prst="rect">
-            <a:avLst/>
-          </a:prstGeom>
-          <a:solidFill>
-            <a:srgbClr val="9E9E9E"/>
-          </a:solidFill>
-          <a:ln w="12700">
-            <a:solidFill>
-              <a:srgbClr val="9E9E9E"/>
-            </a:solidFill>
-            <a:prstDash val="solid"/>
-          </a:ln>
-        </p:spPr>
-      </p:sp>
-      <p:sp>
-        <p:nvSpPr>
-          <p:cNvPr id="37" name="Text 32"/>
-          <p:cNvSpPr txBox="1"/>
-          <p:nvPr/>
-        </p:nvSpPr>
-        <p:spPr>
-          <a:xfrm>
-            <a:off x="5888736" y="2871216"/>
-            <a:ext cx="457200" cy="164592"/>
-          </a:xfrm>
-          <a:prstGeom prst="rect">
-            <a:avLst/>
-          </a:prstGeom>
-          <a:noFill/>
-          <a:ln/>
-        </p:spPr>
-        <p:txBody>
-          <a:bodyPr wrap="square" lIns="0" tIns="0" rIns="0" bIns="0" rtlCol="0" anchor="t"/>
-          <a:lstStyle/>
-          <a:p>
-            <a:pPr algn="ctr" indent="0" marL="0">
-              <a:buNone/>
-            </a:pPr>
-            <a:r>
-              <a:rPr lang="en-US" sz="900" dirty="0">
-                <a:solidFill>
-                  <a:srgbClr val="6E6E6E"/>
-                </a:solidFill>
-                <a:latin typeface="Calibri" pitchFamily="34" charset="0"/>
-                <a:ea typeface="Calibri" pitchFamily="34" charset="-122"/>
-                <a:cs typeface="Calibri" pitchFamily="34" charset="-120"/>
-              </a:rPr>
-              <a:t>Y2</a:t>
-            </a:r>
-            <a:endParaRPr lang="en-US" sz="900" dirty="0"/>
-          </a:p>
-        </p:txBody>
-      </p:sp>
-      <p:sp>
-        <p:nvSpPr>
-          <p:cNvPr id="38" name="Text 33"/>
-          <p:cNvSpPr txBox="1"/>
-          <p:nvPr/>
-        </p:nvSpPr>
-        <p:spPr>
-          <a:xfrm>
-            <a:off x="5888736" y="3026664"/>
-            <a:ext cx="457200" cy="164592"/>
-          </a:xfrm>
-          <a:prstGeom prst="rect">
-            <a:avLst/>
-          </a:prstGeom>
-          <a:noFill/>
-          <a:ln/>
-        </p:spPr>
-        <p:txBody>
-          <a:bodyPr wrap="square" lIns="0" tIns="0" rIns="0" bIns="0" rtlCol="0" anchor="t"/>
-          <a:lstStyle/>
-          <a:p>
-            <a:pPr algn="ctr" indent="0" marL="0">
-              <a:buNone/>
-            </a:pPr>
-            <a:r>
-              <a:rPr lang="en-US" sz="900" b="1" dirty="0">
-                <a:solidFill>
-                  <a:srgbClr val="404040"/>
-                </a:solidFill>
-                <a:latin typeface="Calibri" pitchFamily="34" charset="0"/>
-                <a:ea typeface="Calibri" pitchFamily="34" charset="-122"/>
-                <a:cs typeface="Calibri" pitchFamily="34" charset="-120"/>
-              </a:rPr>
-              <a:t>-0.3</a:t>
-            </a:r>
-            <a:endParaRPr lang="en-US" sz="900" dirty="0"/>
-          </a:p>
-        </p:txBody>
-      </p:sp>
-      <p:sp>
-        <p:nvSpPr>
-          <p:cNvPr id="39" name="Shape 34"/>
-          <p:cNvSpPr/>
-          <p:nvPr/>
-        </p:nvSpPr>
-        <p:spPr>
-          <a:xfrm>
-            <a:off x="6492240" y="2095530"/>
-            <a:ext cx="347472" cy="183429"/>
-          </a:xfrm>
-          <a:prstGeom prst="rect">
+            <a:off x="850392" y="4425696"/>
+            <a:ext cx="457200" cy="457200"/>
+          </a:xfrm>
+          <a:prstGeom prst="ellipse">
             <a:avLst/>
           </a:prstGeom>
           <a:solidFill>
@@ -31413,16 +32212,40 @@
           </a:ln>
         </p:spPr>
       </p:sp>
-      <p:sp>
-        <p:nvSpPr>
-          <p:cNvPr id="40" name="Text 35"/>
-          <p:cNvSpPr txBox="1"/>
-          <p:nvPr/>
-        </p:nvSpPr>
-        <p:spPr>
-          <a:xfrm>
-            <a:off x="6437376" y="2871216"/>
-            <a:ext cx="457200" cy="164592"/>
+      <p:pic>
+        <p:nvPicPr>
+          <p:cNvPr id="34" name="Image 2" descr="img/icons/scan-line-white.png">    </p:cNvPr>
+          <p:cNvPicPr>
+            <a:picLocks noChangeAspect="1"/>
+          </p:cNvPicPr>
+          <p:nvPr/>
+        </p:nvPicPr>
+        <p:blipFill>
+          <a:blip r:embed="rId3"/>
+          <a:stretch>
+            <a:fillRect/>
+          </a:stretch>
+        </p:blipFill>
+        <p:spPr>
+          <a:xfrm>
+            <a:off x="950976" y="4526280"/>
+            <a:ext cx="256032" cy="256032"/>
+          </a:xfrm>
+          <a:prstGeom prst="rect">
+            <a:avLst/>
+          </a:prstGeom>
+        </p:spPr>
+      </p:pic>
+      <p:sp>
+        <p:nvSpPr>
+          <p:cNvPr id="35" name="Text 28"/>
+          <p:cNvSpPr txBox="1"/>
+          <p:nvPr/>
+        </p:nvSpPr>
+        <p:spPr>
+          <a:xfrm>
+            <a:off x="502920" y="4937760"/>
+            <a:ext cx="1143000" cy="219456"/>
           </a:xfrm>
           <a:prstGeom prst="rect">
             <a:avLst/>
@@ -31438,15 +32261,54 @@
               <a:buNone/>
             </a:pPr>
             <a:r>
+              <a:rPr lang="en-US" sz="1050" b="1" dirty="0">
+                <a:solidFill>
+                  <a:srgbClr val="2B2B2B"/>
+                </a:solidFill>
+                <a:latin typeface="Calibri" pitchFamily="34" charset="0"/>
+                <a:ea typeface="Calibri" pitchFamily="34" charset="-122"/>
+                <a:cs typeface="Calibri" pitchFamily="34" charset="-120"/>
+              </a:rPr>
+              <a:t>Coverage</a:t>
+            </a:r>
+            <a:endParaRPr lang="en-US" sz="1050" dirty="0"/>
+          </a:p>
+        </p:txBody>
+      </p:sp>
+      <p:sp>
+        <p:nvSpPr>
+          <p:cNvPr id="36" name="Text 29"/>
+          <p:cNvSpPr txBox="1"/>
+          <p:nvPr/>
+        </p:nvSpPr>
+        <p:spPr>
+          <a:xfrm>
+            <a:off x="521208" y="5157216"/>
+            <a:ext cx="1106424" cy="438912"/>
+          </a:xfrm>
+          <a:prstGeom prst="rect">
+            <a:avLst/>
+          </a:prstGeom>
+          <a:noFill/>
+          <a:ln/>
+        </p:spPr>
+        <p:txBody>
+          <a:bodyPr wrap="square" lIns="0" tIns="0" rIns="0" bIns="0" rtlCol="0" anchor="t"/>
+          <a:lstStyle/>
+          <a:p>
+            <a:pPr algn="ctr" indent="0" marL="0">
+              <a:buNone/>
+            </a:pPr>
+            <a:r>
               <a:rPr lang="en-US" sz="900" dirty="0">
                 <a:solidFill>
-                  <a:srgbClr val="6E6E6E"/>
-                </a:solidFill>
-                <a:latin typeface="Calibri" pitchFamily="34" charset="0"/>
-                <a:ea typeface="Calibri" pitchFamily="34" charset="-122"/>
-                <a:cs typeface="Calibri" pitchFamily="34" charset="-120"/>
-              </a:rPr>
-              <a:t>Y3</a:t>
+                  <a:srgbClr val="404040"/>
+                </a:solidFill>
+                <a:latin typeface="Calibri" pitchFamily="34" charset="0"/>
+                <a:ea typeface="Calibri" pitchFamily="34" charset="-122"/>
+                <a:cs typeface="Calibri" pitchFamily="34" charset="-120"/>
+              </a:rPr>
+              <a:t>100% of both faces, every coil</a:t>
             </a:r>
             <a:endParaRPr lang="en-US" sz="900" dirty="0"/>
           </a:p>
@@ -31454,23 +32316,23 @@
       </p:sp>
       <p:sp>
         <p:nvSpPr>
-          <p:cNvPr id="41" name="Text 36"/>
-          <p:cNvSpPr txBox="1"/>
-          <p:nvPr/>
-        </p:nvSpPr>
-        <p:spPr>
-          <a:xfrm>
-            <a:off x="6437376" y="3026664"/>
-            <a:ext cx="457200" cy="164592"/>
-          </a:xfrm>
-          <a:prstGeom prst="rect">
-            <a:avLst/>
-          </a:prstGeom>
-          <a:noFill/>
-          <a:ln/>
-        </p:spPr>
-        <p:txBody>
-          <a:bodyPr wrap="square" lIns="0" tIns="0" rIns="0" bIns="0" rtlCol="0" anchor="t"/>
+          <p:cNvPr id="37" name="Text 30"/>
+          <p:cNvSpPr txBox="1"/>
+          <p:nvPr/>
+        </p:nvSpPr>
+        <p:spPr>
+          <a:xfrm>
+            <a:off x="493776" y="5596128"/>
+            <a:ext cx="1161288" cy="256032"/>
+          </a:xfrm>
+          <a:prstGeom prst="rect">
+            <a:avLst/>
+          </a:prstGeom>
+          <a:noFill/>
+          <a:ln/>
+        </p:spPr>
+        <p:txBody>
+          <a:bodyPr wrap="square" lIns="0" tIns="0" rIns="0" bIns="0" rtlCol="0" anchor="ctr"/>
           <a:lstStyle/>
           <a:p>
             <a:pPr algn="ctr" indent="0" marL="0">
@@ -31485,7 +32347,7 @@
                 <a:ea typeface="Calibri" pitchFamily="34" charset="-122"/>
                 <a:cs typeface="Calibri" pitchFamily="34" charset="-120"/>
               </a:rPr>
-              <a:t>+1.2</a:t>
+              <a:t>today: spot checks</a:t>
             </a:r>
             <a:endParaRPr lang="en-US" sz="900" dirty="0"/>
           </a:p>
@@ -31493,16 +32355,43 @@
       </p:sp>
       <p:sp>
         <p:nvSpPr>
-          <p:cNvPr id="42" name="Shape 37"/>
+          <p:cNvPr id="38" name="Shape 31"/>
           <p:cNvSpPr/>
           <p:nvPr/>
         </p:nvSpPr>
         <p:spPr>
           <a:xfrm>
-            <a:off x="7040880" y="1860804"/>
-            <a:ext cx="347472" cy="418155"/>
-          </a:xfrm>
-          <a:prstGeom prst="rect">
+            <a:off x="1751076" y="4334256"/>
+            <a:ext cx="1234440" cy="1554480"/>
+          </a:xfrm>
+          <a:prstGeom prst="roundRect">
+            <a:avLst>
+              <a:gd name="adj" fmla="val 4444"/>
+            </a:avLst>
+          </a:prstGeom>
+          <a:solidFill>
+            <a:srgbClr val="F3F3F3"/>
+          </a:solidFill>
+          <a:ln w="12700">
+            <a:solidFill>
+              <a:srgbClr val="F3F3F3"/>
+            </a:solidFill>
+            <a:prstDash val="solid"/>
+          </a:ln>
+        </p:spPr>
+      </p:sp>
+      <p:sp>
+        <p:nvSpPr>
+          <p:cNvPr id="39" name="Shape 32"/>
+          <p:cNvSpPr/>
+          <p:nvPr/>
+        </p:nvSpPr>
+        <p:spPr>
+          <a:xfrm>
+            <a:off x="2144268" y="4425696"/>
+            <a:ext cx="457200" cy="457200"/>
+          </a:xfrm>
+          <a:prstGeom prst="ellipse">
             <a:avLst/>
           </a:prstGeom>
           <a:solidFill>
@@ -31516,16 +32405,40 @@
           </a:ln>
         </p:spPr>
       </p:sp>
-      <p:sp>
-        <p:nvSpPr>
-          <p:cNvPr id="43" name="Text 38"/>
-          <p:cNvSpPr txBox="1"/>
-          <p:nvPr/>
-        </p:nvSpPr>
-        <p:spPr>
-          <a:xfrm>
-            <a:off x="6986016" y="2871216"/>
-            <a:ext cx="457200" cy="164592"/>
+      <p:pic>
+        <p:nvPicPr>
+          <p:cNvPr id="40" name="Image 3" descr="img/icons/users-white.png">    </p:cNvPr>
+          <p:cNvPicPr>
+            <a:picLocks noChangeAspect="1"/>
+          </p:cNvPicPr>
+          <p:nvPr/>
+        </p:nvPicPr>
+        <p:blipFill>
+          <a:blip r:embed="rId4"/>
+          <a:stretch>
+            <a:fillRect/>
+          </a:stretch>
+        </p:blipFill>
+        <p:spPr>
+          <a:xfrm>
+            <a:off x="2244852" y="4526280"/>
+            <a:ext cx="256032" cy="256032"/>
+          </a:xfrm>
+          <a:prstGeom prst="rect">
+            <a:avLst/>
+          </a:prstGeom>
+        </p:spPr>
+      </p:pic>
+      <p:sp>
+        <p:nvSpPr>
+          <p:cNvPr id="41" name="Text 33"/>
+          <p:cNvSpPr txBox="1"/>
+          <p:nvPr/>
+        </p:nvSpPr>
+        <p:spPr>
+          <a:xfrm>
+            <a:off x="1796796" y="4937760"/>
+            <a:ext cx="1143000" cy="219456"/>
           </a:xfrm>
           <a:prstGeom prst="rect">
             <a:avLst/>
@@ -31541,15 +32454,54 @@
               <a:buNone/>
             </a:pPr>
             <a:r>
+              <a:rPr lang="en-US" sz="1050" b="1" dirty="0">
+                <a:solidFill>
+                  <a:srgbClr val="2B2B2B"/>
+                </a:solidFill>
+                <a:latin typeface="Calibri" pitchFamily="34" charset="0"/>
+                <a:ea typeface="Calibri" pitchFamily="34" charset="-122"/>
+                <a:cs typeface="Calibri" pitchFamily="34" charset="-120"/>
+              </a:rPr>
+              <a:t>Customers</a:t>
+            </a:r>
+            <a:endParaRPr lang="en-US" sz="1050" dirty="0"/>
+          </a:p>
+        </p:txBody>
+      </p:sp>
+      <p:sp>
+        <p:nvSpPr>
+          <p:cNvPr id="42" name="Text 34"/>
+          <p:cNvSpPr txBox="1"/>
+          <p:nvPr/>
+        </p:nvSpPr>
+        <p:spPr>
+          <a:xfrm>
+            <a:off x="1815084" y="5157216"/>
+            <a:ext cx="1106424" cy="438912"/>
+          </a:xfrm>
+          <a:prstGeom prst="rect">
+            <a:avLst/>
+          </a:prstGeom>
+          <a:noFill/>
+          <a:ln/>
+        </p:spPr>
+        <p:txBody>
+          <a:bodyPr wrap="square" lIns="0" tIns="0" rIns="0" bIns="0" rtlCol="0" anchor="t"/>
+          <a:lstStyle/>
+          <a:p>
+            <a:pPr algn="ctr" indent="0" marL="0">
+              <a:buNone/>
+            </a:pPr>
+            <a:r>
               <a:rPr lang="en-US" sz="900" dirty="0">
                 <a:solidFill>
-                  <a:srgbClr val="6E6E6E"/>
-                </a:solidFill>
-                <a:latin typeface="Calibri" pitchFamily="34" charset="0"/>
-                <a:ea typeface="Calibri" pitchFamily="34" charset="-122"/>
-                <a:cs typeface="Calibri" pitchFamily="34" charset="-120"/>
-              </a:rPr>
-              <a:t>Y4</a:t>
+                  <a:srgbClr val="404040"/>
+                </a:solidFill>
+                <a:latin typeface="Calibri" pitchFamily="34" charset="0"/>
+                <a:ea typeface="Calibri" pitchFamily="34" charset="-122"/>
+                <a:cs typeface="Calibri" pitchFamily="34" charset="-120"/>
+              </a:rPr>
+              <a:t>Defect map per coil for rail, metro, auto buyers</a:t>
             </a:r>
             <a:endParaRPr lang="en-US" sz="900" dirty="0"/>
           </a:p>
@@ -31557,23 +32509,23 @@
       </p:sp>
       <p:sp>
         <p:nvSpPr>
-          <p:cNvPr id="44" name="Text 39"/>
-          <p:cNvSpPr txBox="1"/>
-          <p:nvPr/>
-        </p:nvSpPr>
-        <p:spPr>
-          <a:xfrm>
-            <a:off x="6986016" y="3026664"/>
-            <a:ext cx="457200" cy="164592"/>
-          </a:xfrm>
-          <a:prstGeom prst="rect">
-            <a:avLst/>
-          </a:prstGeom>
-          <a:noFill/>
-          <a:ln/>
-        </p:spPr>
-        <p:txBody>
-          <a:bodyPr wrap="square" lIns="0" tIns="0" rIns="0" bIns="0" rtlCol="0" anchor="t"/>
+          <p:cNvPr id="43" name="Text 35"/>
+          <p:cNvSpPr txBox="1"/>
+          <p:nvPr/>
+        </p:nvSpPr>
+        <p:spPr>
+          <a:xfrm>
+            <a:off x="1787652" y="5596128"/>
+            <a:ext cx="1161288" cy="256032"/>
+          </a:xfrm>
+          <a:prstGeom prst="rect">
+            <a:avLst/>
+          </a:prstGeom>
+          <a:noFill/>
+          <a:ln/>
+        </p:spPr>
+        <p:txBody>
+          <a:bodyPr wrap="square" lIns="0" tIns="0" rIns="0" bIns="0" rtlCol="0" anchor="ctr"/>
           <a:lstStyle/>
           <a:p>
             <a:pPr algn="ctr" indent="0" marL="0">
@@ -31588,7 +32540,7 @@
                 <a:ea typeface="Calibri" pitchFamily="34" charset="-122"/>
                 <a:cs typeface="Calibri" pitchFamily="34" charset="-120"/>
               </a:rPr>
-              <a:t>+2.7</a:t>
+              <a:t>Vande Bharat supplier</a:t>
             </a:r>
             <a:endParaRPr lang="en-US" sz="900" dirty="0"/>
           </a:p>
@@ -31596,16 +32548,43 @@
       </p:sp>
       <p:sp>
         <p:nvSpPr>
-          <p:cNvPr id="45" name="Shape 40"/>
+          <p:cNvPr id="44" name="Shape 36"/>
           <p:cNvSpPr/>
           <p:nvPr/>
         </p:nvSpPr>
         <p:spPr>
           <a:xfrm>
-            <a:off x="7589520" y="1627632"/>
-            <a:ext cx="347472" cy="651327"/>
-          </a:xfrm>
-          <a:prstGeom prst="rect">
+            <a:off x="3044952" y="4334256"/>
+            <a:ext cx="1234440" cy="1554480"/>
+          </a:xfrm>
+          <a:prstGeom prst="roundRect">
+            <a:avLst>
+              <a:gd name="adj" fmla="val 4444"/>
+            </a:avLst>
+          </a:prstGeom>
+          <a:solidFill>
+            <a:srgbClr val="F3F3F3"/>
+          </a:solidFill>
+          <a:ln w="12700">
+            <a:solidFill>
+              <a:srgbClr val="F3F3F3"/>
+            </a:solidFill>
+            <a:prstDash val="solid"/>
+          </a:ln>
+        </p:spPr>
+      </p:sp>
+      <p:sp>
+        <p:nvSpPr>
+          <p:cNvPr id="45" name="Shape 37"/>
+          <p:cNvSpPr/>
+          <p:nvPr/>
+        </p:nvSpPr>
+        <p:spPr>
+          <a:xfrm>
+            <a:off x="3438144" y="4425696"/>
+            <a:ext cx="457200" cy="457200"/>
+          </a:xfrm>
+          <a:prstGeom prst="ellipse">
             <a:avLst/>
           </a:prstGeom>
           <a:solidFill>
@@ -31619,16 +32598,40 @@
           </a:ln>
         </p:spPr>
       </p:sp>
-      <p:sp>
-        <p:nvSpPr>
-          <p:cNvPr id="46" name="Text 41"/>
-          <p:cNvSpPr txBox="1"/>
-          <p:nvPr/>
-        </p:nvSpPr>
-        <p:spPr>
-          <a:xfrm>
-            <a:off x="7534656" y="2871216"/>
-            <a:ext cx="457200" cy="164592"/>
+      <p:pic>
+        <p:nvPicPr>
+          <p:cNvPr id="46" name="Image 4" descr="img/icons/wrench-white.png">    </p:cNvPr>
+          <p:cNvPicPr>
+            <a:picLocks noChangeAspect="1"/>
+          </p:cNvPicPr>
+          <p:nvPr/>
+        </p:nvPicPr>
+        <p:blipFill>
+          <a:blip r:embed="rId5"/>
+          <a:stretch>
+            <a:fillRect/>
+          </a:stretch>
+        </p:blipFill>
+        <p:spPr>
+          <a:xfrm>
+            <a:off x="3538728" y="4526280"/>
+            <a:ext cx="256032" cy="256032"/>
+          </a:xfrm>
+          <a:prstGeom prst="rect">
+            <a:avLst/>
+          </a:prstGeom>
+        </p:spPr>
+      </p:pic>
+      <p:sp>
+        <p:nvSpPr>
+          <p:cNvPr id="47" name="Text 38"/>
+          <p:cNvSpPr txBox="1"/>
+          <p:nvPr/>
+        </p:nvSpPr>
+        <p:spPr>
+          <a:xfrm>
+            <a:off x="3090672" y="4937760"/>
+            <a:ext cx="1143000" cy="219456"/>
           </a:xfrm>
           <a:prstGeom prst="rect">
             <a:avLst/>
@@ -31644,15 +32647,54 @@
               <a:buNone/>
             </a:pPr>
             <a:r>
+              <a:rPr lang="en-US" sz="1050" b="1" dirty="0">
+                <a:solidFill>
+                  <a:srgbClr val="2B2B2B"/>
+                </a:solidFill>
+                <a:latin typeface="Calibri" pitchFamily="34" charset="0"/>
+                <a:ea typeface="Calibri" pitchFamily="34" charset="-122"/>
+                <a:cs typeface="Calibri" pitchFamily="34" charset="-120"/>
+              </a:rPr>
+              <a:t>Process</a:t>
+            </a:r>
+            <a:endParaRPr lang="en-US" sz="1050" dirty="0"/>
+          </a:p>
+        </p:txBody>
+      </p:sp>
+      <p:sp>
+        <p:nvSpPr>
+          <p:cNvPr id="48" name="Text 39"/>
+          <p:cNvSpPr txBox="1"/>
+          <p:nvPr/>
+        </p:nvSpPr>
+        <p:spPr>
+          <a:xfrm>
+            <a:off x="3108960" y="5157216"/>
+            <a:ext cx="1106424" cy="438912"/>
+          </a:xfrm>
+          <a:prstGeom prst="rect">
+            <a:avLst/>
+          </a:prstGeom>
+          <a:noFill/>
+          <a:ln/>
+        </p:spPr>
+        <p:txBody>
+          <a:bodyPr wrap="square" lIns="0" tIns="0" rIns="0" bIns="0" rtlCol="0" anchor="t"/>
+          <a:lstStyle/>
+          <a:p>
+            <a:pPr algn="ctr" indent="0" marL="0">
+              <a:buNone/>
+            </a:pPr>
+            <a:r>
               <a:rPr lang="en-US" sz="900" dirty="0">
                 <a:solidFill>
-                  <a:srgbClr val="6E6E6E"/>
-                </a:solidFill>
-                <a:latin typeface="Calibri" pitchFamily="34" charset="0"/>
-                <a:ea typeface="Calibri" pitchFamily="34" charset="-122"/>
-                <a:cs typeface="Calibri" pitchFamily="34" charset="-120"/>
-              </a:rPr>
-              <a:t>Y5</a:t>
+                  <a:srgbClr val="404040"/>
+                </a:solidFill>
+                <a:latin typeface="Calibri" pitchFamily="34" charset="0"/>
+                <a:ea typeface="Calibri" pitchFamily="34" charset="-122"/>
+                <a:cs typeface="Calibri" pitchFamily="34" charset="-120"/>
+              </a:rPr>
+              <a:t>Defects tied to heat and coil IDs</a:t>
             </a:r>
             <a:endParaRPr lang="en-US" sz="900" dirty="0"/>
           </a:p>
@@ -31660,23 +32702,23 @@
       </p:sp>
       <p:sp>
         <p:nvSpPr>
-          <p:cNvPr id="47" name="Text 42"/>
-          <p:cNvSpPr txBox="1"/>
-          <p:nvPr/>
-        </p:nvSpPr>
-        <p:spPr>
-          <a:xfrm>
-            <a:off x="7534656" y="3026664"/>
-            <a:ext cx="457200" cy="164592"/>
-          </a:xfrm>
-          <a:prstGeom prst="rect">
-            <a:avLst/>
-          </a:prstGeom>
-          <a:noFill/>
-          <a:ln/>
-        </p:spPr>
-        <p:txBody>
-          <a:bodyPr wrap="square" lIns="0" tIns="0" rIns="0" bIns="0" rtlCol="0" anchor="t"/>
+          <p:cNvPr id="49" name="Text 40"/>
+          <p:cNvSpPr txBox="1"/>
+          <p:nvPr/>
+        </p:nvSpPr>
+        <p:spPr>
+          <a:xfrm>
+            <a:off x="3081528" y="5596128"/>
+            <a:ext cx="1161288" cy="256032"/>
+          </a:xfrm>
+          <a:prstGeom prst="rect">
+            <a:avLst/>
+          </a:prstGeom>
+          <a:noFill/>
+          <a:ln/>
+        </p:spPr>
+        <p:txBody>
+          <a:bodyPr wrap="square" lIns="0" tIns="0" rIns="0" bIns="0" rtlCol="0" anchor="ctr"/>
           <a:lstStyle/>
           <a:p>
             <a:pPr algn="ctr" indent="0" marL="0">
@@ -31691,7 +32733,7 @@
                 <a:ea typeface="Calibri" pitchFamily="34" charset="-122"/>
                 <a:cs typeface="Calibri" pitchFamily="34" charset="-120"/>
               </a:rPr>
-              <a:t>+4.2</a:t>
+              <a:t>6 families, each owned</a:t>
             </a:r>
             <a:endParaRPr lang="en-US" sz="900" dirty="0"/>
           </a:p>
@@ -31699,245 +32741,26 @@
       </p:sp>
       <p:sp>
         <p:nvSpPr>
-          <p:cNvPr id="48" name="Shape 43"/>
+          <p:cNvPr id="50" name="Shape 41"/>
           <p:cNvSpPr/>
           <p:nvPr/>
         </p:nvSpPr>
         <p:spPr>
           <a:xfrm>
-            <a:off x="6227064" y="1591056"/>
-            <a:ext cx="0" cy="1261872"/>
-          </a:xfrm>
-          <a:prstGeom prst="line">
-            <a:avLst/>
-          </a:prstGeom>
-          <a:noFill/>
-          <a:ln w="12700">
-            <a:solidFill>
-              <a:srgbClr val="2B2B2B"/>
-            </a:solidFill>
-            <a:prstDash val="dash"/>
-          </a:ln>
-        </p:spPr>
-      </p:sp>
-      <p:sp>
-        <p:nvSpPr>
-          <p:cNvPr id="49" name="Text 44"/>
-          <p:cNvSpPr txBox="1"/>
-          <p:nvPr/>
-        </p:nvSpPr>
-        <p:spPr>
-          <a:xfrm>
-            <a:off x="5038344" y="1572768"/>
-            <a:ext cx="1143000" cy="182880"/>
-          </a:xfrm>
-          <a:prstGeom prst="rect">
-            <a:avLst/>
-          </a:prstGeom>
-          <a:noFill/>
-          <a:ln/>
-        </p:spPr>
-        <p:txBody>
-          <a:bodyPr wrap="square" lIns="0" tIns="0" rIns="0" bIns="0" rtlCol="0" anchor="t"/>
-          <a:lstStyle/>
-          <a:p>
-            <a:pPr algn="r" indent="0" marL="0">
-              <a:buNone/>
-            </a:pPr>
-            <a:r>
-              <a:rPr lang="en-US" sz="900" b="1" dirty="0">
-                <a:solidFill>
-                  <a:srgbClr val="2B2B2B"/>
-                </a:solidFill>
-                <a:latin typeface="Calibri" pitchFamily="34" charset="0"/>
-                <a:ea typeface="Calibri" pitchFamily="34" charset="-122"/>
-                <a:cs typeface="Calibri" pitchFamily="34" charset="-120"/>
-              </a:rPr>
-              <a:t>pays back ~2.2 yr</a:t>
-            </a:r>
-            <a:endParaRPr lang="en-US" sz="900" dirty="0"/>
-          </a:p>
-        </p:txBody>
-      </p:sp>
-      <p:sp>
-        <p:nvSpPr>
-          <p:cNvPr id="50" name="Text 45"/>
-          <p:cNvSpPr txBox="1"/>
-          <p:nvPr/>
-        </p:nvSpPr>
-        <p:spPr>
-          <a:xfrm>
-            <a:off x="4663440" y="3218688"/>
-            <a:ext cx="3474720" cy="219456"/>
-          </a:xfrm>
-          <a:prstGeom prst="rect">
-            <a:avLst/>
-          </a:prstGeom>
-          <a:noFill/>
-          <a:ln/>
-        </p:spPr>
-        <p:txBody>
-          <a:bodyPr wrap="square" lIns="0" tIns="0" rIns="0" bIns="0" rtlCol="0" anchor="ctr"/>
-          <a:lstStyle/>
-          <a:p>
-            <a:pPr indent="0" marL="0">
-              <a:buNone/>
-            </a:pPr>
-            <a:r>
-              <a:rPr lang="en-US" sz="1200" b="1" dirty="0">
-                <a:solidFill>
-                  <a:srgbClr val="D2651F"/>
-                </a:solidFill>
-                <a:latin typeface="Calibri" pitchFamily="34" charset="0"/>
-                <a:ea typeface="Calibri" pitchFamily="34" charset="-122"/>
-                <a:cs typeface="Calibri" pitchFamily="34" charset="-120"/>
-              </a:rPr>
-              <a:t>+₹2.1 cr</a:t>
-            </a:r>
-            <a:pPr indent="0" marL="0">
-              <a:buNone/>
-            </a:pPr>
-            <a:r>
-              <a:rPr lang="en-US" sz="950" dirty="0">
-                <a:solidFill>
-                  <a:srgbClr val="404040"/>
-                </a:solidFill>
-                <a:latin typeface="Calibri" pitchFamily="34" charset="0"/>
-                <a:ea typeface="Calibri" pitchFamily="34" charset="-122"/>
-                <a:cs typeface="Calibri" pitchFamily="34" charset="-120"/>
-              </a:rPr>
-              <a:t>  5-year NPV per line at 12%</a:t>
-            </a:r>
-            <a:endParaRPr lang="en-US" sz="950" dirty="0"/>
-          </a:p>
-        </p:txBody>
-      </p:sp>
-      <p:sp>
-        <p:nvSpPr>
-          <p:cNvPr id="51" name="Text 46"/>
-          <p:cNvSpPr txBox="1"/>
-          <p:nvPr/>
-        </p:nvSpPr>
-        <p:spPr>
-          <a:xfrm>
-            <a:off x="4663440" y="3438144"/>
-            <a:ext cx="3474720" cy="219456"/>
-          </a:xfrm>
-          <a:prstGeom prst="rect">
-            <a:avLst/>
-          </a:prstGeom>
-          <a:noFill/>
-          <a:ln/>
-        </p:spPr>
-        <p:txBody>
-          <a:bodyPr wrap="square" lIns="0" tIns="0" rIns="0" bIns="0" rtlCol="0" anchor="ctr"/>
-          <a:lstStyle/>
-          <a:p>
-            <a:pPr indent="0" marL="0">
-              <a:buNone/>
-            </a:pPr>
-            <a:r>
-              <a:rPr lang="en-US" sz="1200" b="1" dirty="0">
-                <a:solidFill>
-                  <a:srgbClr val="1A1A1A"/>
-                </a:solidFill>
-                <a:latin typeface="Calibri" pitchFamily="34" charset="0"/>
-                <a:ea typeface="Calibri" pitchFamily="34" charset="-122"/>
-                <a:cs typeface="Calibri" pitchFamily="34" charset="-120"/>
-              </a:rPr>
-              <a:t>−₹11.6 cr</a:t>
-            </a:r>
-            <a:pPr indent="0" marL="0">
-              <a:buNone/>
-            </a:pPr>
-            <a:r>
-              <a:rPr lang="en-US" sz="950" dirty="0">
-                <a:solidFill>
-                  <a:srgbClr val="404040"/>
-                </a:solidFill>
-                <a:latin typeface="Calibri" pitchFamily="34" charset="0"/>
-                <a:ea typeface="Calibri" pitchFamily="34" charset="-122"/>
-                <a:cs typeface="Calibri" pitchFamily="34" charset="-120"/>
-              </a:rPr>
-              <a:t>  commercial system after 5 years</a:t>
-            </a:r>
-            <a:endParaRPr lang="en-US" sz="950" dirty="0"/>
-          </a:p>
-        </p:txBody>
-      </p:sp>
-      <p:sp>
-        <p:nvSpPr>
-          <p:cNvPr id="52" name="Text 47"/>
-          <p:cNvSpPr txBox="1"/>
-          <p:nvPr/>
-        </p:nvSpPr>
-        <p:spPr>
-          <a:xfrm>
-            <a:off x="4663440" y="3657600"/>
-            <a:ext cx="3474720" cy="219456"/>
-          </a:xfrm>
-          <a:prstGeom prst="rect">
-            <a:avLst/>
-          </a:prstGeom>
-          <a:noFill/>
-          <a:ln/>
-        </p:spPr>
-        <p:txBody>
-          <a:bodyPr wrap="square" lIns="0" tIns="0" rIns="0" bIns="0" rtlCol="0" anchor="ctr"/>
-          <a:lstStyle/>
-          <a:p>
-            <a:pPr indent="0" marL="0">
-              <a:buNone/>
-            </a:pPr>
-            <a:r>
-              <a:rPr lang="en-US" sz="1200" b="1" dirty="0">
-                <a:solidFill>
-                  <a:srgbClr val="D2651F"/>
-                </a:solidFill>
-                <a:latin typeface="Calibri" pitchFamily="34" charset="0"/>
-                <a:ea typeface="Calibri" pitchFamily="34" charset="-122"/>
-                <a:cs typeface="Calibri" pitchFamily="34" charset="-120"/>
-              </a:rPr>
-              <a:t>≥ 0.11%</a:t>
-            </a:r>
-            <a:pPr indent="0" marL="0">
-              <a:buNone/>
-            </a:pPr>
-            <a:r>
-              <a:rPr lang="en-US" sz="950" dirty="0">
-                <a:solidFill>
-                  <a:srgbClr val="404040"/>
-                </a:solidFill>
-                <a:latin typeface="Calibri" pitchFamily="34" charset="0"/>
-                <a:ea typeface="Calibri" pitchFamily="34" charset="-122"/>
-                <a:cs typeface="Calibri" pitchFamily="34" charset="-120"/>
-              </a:rPr>
-              <a:t>  of revenue lost to downgrade = 2-yr payback</a:t>
-            </a:r>
-            <a:endParaRPr lang="en-US" sz="950" dirty="0"/>
-          </a:p>
-        </p:txBody>
-      </p:sp>
-      <p:sp>
-        <p:nvSpPr>
-          <p:cNvPr id="53" name="Shape 48"/>
-          <p:cNvSpPr/>
-          <p:nvPr/>
-        </p:nvSpPr>
-        <p:spPr>
-          <a:xfrm>
-            <a:off x="8321040" y="1234440"/>
-            <a:ext cx="3410712" cy="274320"/>
-          </a:xfrm>
-          <a:prstGeom prst="rect">
-            <a:avLst/>
+            <a:off x="4338828" y="4334256"/>
+            <a:ext cx="1234440" cy="1554480"/>
+          </a:xfrm>
+          <a:prstGeom prst="roundRect">
+            <a:avLst>
+              <a:gd name="adj" fmla="val 4444"/>
+            </a:avLst>
           </a:prstGeom>
           <a:solidFill>
-            <a:srgbClr val="E4803A"/>
+            <a:srgbClr val="F3F3F3"/>
           </a:solidFill>
           <a:ln w="12700">
             <a:solidFill>
-              <a:srgbClr val="E4803A"/>
+              <a:srgbClr val="F3F3F3"/>
             </a:solidFill>
             <a:prstDash val="solid"/>
           </a:ln>
@@ -31945,94 +32768,16 @@
       </p:sp>
       <p:sp>
         <p:nvSpPr>
-          <p:cNvPr id="54" name="Text 49"/>
-          <p:cNvSpPr txBox="1"/>
-          <p:nvPr/>
-        </p:nvSpPr>
-        <p:spPr>
-          <a:xfrm>
-            <a:off x="8412480" y="1234440"/>
-            <a:ext cx="3227832" cy="274320"/>
-          </a:xfrm>
-          <a:prstGeom prst="rect">
-            <a:avLst/>
-          </a:prstGeom>
-          <a:noFill/>
-          <a:ln/>
-        </p:spPr>
-        <p:txBody>
-          <a:bodyPr wrap="square" lIns="0" tIns="0" rIns="0" bIns="0" rtlCol="0" anchor="ctr"/>
-          <a:lstStyle/>
-          <a:p>
-            <a:pPr indent="0" marL="0">
-              <a:buNone/>
-            </a:pPr>
-            <a:r>
-              <a:rPr lang="en-US" sz="1100" b="1" dirty="0">
-                <a:solidFill>
-                  <a:srgbClr val="FFFFFF"/>
-                </a:solidFill>
-                <a:latin typeface="Calibri" pitchFamily="34" charset="0"/>
-                <a:ea typeface="Calibri" pitchFamily="34" charset="-122"/>
-                <a:cs typeface="Calibri" pitchFamily="34" charset="-120"/>
-              </a:rPr>
-              <a:t>What moves payback (years)</a:t>
-            </a:r>
-            <a:endParaRPr lang="en-US" sz="1100" dirty="0"/>
-          </a:p>
-        </p:txBody>
-      </p:sp>
-      <p:sp>
-        <p:nvSpPr>
-          <p:cNvPr id="55" name="Text 50"/>
-          <p:cNvSpPr txBox="1"/>
-          <p:nvPr/>
-        </p:nvSpPr>
-        <p:spPr>
-          <a:xfrm>
-            <a:off x="8366760" y="1645920"/>
-            <a:ext cx="1353312" cy="274320"/>
-          </a:xfrm>
-          <a:prstGeom prst="rect">
-            <a:avLst/>
-          </a:prstGeom>
-          <a:noFill/>
-          <a:ln/>
-        </p:spPr>
-        <p:txBody>
-          <a:bodyPr wrap="square" lIns="0" tIns="0" rIns="0" bIns="0" rtlCol="0" anchor="ctr"/>
-          <a:lstStyle/>
-          <a:p>
-            <a:pPr indent="0" marL="0">
-              <a:buNone/>
-            </a:pPr>
-            <a:r>
-              <a:rPr lang="en-US" sz="900" dirty="0">
-                <a:solidFill>
-                  <a:srgbClr val="404040"/>
-                </a:solidFill>
-                <a:latin typeface="Calibri" pitchFamily="34" charset="0"/>
-                <a:ea typeface="Calibri" pitchFamily="34" charset="-122"/>
-                <a:cs typeface="Calibri" pitchFamily="34" charset="-120"/>
-              </a:rPr>
-              <a:t>Downgrade rate 0.5-2%</a:t>
-            </a:r>
-            <a:endParaRPr lang="en-US" sz="900" dirty="0"/>
-          </a:p>
-        </p:txBody>
-      </p:sp>
-      <p:sp>
-        <p:nvSpPr>
-          <p:cNvPr id="56" name="Shape 51"/>
+          <p:cNvPr id="51" name="Shape 42"/>
           <p:cNvSpPr/>
           <p:nvPr/>
         </p:nvSpPr>
         <p:spPr>
           <a:xfrm>
-            <a:off x="9930711" y="1691640"/>
-            <a:ext cx="257142" cy="182880"/>
-          </a:xfrm>
-          <a:prstGeom prst="rect">
+            <a:off x="4732020" y="4425696"/>
+            <a:ext cx="457200" cy="457200"/>
+          </a:xfrm>
+          <a:prstGeom prst="ellipse">
             <a:avLst/>
           </a:prstGeom>
           <a:solidFill>
@@ -32046,26 +32791,169 @@
           </a:ln>
         </p:spPr>
       </p:sp>
-      <p:sp>
-        <p:nvSpPr>
-          <p:cNvPr id="57" name="Shape 52"/>
+      <p:pic>
+        <p:nvPicPr>
+          <p:cNvPr id="52" name="Image 5" descr="img/icons/hard-hat-white.png">    </p:cNvPr>
+          <p:cNvPicPr>
+            <a:picLocks noChangeAspect="1"/>
+          </p:cNvPicPr>
+          <p:nvPr/>
+        </p:nvPicPr>
+        <p:blipFill>
+          <a:blip r:embed="rId6"/>
+          <a:stretch>
+            <a:fillRect/>
+          </a:stretch>
+        </p:blipFill>
+        <p:spPr>
+          <a:xfrm>
+            <a:off x="4832604" y="4526280"/>
+            <a:ext cx="256032" cy="256032"/>
+          </a:xfrm>
+          <a:prstGeom prst="rect">
+            <a:avLst/>
+          </a:prstGeom>
+        </p:spPr>
+      </p:pic>
+      <p:sp>
+        <p:nvSpPr>
+          <p:cNvPr id="53" name="Text 43"/>
+          <p:cNvSpPr txBox="1"/>
+          <p:nvPr/>
+        </p:nvSpPr>
+        <p:spPr>
+          <a:xfrm>
+            <a:off x="4384548" y="4937760"/>
+            <a:ext cx="1143000" cy="219456"/>
+          </a:xfrm>
+          <a:prstGeom prst="rect">
+            <a:avLst/>
+          </a:prstGeom>
+          <a:noFill/>
+          <a:ln/>
+        </p:spPr>
+        <p:txBody>
+          <a:bodyPr wrap="square" lIns="0" tIns="0" rIns="0" bIns="0" rtlCol="0" anchor="t"/>
+          <a:lstStyle/>
+          <a:p>
+            <a:pPr algn="ctr" indent="0" marL="0">
+              <a:buNone/>
+            </a:pPr>
+            <a:r>
+              <a:rPr lang="en-US" sz="1050" b="1" dirty="0">
+                <a:solidFill>
+                  <a:srgbClr val="2B2B2B"/>
+                </a:solidFill>
+                <a:latin typeface="Calibri" pitchFamily="34" charset="0"/>
+                <a:ea typeface="Calibri" pitchFamily="34" charset="-122"/>
+                <a:cs typeface="Calibri" pitchFamily="34" charset="-120"/>
+              </a:rPr>
+              <a:t>Safety</a:t>
+            </a:r>
+            <a:endParaRPr lang="en-US" sz="1050" dirty="0"/>
+          </a:p>
+        </p:txBody>
+      </p:sp>
+      <p:sp>
+        <p:nvSpPr>
+          <p:cNvPr id="54" name="Text 44"/>
+          <p:cNvSpPr txBox="1"/>
+          <p:nvPr/>
+        </p:nvSpPr>
+        <p:spPr>
+          <a:xfrm>
+            <a:off x="4402836" y="5157216"/>
+            <a:ext cx="1106424" cy="438912"/>
+          </a:xfrm>
+          <a:prstGeom prst="rect">
+            <a:avLst/>
+          </a:prstGeom>
+          <a:noFill/>
+          <a:ln/>
+        </p:spPr>
+        <p:txBody>
+          <a:bodyPr wrap="square" lIns="0" tIns="0" rIns="0" bIns="0" rtlCol="0" anchor="t"/>
+          <a:lstStyle/>
+          <a:p>
+            <a:pPr algn="ctr" indent="0" marL="0">
+              <a:buNone/>
+            </a:pPr>
+            <a:r>
+              <a:rPr lang="en-US" sz="900" dirty="0">
+                <a:solidFill>
+                  <a:srgbClr val="404040"/>
+                </a:solidFill>
+                <a:latin typeface="Calibri" pitchFamily="34" charset="0"/>
+                <a:ea typeface="Calibri" pitchFamily="34" charset="-122"/>
+                <a:cs typeface="Calibri" pitchFamily="34" charset="-120"/>
+              </a:rPr>
+              <a:t>Severe-defect holds prevent strip breaks</a:t>
+            </a:r>
+            <a:endParaRPr lang="en-US" sz="900" dirty="0"/>
+          </a:p>
+        </p:txBody>
+      </p:sp>
+      <p:sp>
+        <p:nvSpPr>
+          <p:cNvPr id="55" name="Text 45"/>
+          <p:cNvSpPr txBox="1"/>
+          <p:nvPr/>
+        </p:nvSpPr>
+        <p:spPr>
+          <a:xfrm>
+            <a:off x="4375404" y="5596128"/>
+            <a:ext cx="1161288" cy="256032"/>
+          </a:xfrm>
+          <a:prstGeom prst="rect">
+            <a:avLst/>
+          </a:prstGeom>
+          <a:noFill/>
+          <a:ln/>
+        </p:spPr>
+        <p:txBody>
+          <a:bodyPr wrap="square" lIns="0" tIns="0" rIns="0" bIns="0" rtlCol="0" anchor="ctr"/>
+          <a:lstStyle/>
+          <a:p>
+            <a:pPr algn="ctr" indent="0" marL="0">
+              <a:buNone/>
+            </a:pPr>
+            <a:r>
+              <a:rPr lang="en-US" sz="900" b="1" dirty="0">
+                <a:solidFill>
+                  <a:srgbClr val="D2651F"/>
+                </a:solidFill>
+                <a:latin typeface="Calibri" pitchFamily="34" charset="0"/>
+                <a:ea typeface="Calibri" pitchFamily="34" charset="-122"/>
+                <a:cs typeface="Calibri" pitchFamily="34" charset="-120"/>
+              </a:rPr>
+              <a:t>Ternium's business case</a:t>
+            </a:r>
+            <a:endParaRPr lang="en-US" sz="900" dirty="0"/>
+          </a:p>
+        </p:txBody>
+      </p:sp>
+      <p:sp>
+        <p:nvSpPr>
+          <p:cNvPr id="56" name="Shape 46"/>
           <p:cNvSpPr/>
           <p:nvPr/>
         </p:nvSpPr>
         <p:spPr>
           <a:xfrm>
-            <a:off x="10187853" y="1691640"/>
-            <a:ext cx="894936" cy="182880"/>
-          </a:xfrm>
-          <a:prstGeom prst="rect">
-            <a:avLst/>
+            <a:off x="5632704" y="4334256"/>
+            <a:ext cx="1234440" cy="1554480"/>
+          </a:xfrm>
+          <a:prstGeom prst="roundRect">
+            <a:avLst>
+              <a:gd name="adj" fmla="val 4444"/>
+            </a:avLst>
           </a:prstGeom>
           <a:solidFill>
-            <a:srgbClr val="9E9E9E"/>
+            <a:srgbClr val="F3F3F3"/>
           </a:solidFill>
           <a:ln w="12700">
             <a:solidFill>
-              <a:srgbClr val="9E9E9E"/>
+              <a:srgbClr val="F3F3F3"/>
             </a:solidFill>
             <a:prstDash val="solid"/>
           </a:ln>
@@ -32073,94 +32961,16 @@
       </p:sp>
       <p:sp>
         <p:nvSpPr>
-          <p:cNvPr id="58" name="Text 53"/>
-          <p:cNvSpPr txBox="1"/>
-          <p:nvPr/>
-        </p:nvSpPr>
-        <p:spPr>
-          <a:xfrm>
-            <a:off x="11119365" y="1645920"/>
-            <a:ext cx="502920" cy="274320"/>
-          </a:xfrm>
-          <a:prstGeom prst="rect">
-            <a:avLst/>
-          </a:prstGeom>
-          <a:noFill/>
-          <a:ln/>
-        </p:spPr>
-        <p:txBody>
-          <a:bodyPr wrap="square" lIns="0" tIns="0" rIns="0" bIns="0" rtlCol="0" anchor="ctr"/>
-          <a:lstStyle/>
-          <a:p>
-            <a:pPr indent="0" marL="0">
-              <a:buNone/>
-            </a:pPr>
-            <a:r>
-              <a:rPr lang="en-US" sz="900" b="1" dirty="0">
-                <a:solidFill>
-                  <a:srgbClr val="1A1A1A"/>
-                </a:solidFill>
-                <a:latin typeface="Calibri" pitchFamily="34" charset="0"/>
-                <a:ea typeface="Calibri" pitchFamily="34" charset="-122"/>
-                <a:cs typeface="Calibri" pitchFamily="34" charset="-120"/>
-              </a:rPr>
-              <a:t>0.9-6.6</a:t>
-            </a:r>
-            <a:endParaRPr lang="en-US" sz="900" dirty="0"/>
-          </a:p>
-        </p:txBody>
-      </p:sp>
-      <p:sp>
-        <p:nvSpPr>
-          <p:cNvPr id="59" name="Text 54"/>
-          <p:cNvSpPr txBox="1"/>
-          <p:nvPr/>
-        </p:nvSpPr>
-        <p:spPr>
-          <a:xfrm>
-            <a:off x="8366760" y="2048256"/>
-            <a:ext cx="1353312" cy="274320"/>
-          </a:xfrm>
-          <a:prstGeom prst="rect">
-            <a:avLst/>
-          </a:prstGeom>
-          <a:noFill/>
-          <a:ln/>
-        </p:spPr>
-        <p:txBody>
-          <a:bodyPr wrap="square" lIns="0" tIns="0" rIns="0" bIns="0" rtlCol="0" anchor="ctr"/>
-          <a:lstStyle/>
-          <a:p>
-            <a:pPr indent="0" marL="0">
-              <a:buNone/>
-            </a:pPr>
-            <a:r>
-              <a:rPr lang="en-US" sz="900" dirty="0">
-                <a:solidFill>
-                  <a:srgbClr val="404040"/>
-                </a:solidFill>
-                <a:latin typeface="Calibri" pitchFamily="34" charset="0"/>
-                <a:ea typeface="Calibri" pitchFamily="34" charset="-122"/>
-                <a:cs typeface="Calibri" pitchFamily="34" charset="-120"/>
-              </a:rPr>
-              <a:t>Share recovered 15-45%</a:t>
-            </a:r>
-            <a:endParaRPr lang="en-US" sz="900" dirty="0"/>
-          </a:p>
-        </p:txBody>
-      </p:sp>
-      <p:sp>
-        <p:nvSpPr>
-          <p:cNvPr id="60" name="Shape 55"/>
+          <p:cNvPr id="57" name="Shape 47"/>
           <p:cNvSpPr/>
           <p:nvPr/>
         </p:nvSpPr>
         <p:spPr>
           <a:xfrm>
-            <a:off x="10007651" y="2093976"/>
-            <a:ext cx="180202" cy="182880"/>
-          </a:xfrm>
-          <a:prstGeom prst="rect">
+            <a:off x="6025896" y="4425696"/>
+            <a:ext cx="457200" cy="457200"/>
+          </a:xfrm>
+          <a:prstGeom prst="ellipse">
             <a:avLst/>
           </a:prstGeom>
           <a:solidFill>
@@ -32174,26 +32984,169 @@
           </a:ln>
         </p:spPr>
       </p:sp>
-      <p:sp>
-        <p:nvSpPr>
-          <p:cNvPr id="61" name="Shape 56"/>
+      <p:pic>
+        <p:nvPicPr>
+          <p:cNvPr id="58" name="Image 6" descr="img/icons/leaf-white.png">    </p:cNvPr>
+          <p:cNvPicPr>
+            <a:picLocks noChangeAspect="1"/>
+          </p:cNvPicPr>
+          <p:nvPr/>
+        </p:nvPicPr>
+        <p:blipFill>
+          <a:blip r:embed="rId7"/>
+          <a:stretch>
+            <a:fillRect/>
+          </a:stretch>
+        </p:blipFill>
+        <p:spPr>
+          <a:xfrm>
+            <a:off x="6126480" y="4526280"/>
+            <a:ext cx="256032" cy="256032"/>
+          </a:xfrm>
+          <a:prstGeom prst="rect">
+            <a:avLst/>
+          </a:prstGeom>
+        </p:spPr>
+      </p:pic>
+      <p:sp>
+        <p:nvSpPr>
+          <p:cNvPr id="59" name="Text 48"/>
+          <p:cNvSpPr txBox="1"/>
+          <p:nvPr/>
+        </p:nvSpPr>
+        <p:spPr>
+          <a:xfrm>
+            <a:off x="5678424" y="4937760"/>
+            <a:ext cx="1143000" cy="219456"/>
+          </a:xfrm>
+          <a:prstGeom prst="rect">
+            <a:avLst/>
+          </a:prstGeom>
+          <a:noFill/>
+          <a:ln/>
+        </p:spPr>
+        <p:txBody>
+          <a:bodyPr wrap="square" lIns="0" tIns="0" rIns="0" bIns="0" rtlCol="0" anchor="t"/>
+          <a:lstStyle/>
+          <a:p>
+            <a:pPr algn="ctr" indent="0" marL="0">
+              <a:buNone/>
+            </a:pPr>
+            <a:r>
+              <a:rPr lang="en-US" sz="1050" b="1" dirty="0">
+                <a:solidFill>
+                  <a:srgbClr val="2B2B2B"/>
+                </a:solidFill>
+                <a:latin typeface="Calibri" pitchFamily="34" charset="0"/>
+                <a:ea typeface="Calibri" pitchFamily="34" charset="-122"/>
+                <a:cs typeface="Calibri" pitchFamily="34" charset="-120"/>
+              </a:rPr>
+              <a:t>Sustainability</a:t>
+            </a:r>
+            <a:endParaRPr lang="en-US" sz="1050" dirty="0"/>
+          </a:p>
+        </p:txBody>
+      </p:sp>
+      <p:sp>
+        <p:nvSpPr>
+          <p:cNvPr id="60" name="Text 49"/>
+          <p:cNvSpPr txBox="1"/>
+          <p:nvPr/>
+        </p:nvSpPr>
+        <p:spPr>
+          <a:xfrm>
+            <a:off x="5696712" y="5157216"/>
+            <a:ext cx="1106424" cy="438912"/>
+          </a:xfrm>
+          <a:prstGeom prst="rect">
+            <a:avLst/>
+          </a:prstGeom>
+          <a:noFill/>
+          <a:ln/>
+        </p:spPr>
+        <p:txBody>
+          <a:bodyPr wrap="square" lIns="0" tIns="0" rIns="0" bIns="0" rtlCol="0" anchor="t"/>
+          <a:lstStyle/>
+          <a:p>
+            <a:pPr algn="ctr" indent="0" marL="0">
+              <a:buNone/>
+            </a:pPr>
+            <a:r>
+              <a:rPr lang="en-US" sz="900" dirty="0">
+                <a:solidFill>
+                  <a:srgbClr val="404040"/>
+                </a:solidFill>
+                <a:latin typeface="Calibri" pitchFamily="34" charset="0"/>
+                <a:ea typeface="Calibri" pitchFamily="34" charset="-122"/>
+                <a:cs typeface="Calibri" pitchFamily="34" charset="-120"/>
+              </a:rPr>
+              <a:t>Less rework and remelt; backs net zero</a:t>
+            </a:r>
+            <a:endParaRPr lang="en-US" sz="900" dirty="0"/>
+          </a:p>
+        </p:txBody>
+      </p:sp>
+      <p:sp>
+        <p:nvSpPr>
+          <p:cNvPr id="61" name="Text 50"/>
+          <p:cNvSpPr txBox="1"/>
+          <p:nvPr/>
+        </p:nvSpPr>
+        <p:spPr>
+          <a:xfrm>
+            <a:off x="5669280" y="5596128"/>
+            <a:ext cx="1161288" cy="256032"/>
+          </a:xfrm>
+          <a:prstGeom prst="rect">
+            <a:avLst/>
+          </a:prstGeom>
+          <a:noFill/>
+          <a:ln/>
+        </p:spPr>
+        <p:txBody>
+          <a:bodyPr wrap="square" lIns="0" tIns="0" rIns="0" bIns="0" rtlCol="0" anchor="ctr"/>
+          <a:lstStyle/>
+          <a:p>
+            <a:pPr algn="ctr" indent="0" marL="0">
+              <a:buNone/>
+            </a:pPr>
+            <a:r>
+              <a:rPr lang="en-US" sz="900" b="1" dirty="0">
+                <a:solidFill>
+                  <a:srgbClr val="D2651F"/>
+                </a:solidFill>
+                <a:latin typeface="Calibri" pitchFamily="34" charset="0"/>
+                <a:ea typeface="Calibri" pitchFamily="34" charset="-122"/>
+                <a:cs typeface="Calibri" pitchFamily="34" charset="-120"/>
+              </a:rPr>
+              <a:t>JSL: 1.76 tCO2e/t, FY26</a:t>
+            </a:r>
+            <a:endParaRPr lang="en-US" sz="900" dirty="0"/>
+          </a:p>
+        </p:txBody>
+      </p:sp>
+      <p:sp>
+        <p:nvSpPr>
+          <p:cNvPr id="62" name="Shape 51"/>
           <p:cNvSpPr/>
           <p:nvPr/>
         </p:nvSpPr>
         <p:spPr>
           <a:xfrm>
-            <a:off x="10187853" y="2093976"/>
-            <a:ext cx="894936" cy="182880"/>
-          </a:xfrm>
-          <a:prstGeom prst="rect">
-            <a:avLst/>
+            <a:off x="6926580" y="4334256"/>
+            <a:ext cx="1234440" cy="1554480"/>
+          </a:xfrm>
+          <a:prstGeom prst="roundRect">
+            <a:avLst>
+              <a:gd name="adj" fmla="val 4444"/>
+            </a:avLst>
           </a:prstGeom>
           <a:solidFill>
-            <a:srgbClr val="9E9E9E"/>
+            <a:srgbClr val="F3F3F3"/>
           </a:solidFill>
           <a:ln w="12700">
             <a:solidFill>
-              <a:srgbClr val="9E9E9E"/>
+              <a:srgbClr val="F3F3F3"/>
             </a:solidFill>
             <a:prstDash val="solid"/>
           </a:ln>
@@ -32201,94 +33154,16 @@
       </p:sp>
       <p:sp>
         <p:nvSpPr>
-          <p:cNvPr id="62" name="Text 57"/>
-          <p:cNvSpPr txBox="1"/>
-          <p:nvPr/>
-        </p:nvSpPr>
-        <p:spPr>
-          <a:xfrm>
-            <a:off x="11119365" y="2048256"/>
-            <a:ext cx="502920" cy="274320"/>
-          </a:xfrm>
-          <a:prstGeom prst="rect">
-            <a:avLst/>
-          </a:prstGeom>
-          <a:noFill/>
-          <a:ln/>
-        </p:spPr>
-        <p:txBody>
-          <a:bodyPr wrap="square" lIns="0" tIns="0" rIns="0" bIns="0" rtlCol="0" anchor="ctr"/>
-          <a:lstStyle/>
-          <a:p>
-            <a:pPr indent="0" marL="0">
-              <a:buNone/>
-            </a:pPr>
-            <a:r>
-              <a:rPr lang="en-US" sz="900" b="1" dirty="0">
-                <a:solidFill>
-                  <a:srgbClr val="1A1A1A"/>
-                </a:solidFill>
-                <a:latin typeface="Calibri" pitchFamily="34" charset="0"/>
-                <a:ea typeface="Calibri" pitchFamily="34" charset="-122"/>
-                <a:cs typeface="Calibri" pitchFamily="34" charset="-120"/>
-              </a:rPr>
-              <a:t>1.3-6.6</a:t>
-            </a:r>
-            <a:endParaRPr lang="en-US" sz="900" dirty="0"/>
-          </a:p>
-        </p:txBody>
-      </p:sp>
-      <p:sp>
-        <p:nvSpPr>
-          <p:cNvPr id="63" name="Text 58"/>
-          <p:cNvSpPr txBox="1"/>
-          <p:nvPr/>
-        </p:nvSpPr>
-        <p:spPr>
-          <a:xfrm>
-            <a:off x="8366760" y="2450592"/>
-            <a:ext cx="1353312" cy="274320"/>
-          </a:xfrm>
-          <a:prstGeom prst="rect">
-            <a:avLst/>
-          </a:prstGeom>
-          <a:noFill/>
-          <a:ln/>
-        </p:spPr>
-        <p:txBody>
-          <a:bodyPr wrap="square" lIns="0" tIns="0" rIns="0" bIns="0" rtlCol="0" anchor="ctr"/>
-          <a:lstStyle/>
-          <a:p>
-            <a:pPr indent="0" marL="0">
-              <a:buNone/>
-            </a:pPr>
-            <a:r>
-              <a:rPr lang="en-US" sz="900" dirty="0">
-                <a:solidFill>
-                  <a:srgbClr val="404040"/>
-                </a:solidFill>
-                <a:latin typeface="Calibri" pitchFamily="34" charset="0"/>
-                <a:ea typeface="Calibri" pitchFamily="34" charset="-122"/>
-                <a:cs typeface="Calibri" pitchFamily="34" charset="-120"/>
-              </a:rPr>
-              <a:t>Line volume 0.3-0.5 Mt</a:t>
-            </a:r>
-            <a:endParaRPr lang="en-US" sz="900" dirty="0"/>
-          </a:p>
-        </p:txBody>
-      </p:sp>
-      <p:sp>
-        <p:nvSpPr>
-          <p:cNvPr id="64" name="Shape 59"/>
+          <p:cNvPr id="63" name="Shape 52"/>
           <p:cNvSpPr/>
           <p:nvPr/>
         </p:nvSpPr>
         <p:spPr>
           <a:xfrm>
-            <a:off x="10076492" y="2496312"/>
-            <a:ext cx="111361" cy="182880"/>
-          </a:xfrm>
-          <a:prstGeom prst="rect">
+            <a:off x="7319772" y="4425696"/>
+            <a:ext cx="457200" cy="457200"/>
+          </a:xfrm>
+          <a:prstGeom prst="ellipse">
             <a:avLst/>
           </a:prstGeom>
           <a:solidFill>
@@ -32302,314 +33177,162 @@
           </a:ln>
         </p:spPr>
       </p:sp>
-      <p:sp>
-        <p:nvSpPr>
-          <p:cNvPr id="65" name="Shape 60"/>
+      <p:pic>
+        <p:nvPicPr>
+          <p:cNvPr id="64" name="Image 7" descr="img/icons/user-check-white.png">    </p:cNvPr>
+          <p:cNvPicPr>
+            <a:picLocks noChangeAspect="1"/>
+          </p:cNvPicPr>
+          <p:nvPr/>
+        </p:nvPicPr>
+        <p:blipFill>
+          <a:blip r:embed="rId8"/>
+          <a:stretch>
+            <a:fillRect/>
+          </a:stretch>
+        </p:blipFill>
+        <p:spPr>
+          <a:xfrm>
+            <a:off x="7420356" y="4526280"/>
+            <a:ext cx="256032" cy="256032"/>
+          </a:xfrm>
+          <a:prstGeom prst="rect">
+            <a:avLst/>
+          </a:prstGeom>
+        </p:spPr>
+      </p:pic>
+      <p:sp>
+        <p:nvSpPr>
+          <p:cNvPr id="65" name="Text 53"/>
+          <p:cNvSpPr txBox="1"/>
+          <p:nvPr/>
+        </p:nvSpPr>
+        <p:spPr>
+          <a:xfrm>
+            <a:off x="6972300" y="4937760"/>
+            <a:ext cx="1143000" cy="219456"/>
+          </a:xfrm>
+          <a:prstGeom prst="rect">
+            <a:avLst/>
+          </a:prstGeom>
+          <a:noFill/>
+          <a:ln/>
+        </p:spPr>
+        <p:txBody>
+          <a:bodyPr wrap="square" lIns="0" tIns="0" rIns="0" bIns="0" rtlCol="0" anchor="t"/>
+          <a:lstStyle/>
+          <a:p>
+            <a:pPr algn="ctr" indent="0" marL="0">
+              <a:buNone/>
+            </a:pPr>
+            <a:r>
+              <a:rPr lang="en-US" sz="1050" b="1" dirty="0">
+                <a:solidFill>
+                  <a:srgbClr val="2B2B2B"/>
+                </a:solidFill>
+                <a:latin typeface="Calibri" pitchFamily="34" charset="0"/>
+                <a:ea typeface="Calibri" pitchFamily="34" charset="-122"/>
+                <a:cs typeface="Calibri" pitchFamily="34" charset="-120"/>
+              </a:rPr>
+              <a:t>People</a:t>
+            </a:r>
+            <a:endParaRPr lang="en-US" sz="1050" dirty="0"/>
+          </a:p>
+        </p:txBody>
+      </p:sp>
+      <p:sp>
+        <p:nvSpPr>
+          <p:cNvPr id="66" name="Text 54"/>
+          <p:cNvSpPr txBox="1"/>
+          <p:nvPr/>
+        </p:nvSpPr>
+        <p:spPr>
+          <a:xfrm>
+            <a:off x="6990588" y="5157216"/>
+            <a:ext cx="1106424" cy="438912"/>
+          </a:xfrm>
+          <a:prstGeom prst="rect">
+            <a:avLst/>
+          </a:prstGeom>
+          <a:noFill/>
+          <a:ln/>
+        </p:spPr>
+        <p:txBody>
+          <a:bodyPr wrap="square" lIns="0" tIns="0" rIns="0" bIns="0" rtlCol="0" anchor="t"/>
+          <a:lstStyle/>
+          <a:p>
+            <a:pPr algn="ctr" indent="0" marL="0">
+              <a:buNone/>
+            </a:pPr>
+            <a:r>
+              <a:rPr lang="en-US" sz="900" dirty="0">
+                <a:solidFill>
+                  <a:srgbClr val="404040"/>
+                </a:solidFill>
+                <a:latin typeface="Calibri" pitchFamily="34" charset="0"/>
+                <a:ea typeface="Calibri" pitchFamily="34" charset="-122"/>
+                <a:cs typeface="Calibri" pitchFamily="34" charset="-120"/>
+              </a:rPr>
+              <a:t>Inspectors move to decisions</a:t>
+            </a:r>
+            <a:endParaRPr lang="en-US" sz="900" dirty="0"/>
+          </a:p>
+        </p:txBody>
+      </p:sp>
+      <p:sp>
+        <p:nvSpPr>
+          <p:cNvPr id="67" name="Text 55"/>
+          <p:cNvSpPr txBox="1"/>
+          <p:nvPr/>
+        </p:nvSpPr>
+        <p:spPr>
+          <a:xfrm>
+            <a:off x="6963156" y="5596128"/>
+            <a:ext cx="1161288" cy="256032"/>
+          </a:xfrm>
+          <a:prstGeom prst="rect">
+            <a:avLst/>
+          </a:prstGeom>
+          <a:noFill/>
+          <a:ln/>
+        </p:spPr>
+        <p:txBody>
+          <a:bodyPr wrap="square" lIns="0" tIns="0" rIns="0" bIns="0" rtlCol="0" anchor="ctr"/>
+          <a:lstStyle/>
+          <a:p>
+            <a:pPr algn="ctr" indent="0" marL="0">
+              <a:buNone/>
+            </a:pPr>
+            <a:r>
+              <a:rPr lang="en-US" sz="900" b="1" dirty="0">
+                <a:solidFill>
+                  <a:srgbClr val="D2651F"/>
+                </a:solidFill>
+                <a:latin typeface="Calibri" pitchFamily="34" charset="0"/>
+                <a:ea typeface="Calibri" pitchFamily="34" charset="-122"/>
+                <a:cs typeface="Calibri" pitchFamily="34" charset="-120"/>
+              </a:rPr>
+              <a:t>HR AI: 95% self-served</a:t>
+            </a:r>
+            <a:endParaRPr lang="en-US" sz="900" dirty="0"/>
+          </a:p>
+        </p:txBody>
+      </p:sp>
+      <p:sp>
+        <p:nvSpPr>
+          <p:cNvPr id="68" name="Shape 56"/>
           <p:cNvSpPr/>
           <p:nvPr/>
         </p:nvSpPr>
         <p:spPr>
           <a:xfrm>
-            <a:off x="10187853" y="2496312"/>
-            <a:ext cx="224746" cy="182880"/>
-          </a:xfrm>
-          <a:prstGeom prst="rect">
-            <a:avLst/>
-          </a:prstGeom>
-          <a:solidFill>
-            <a:srgbClr val="9E9E9E"/>
-          </a:solidFill>
-          <a:ln w="12700">
-            <a:solidFill>
-              <a:srgbClr val="9E9E9E"/>
-            </a:solidFill>
-            <a:prstDash val="solid"/>
-          </a:ln>
-        </p:spPr>
-      </p:sp>
-      <p:sp>
-        <p:nvSpPr>
-          <p:cNvPr id="66" name="Text 61"/>
-          <p:cNvSpPr txBox="1"/>
-          <p:nvPr/>
-        </p:nvSpPr>
-        <p:spPr>
-          <a:xfrm>
-            <a:off x="10449175" y="2450592"/>
-            <a:ext cx="502920" cy="274320"/>
-          </a:xfrm>
-          <a:prstGeom prst="rect">
-            <a:avLst/>
-          </a:prstGeom>
-          <a:noFill/>
-          <a:ln/>
-        </p:spPr>
-        <p:txBody>
-          <a:bodyPr wrap="square" lIns="0" tIns="0" rIns="0" bIns="0" rtlCol="0" anchor="ctr"/>
-          <a:lstStyle/>
-          <a:p>
-            <a:pPr indent="0" marL="0">
-              <a:buNone/>
-            </a:pPr>
-            <a:r>
-              <a:rPr lang="en-US" sz="900" b="1" dirty="0">
-                <a:solidFill>
-                  <a:srgbClr val="1A1A1A"/>
-                </a:solidFill>
-                <a:latin typeface="Calibri" pitchFamily="34" charset="0"/>
-                <a:ea typeface="Calibri" pitchFamily="34" charset="-122"/>
-                <a:cs typeface="Calibri" pitchFamily="34" charset="-120"/>
-              </a:rPr>
-              <a:t>1.7-3.3</a:t>
-            </a:r>
-            <a:endParaRPr lang="en-US" sz="900" dirty="0"/>
-          </a:p>
-        </p:txBody>
-      </p:sp>
-      <p:sp>
-        <p:nvSpPr>
-          <p:cNvPr id="67" name="Text 62"/>
-          <p:cNvSpPr txBox="1"/>
-          <p:nvPr/>
-        </p:nvSpPr>
-        <p:spPr>
-          <a:xfrm>
-            <a:off x="8366760" y="2852928"/>
-            <a:ext cx="1353312" cy="274320"/>
-          </a:xfrm>
-          <a:prstGeom prst="rect">
-            <a:avLst/>
-          </a:prstGeom>
-          <a:noFill/>
-          <a:ln/>
-        </p:spPr>
-        <p:txBody>
-          <a:bodyPr wrap="square" lIns="0" tIns="0" rIns="0" bIns="0" rtlCol="0" anchor="ctr"/>
-          <a:lstStyle/>
-          <a:p>
-            <a:pPr indent="0" marL="0">
-              <a:buNone/>
-            </a:pPr>
-            <a:r>
-              <a:rPr lang="en-US" sz="900" dirty="0">
-                <a:solidFill>
-                  <a:srgbClr val="404040"/>
-                </a:solidFill>
-                <a:latin typeface="Calibri" pitchFamily="34" charset="0"/>
-                <a:ea typeface="Calibri" pitchFamily="34" charset="-122"/>
-                <a:cs typeface="Calibri" pitchFamily="34" charset="-120"/>
-              </a:rPr>
-              <a:t>Capex ₹2.5-4.2 cr</a:t>
-            </a:r>
-            <a:endParaRPr lang="en-US" sz="900" dirty="0"/>
-          </a:p>
-        </p:txBody>
-      </p:sp>
-      <p:sp>
-        <p:nvSpPr>
-          <p:cNvPr id="68" name="Shape 63"/>
-          <p:cNvSpPr/>
-          <p:nvPr/>
-        </p:nvSpPr>
-        <p:spPr>
-          <a:xfrm>
-            <a:off x="10074467" y="2898648"/>
-            <a:ext cx="113386" cy="182880"/>
-          </a:xfrm>
-          <a:prstGeom prst="rect">
-            <a:avLst/>
-          </a:prstGeom>
-          <a:solidFill>
-            <a:srgbClr val="D2651F"/>
-          </a:solidFill>
-          <a:ln w="12700">
-            <a:solidFill>
-              <a:srgbClr val="D2651F"/>
-            </a:solidFill>
-            <a:prstDash val="solid"/>
-          </a:ln>
-        </p:spPr>
-      </p:sp>
-      <p:sp>
-        <p:nvSpPr>
-          <p:cNvPr id="69" name="Shape 64"/>
-          <p:cNvSpPr/>
-          <p:nvPr/>
-        </p:nvSpPr>
-        <p:spPr>
-          <a:xfrm>
-            <a:off x="10187853" y="2898648"/>
-            <a:ext cx="113386" cy="182880"/>
-          </a:xfrm>
-          <a:prstGeom prst="rect">
-            <a:avLst/>
-          </a:prstGeom>
-          <a:solidFill>
-            <a:srgbClr val="9E9E9E"/>
-          </a:solidFill>
-          <a:ln w="12700">
-            <a:solidFill>
-              <a:srgbClr val="9E9E9E"/>
-            </a:solidFill>
-            <a:prstDash val="solid"/>
-          </a:ln>
-        </p:spPr>
-      </p:sp>
-      <p:sp>
-        <p:nvSpPr>
-          <p:cNvPr id="70" name="Text 65"/>
-          <p:cNvSpPr txBox="1"/>
-          <p:nvPr/>
-        </p:nvSpPr>
-        <p:spPr>
-          <a:xfrm>
-            <a:off x="10337815" y="2852928"/>
-            <a:ext cx="502920" cy="274320"/>
-          </a:xfrm>
-          <a:prstGeom prst="rect">
-            <a:avLst/>
-          </a:prstGeom>
-          <a:noFill/>
-          <a:ln/>
-        </p:spPr>
-        <p:txBody>
-          <a:bodyPr wrap="square" lIns="0" tIns="0" rIns="0" bIns="0" rtlCol="0" anchor="ctr"/>
-          <a:lstStyle/>
-          <a:p>
-            <a:pPr indent="0" marL="0">
-              <a:buNone/>
-            </a:pPr>
-            <a:r>
-              <a:rPr lang="en-US" sz="900" b="1" dirty="0">
-                <a:solidFill>
-                  <a:srgbClr val="1A1A1A"/>
-                </a:solidFill>
-                <a:latin typeface="Calibri" pitchFamily="34" charset="0"/>
-                <a:ea typeface="Calibri" pitchFamily="34" charset="-122"/>
-                <a:cs typeface="Calibri" pitchFamily="34" charset="-120"/>
-              </a:rPr>
-              <a:t>1.7-2.8</a:t>
-            </a:r>
-            <a:endParaRPr lang="en-US" sz="900" dirty="0"/>
-          </a:p>
-        </p:txBody>
-      </p:sp>
-      <p:sp>
-        <p:nvSpPr>
-          <p:cNvPr id="71" name="Text 66"/>
-          <p:cNvSpPr txBox="1"/>
-          <p:nvPr/>
-        </p:nvSpPr>
-        <p:spPr>
-          <a:xfrm>
-            <a:off x="8366760" y="3255264"/>
-            <a:ext cx="1353312" cy="274320"/>
-          </a:xfrm>
-          <a:prstGeom prst="rect">
-            <a:avLst/>
-          </a:prstGeom>
-          <a:noFill/>
-          <a:ln/>
-        </p:spPr>
-        <p:txBody>
-          <a:bodyPr wrap="square" lIns="0" tIns="0" rIns="0" bIns="0" rtlCol="0" anchor="ctr"/>
-          <a:lstStyle/>
-          <a:p>
-            <a:pPr indent="0" marL="0">
-              <a:buNone/>
-            </a:pPr>
-            <a:r>
-              <a:rPr lang="en-US" sz="900" dirty="0">
-                <a:solidFill>
-                  <a:srgbClr val="404040"/>
-                </a:solidFill>
-                <a:latin typeface="Calibri" pitchFamily="34" charset="0"/>
-                <a:ea typeface="Calibri" pitchFamily="34" charset="-122"/>
-                <a:cs typeface="Calibri" pitchFamily="34" charset="-120"/>
-              </a:rPr>
-              <a:t>Price discount 10-20%</a:t>
-            </a:r>
-            <a:endParaRPr lang="en-US" sz="900" dirty="0"/>
-          </a:p>
-        </p:txBody>
-      </p:sp>
-      <p:sp>
-        <p:nvSpPr>
-          <p:cNvPr id="72" name="Shape 67"/>
-          <p:cNvSpPr/>
-          <p:nvPr/>
-        </p:nvSpPr>
-        <p:spPr>
-          <a:xfrm>
-            <a:off x="9930711" y="3300984"/>
-            <a:ext cx="257142" cy="182880"/>
-          </a:xfrm>
-          <a:prstGeom prst="rect">
-            <a:avLst/>
-          </a:prstGeom>
-          <a:solidFill>
-            <a:srgbClr val="D2651F"/>
-          </a:solidFill>
-          <a:ln w="12700">
-            <a:solidFill>
-              <a:srgbClr val="D2651F"/>
-            </a:solidFill>
-            <a:prstDash val="solid"/>
-          </a:ln>
-        </p:spPr>
-      </p:sp>
-      <p:sp>
-        <p:nvSpPr>
-          <p:cNvPr id="73" name="Text 68"/>
-          <p:cNvSpPr txBox="1"/>
-          <p:nvPr/>
-        </p:nvSpPr>
-        <p:spPr>
-          <a:xfrm>
-            <a:off x="10224429" y="3255264"/>
-            <a:ext cx="502920" cy="274320"/>
-          </a:xfrm>
-          <a:prstGeom prst="rect">
-            <a:avLst/>
-          </a:prstGeom>
-          <a:noFill/>
-          <a:ln/>
-        </p:spPr>
-        <p:txBody>
-          <a:bodyPr wrap="square" lIns="0" tIns="0" rIns="0" bIns="0" rtlCol="0" anchor="ctr"/>
-          <a:lstStyle/>
-          <a:p>
-            <a:pPr indent="0" marL="0">
-              <a:buNone/>
-            </a:pPr>
-            <a:r>
-              <a:rPr lang="en-US" sz="900" b="1" dirty="0">
-                <a:solidFill>
-                  <a:srgbClr val="1A1A1A"/>
-                </a:solidFill>
-                <a:latin typeface="Calibri" pitchFamily="34" charset="0"/>
-                <a:ea typeface="Calibri" pitchFamily="34" charset="-122"/>
-                <a:cs typeface="Calibri" pitchFamily="34" charset="-120"/>
-              </a:rPr>
-              <a:t>0.9-2.2</a:t>
-            </a:r>
-            <a:endParaRPr lang="en-US" sz="900" dirty="0"/>
-          </a:p>
-        </p:txBody>
-      </p:sp>
-      <p:sp>
-        <p:nvSpPr>
-          <p:cNvPr id="74" name="Shape 69"/>
-          <p:cNvSpPr/>
-          <p:nvPr/>
-        </p:nvSpPr>
-        <p:spPr>
-          <a:xfrm>
-            <a:off x="10178709" y="1591056"/>
-            <a:ext cx="18288" cy="2057400"/>
-          </a:xfrm>
-          <a:prstGeom prst="rect">
-            <a:avLst/>
+            <a:off x="8321040" y="4005072"/>
+            <a:ext cx="3410712" cy="1883664"/>
+          </a:xfrm>
+          <a:prstGeom prst="roundRect">
+            <a:avLst>
+              <a:gd name="adj" fmla="val 2913"/>
+            </a:avLst>
           </a:prstGeom>
           <a:solidFill>
             <a:srgbClr val="2B2B2B"/>
@@ -32624,1295 +33347,7 @@
       </p:sp>
       <p:sp>
         <p:nvSpPr>
-          <p:cNvPr id="75" name="Text 70"/>
-          <p:cNvSpPr txBox="1"/>
-          <p:nvPr/>
-        </p:nvSpPr>
-        <p:spPr>
-          <a:xfrm>
-            <a:off x="9730653" y="3648456"/>
-            <a:ext cx="914400" cy="182880"/>
-          </a:xfrm>
-          <a:prstGeom prst="rect">
-            <a:avLst/>
-          </a:prstGeom>
-          <a:noFill/>
-          <a:ln/>
-        </p:spPr>
-        <p:txBody>
-          <a:bodyPr wrap="square" lIns="0" tIns="0" rIns="0" bIns="0" rtlCol="0" anchor="t"/>
-          <a:lstStyle/>
-          <a:p>
-            <a:pPr algn="ctr" indent="0" marL="0">
-              <a:buNone/>
-            </a:pPr>
-            <a:r>
-              <a:rPr lang="en-US" sz="900" b="1" dirty="0">
-                <a:solidFill>
-                  <a:srgbClr val="2B2B2B"/>
-                </a:solidFill>
-                <a:latin typeface="Calibri" pitchFamily="34" charset="0"/>
-                <a:ea typeface="Calibri" pitchFamily="34" charset="-122"/>
-                <a:cs typeface="Calibri" pitchFamily="34" charset="-120"/>
-              </a:rPr>
-              <a:t>base 2.2 yr</a:t>
-            </a:r>
-            <a:endParaRPr lang="en-US" sz="900" dirty="0"/>
-          </a:p>
-        </p:txBody>
-      </p:sp>
-      <p:sp>
-        <p:nvSpPr>
-          <p:cNvPr id="76" name="Shape 71"/>
-          <p:cNvSpPr/>
-          <p:nvPr/>
-        </p:nvSpPr>
-        <p:spPr>
-          <a:xfrm>
-            <a:off x="457200" y="4005072"/>
-            <a:ext cx="7680960" cy="274320"/>
-          </a:xfrm>
-          <a:prstGeom prst="rect">
-            <a:avLst/>
-          </a:prstGeom>
-          <a:solidFill>
-            <a:srgbClr val="E4803A"/>
-          </a:solidFill>
-          <a:ln w="12700">
-            <a:solidFill>
-              <a:srgbClr val="E4803A"/>
-            </a:solidFill>
-            <a:prstDash val="solid"/>
-          </a:ln>
-        </p:spPr>
-      </p:sp>
-      <p:sp>
-        <p:nvSpPr>
-          <p:cNvPr id="77" name="Text 72"/>
-          <p:cNvSpPr txBox="1"/>
-          <p:nvPr/>
-        </p:nvSpPr>
-        <p:spPr>
-          <a:xfrm>
-            <a:off x="548640" y="4005072"/>
-            <a:ext cx="7498080" cy="274320"/>
-          </a:xfrm>
-          <a:prstGeom prst="rect">
-            <a:avLst/>
-          </a:prstGeom>
-          <a:noFill/>
-          <a:ln/>
-        </p:spPr>
-        <p:txBody>
-          <a:bodyPr wrap="square" lIns="0" tIns="0" rIns="0" bIns="0" rtlCol="0" anchor="ctr"/>
-          <a:lstStyle/>
-          <a:p>
-            <a:pPr indent="0" marL="0">
-              <a:buNone/>
-            </a:pPr>
-            <a:r>
-              <a:rPr lang="en-US" sz="1100" b="1" dirty="0">
-                <a:solidFill>
-                  <a:srgbClr val="FFFFFF"/>
-                </a:solidFill>
-                <a:latin typeface="Calibri" pitchFamily="34" charset="0"/>
-                <a:ea typeface="Calibri" pitchFamily="34" charset="-122"/>
-                <a:cs typeface="Calibri" pitchFamily="34" charset="-120"/>
-              </a:rPr>
-              <a:t>Impact beyond the P&amp;L</a:t>
-            </a:r>
-            <a:endParaRPr lang="en-US" sz="1100" dirty="0"/>
-          </a:p>
-        </p:txBody>
-      </p:sp>
-      <p:sp>
-        <p:nvSpPr>
-          <p:cNvPr id="78" name="Shape 73"/>
-          <p:cNvSpPr/>
-          <p:nvPr/>
-        </p:nvSpPr>
-        <p:spPr>
-          <a:xfrm>
-            <a:off x="457200" y="4334256"/>
-            <a:ext cx="1234440" cy="1554480"/>
-          </a:xfrm>
-          <a:prstGeom prst="roundRect">
-            <a:avLst>
-              <a:gd name="adj" fmla="val 4444"/>
-            </a:avLst>
-          </a:prstGeom>
-          <a:solidFill>
-            <a:srgbClr val="F3F3F3"/>
-          </a:solidFill>
-          <a:ln w="12700">
-            <a:solidFill>
-              <a:srgbClr val="F3F3F3"/>
-            </a:solidFill>
-            <a:prstDash val="solid"/>
-          </a:ln>
-        </p:spPr>
-      </p:sp>
-      <p:sp>
-        <p:nvSpPr>
-          <p:cNvPr id="79" name="Shape 74"/>
-          <p:cNvSpPr/>
-          <p:nvPr/>
-        </p:nvSpPr>
-        <p:spPr>
-          <a:xfrm>
-            <a:off x="850392" y="4425696"/>
-            <a:ext cx="457200" cy="457200"/>
-          </a:xfrm>
-          <a:prstGeom prst="ellipse">
-            <a:avLst/>
-          </a:prstGeom>
-          <a:solidFill>
-            <a:srgbClr val="D2651F"/>
-          </a:solidFill>
-          <a:ln w="12700">
-            <a:solidFill>
-              <a:srgbClr val="D2651F"/>
-            </a:solidFill>
-            <a:prstDash val="solid"/>
-          </a:ln>
-        </p:spPr>
-      </p:sp>
-      <p:pic>
-        <p:nvPicPr>
-          <p:cNvPr id="80" name="Image 2" descr="img/icons/scan-line-white.png">    </p:cNvPr>
-          <p:cNvPicPr>
-            <a:picLocks noChangeAspect="1"/>
-          </p:cNvPicPr>
-          <p:nvPr/>
-        </p:nvPicPr>
-        <p:blipFill>
-          <a:blip r:embed="rId3"/>
-          <a:stretch>
-            <a:fillRect/>
-          </a:stretch>
-        </p:blipFill>
-        <p:spPr>
-          <a:xfrm>
-            <a:off x="950976" y="4526280"/>
-            <a:ext cx="256032" cy="256032"/>
-          </a:xfrm>
-          <a:prstGeom prst="rect">
-            <a:avLst/>
-          </a:prstGeom>
-        </p:spPr>
-      </p:pic>
-      <p:sp>
-        <p:nvSpPr>
-          <p:cNvPr id="81" name="Text 75"/>
-          <p:cNvSpPr txBox="1"/>
-          <p:nvPr/>
-        </p:nvSpPr>
-        <p:spPr>
-          <a:xfrm>
-            <a:off x="502920" y="4937760"/>
-            <a:ext cx="1143000" cy="219456"/>
-          </a:xfrm>
-          <a:prstGeom prst="rect">
-            <a:avLst/>
-          </a:prstGeom>
-          <a:noFill/>
-          <a:ln/>
-        </p:spPr>
-        <p:txBody>
-          <a:bodyPr wrap="square" lIns="0" tIns="0" rIns="0" bIns="0" rtlCol="0" anchor="t"/>
-          <a:lstStyle/>
-          <a:p>
-            <a:pPr algn="ctr" indent="0" marL="0">
-              <a:buNone/>
-            </a:pPr>
-            <a:r>
-              <a:rPr lang="en-US" sz="1050" b="1" dirty="0">
-                <a:solidFill>
-                  <a:srgbClr val="2B2B2B"/>
-                </a:solidFill>
-                <a:latin typeface="Calibri" pitchFamily="34" charset="0"/>
-                <a:ea typeface="Calibri" pitchFamily="34" charset="-122"/>
-                <a:cs typeface="Calibri" pitchFamily="34" charset="-120"/>
-              </a:rPr>
-              <a:t>Coverage</a:t>
-            </a:r>
-            <a:endParaRPr lang="en-US" sz="1050" dirty="0"/>
-          </a:p>
-        </p:txBody>
-      </p:sp>
-      <p:sp>
-        <p:nvSpPr>
-          <p:cNvPr id="82" name="Text 76"/>
-          <p:cNvSpPr txBox="1"/>
-          <p:nvPr/>
-        </p:nvSpPr>
-        <p:spPr>
-          <a:xfrm>
-            <a:off x="521208" y="5157216"/>
-            <a:ext cx="1106424" cy="438912"/>
-          </a:xfrm>
-          <a:prstGeom prst="rect">
-            <a:avLst/>
-          </a:prstGeom>
-          <a:noFill/>
-          <a:ln/>
-        </p:spPr>
-        <p:txBody>
-          <a:bodyPr wrap="square" lIns="0" tIns="0" rIns="0" bIns="0" rtlCol="0" anchor="t"/>
-          <a:lstStyle/>
-          <a:p>
-            <a:pPr algn="ctr" indent="0" marL="0">
-              <a:buNone/>
-            </a:pPr>
-            <a:r>
-              <a:rPr lang="en-US" sz="900" dirty="0">
-                <a:solidFill>
-                  <a:srgbClr val="404040"/>
-                </a:solidFill>
-                <a:latin typeface="Calibri" pitchFamily="34" charset="0"/>
-                <a:ea typeface="Calibri" pitchFamily="34" charset="-122"/>
-                <a:cs typeface="Calibri" pitchFamily="34" charset="-120"/>
-              </a:rPr>
-              <a:t>100% of both faces, every coil</a:t>
-            </a:r>
-            <a:endParaRPr lang="en-US" sz="900" dirty="0"/>
-          </a:p>
-        </p:txBody>
-      </p:sp>
-      <p:sp>
-        <p:nvSpPr>
-          <p:cNvPr id="83" name="Text 77"/>
-          <p:cNvSpPr txBox="1"/>
-          <p:nvPr/>
-        </p:nvSpPr>
-        <p:spPr>
-          <a:xfrm>
-            <a:off x="493776" y="5596128"/>
-            <a:ext cx="1161288" cy="256032"/>
-          </a:xfrm>
-          <a:prstGeom prst="rect">
-            <a:avLst/>
-          </a:prstGeom>
-          <a:noFill/>
-          <a:ln/>
-        </p:spPr>
-        <p:txBody>
-          <a:bodyPr wrap="square" lIns="0" tIns="0" rIns="0" bIns="0" rtlCol="0" anchor="ctr"/>
-          <a:lstStyle/>
-          <a:p>
-            <a:pPr algn="ctr" indent="0" marL="0">
-              <a:buNone/>
-            </a:pPr>
-            <a:r>
-              <a:rPr lang="en-US" sz="900" b="1" dirty="0">
-                <a:solidFill>
-                  <a:srgbClr val="D2651F"/>
-                </a:solidFill>
-                <a:latin typeface="Calibri" pitchFamily="34" charset="0"/>
-                <a:ea typeface="Calibri" pitchFamily="34" charset="-122"/>
-                <a:cs typeface="Calibri" pitchFamily="34" charset="-120"/>
-              </a:rPr>
-              <a:t>today: spot checks</a:t>
-            </a:r>
-            <a:endParaRPr lang="en-US" sz="900" dirty="0"/>
-          </a:p>
-        </p:txBody>
-      </p:sp>
-      <p:sp>
-        <p:nvSpPr>
-          <p:cNvPr id="84" name="Shape 78"/>
-          <p:cNvSpPr/>
-          <p:nvPr/>
-        </p:nvSpPr>
-        <p:spPr>
-          <a:xfrm>
-            <a:off x="1751076" y="4334256"/>
-            <a:ext cx="1234440" cy="1554480"/>
-          </a:xfrm>
-          <a:prstGeom prst="roundRect">
-            <a:avLst>
-              <a:gd name="adj" fmla="val 4444"/>
-            </a:avLst>
-          </a:prstGeom>
-          <a:solidFill>
-            <a:srgbClr val="F3F3F3"/>
-          </a:solidFill>
-          <a:ln w="12700">
-            <a:solidFill>
-              <a:srgbClr val="F3F3F3"/>
-            </a:solidFill>
-            <a:prstDash val="solid"/>
-          </a:ln>
-        </p:spPr>
-      </p:sp>
-      <p:sp>
-        <p:nvSpPr>
-          <p:cNvPr id="85" name="Shape 79"/>
-          <p:cNvSpPr/>
-          <p:nvPr/>
-        </p:nvSpPr>
-        <p:spPr>
-          <a:xfrm>
-            <a:off x="2144268" y="4425696"/>
-            <a:ext cx="457200" cy="457200"/>
-          </a:xfrm>
-          <a:prstGeom prst="ellipse">
-            <a:avLst/>
-          </a:prstGeom>
-          <a:solidFill>
-            <a:srgbClr val="D2651F"/>
-          </a:solidFill>
-          <a:ln w="12700">
-            <a:solidFill>
-              <a:srgbClr val="D2651F"/>
-            </a:solidFill>
-            <a:prstDash val="solid"/>
-          </a:ln>
-        </p:spPr>
-      </p:sp>
-      <p:pic>
-        <p:nvPicPr>
-          <p:cNvPr id="86" name="Image 3" descr="img/icons/users-white.png">    </p:cNvPr>
-          <p:cNvPicPr>
-            <a:picLocks noChangeAspect="1"/>
-          </p:cNvPicPr>
-          <p:nvPr/>
-        </p:nvPicPr>
-        <p:blipFill>
-          <a:blip r:embed="rId4"/>
-          <a:stretch>
-            <a:fillRect/>
-          </a:stretch>
-        </p:blipFill>
-        <p:spPr>
-          <a:xfrm>
-            <a:off x="2244852" y="4526280"/>
-            <a:ext cx="256032" cy="256032"/>
-          </a:xfrm>
-          <a:prstGeom prst="rect">
-            <a:avLst/>
-          </a:prstGeom>
-        </p:spPr>
-      </p:pic>
-      <p:sp>
-        <p:nvSpPr>
-          <p:cNvPr id="87" name="Text 80"/>
-          <p:cNvSpPr txBox="1"/>
-          <p:nvPr/>
-        </p:nvSpPr>
-        <p:spPr>
-          <a:xfrm>
-            <a:off x="1796796" y="4937760"/>
-            <a:ext cx="1143000" cy="219456"/>
-          </a:xfrm>
-          <a:prstGeom prst="rect">
-            <a:avLst/>
-          </a:prstGeom>
-          <a:noFill/>
-          <a:ln/>
-        </p:spPr>
-        <p:txBody>
-          <a:bodyPr wrap="square" lIns="0" tIns="0" rIns="0" bIns="0" rtlCol="0" anchor="t"/>
-          <a:lstStyle/>
-          <a:p>
-            <a:pPr algn="ctr" indent="0" marL="0">
-              <a:buNone/>
-            </a:pPr>
-            <a:r>
-              <a:rPr lang="en-US" sz="1050" b="1" dirty="0">
-                <a:solidFill>
-                  <a:srgbClr val="2B2B2B"/>
-                </a:solidFill>
-                <a:latin typeface="Calibri" pitchFamily="34" charset="0"/>
-                <a:ea typeface="Calibri" pitchFamily="34" charset="-122"/>
-                <a:cs typeface="Calibri" pitchFamily="34" charset="-120"/>
-              </a:rPr>
-              <a:t>Customers</a:t>
-            </a:r>
-            <a:endParaRPr lang="en-US" sz="1050" dirty="0"/>
-          </a:p>
-        </p:txBody>
-      </p:sp>
-      <p:sp>
-        <p:nvSpPr>
-          <p:cNvPr id="88" name="Text 81"/>
-          <p:cNvSpPr txBox="1"/>
-          <p:nvPr/>
-        </p:nvSpPr>
-        <p:spPr>
-          <a:xfrm>
-            <a:off x="1815084" y="5157216"/>
-            <a:ext cx="1106424" cy="438912"/>
-          </a:xfrm>
-          <a:prstGeom prst="rect">
-            <a:avLst/>
-          </a:prstGeom>
-          <a:noFill/>
-          <a:ln/>
-        </p:spPr>
-        <p:txBody>
-          <a:bodyPr wrap="square" lIns="0" tIns="0" rIns="0" bIns="0" rtlCol="0" anchor="t"/>
-          <a:lstStyle/>
-          <a:p>
-            <a:pPr algn="ctr" indent="0" marL="0">
-              <a:buNone/>
-            </a:pPr>
-            <a:r>
-              <a:rPr lang="en-US" sz="900" dirty="0">
-                <a:solidFill>
-                  <a:srgbClr val="404040"/>
-                </a:solidFill>
-                <a:latin typeface="Calibri" pitchFamily="34" charset="0"/>
-                <a:ea typeface="Calibri" pitchFamily="34" charset="-122"/>
-                <a:cs typeface="Calibri" pitchFamily="34" charset="-120"/>
-              </a:rPr>
-              <a:t>Defect map per coil for rail, metro, auto buyers</a:t>
-            </a:r>
-            <a:endParaRPr lang="en-US" sz="900" dirty="0"/>
-          </a:p>
-        </p:txBody>
-      </p:sp>
-      <p:sp>
-        <p:nvSpPr>
-          <p:cNvPr id="89" name="Text 82"/>
-          <p:cNvSpPr txBox="1"/>
-          <p:nvPr/>
-        </p:nvSpPr>
-        <p:spPr>
-          <a:xfrm>
-            <a:off x="1787652" y="5596128"/>
-            <a:ext cx="1161288" cy="256032"/>
-          </a:xfrm>
-          <a:prstGeom prst="rect">
-            <a:avLst/>
-          </a:prstGeom>
-          <a:noFill/>
-          <a:ln/>
-        </p:spPr>
-        <p:txBody>
-          <a:bodyPr wrap="square" lIns="0" tIns="0" rIns="0" bIns="0" rtlCol="0" anchor="ctr"/>
-          <a:lstStyle/>
-          <a:p>
-            <a:pPr algn="ctr" indent="0" marL="0">
-              <a:buNone/>
-            </a:pPr>
-            <a:r>
-              <a:rPr lang="en-US" sz="900" b="1" dirty="0">
-                <a:solidFill>
-                  <a:srgbClr val="D2651F"/>
-                </a:solidFill>
-                <a:latin typeface="Calibri" pitchFamily="34" charset="0"/>
-                <a:ea typeface="Calibri" pitchFamily="34" charset="-122"/>
-                <a:cs typeface="Calibri" pitchFamily="34" charset="-120"/>
-              </a:rPr>
-              <a:t>Vande Bharat supplier</a:t>
-            </a:r>
-            <a:endParaRPr lang="en-US" sz="900" dirty="0"/>
-          </a:p>
-        </p:txBody>
-      </p:sp>
-      <p:sp>
-        <p:nvSpPr>
-          <p:cNvPr id="90" name="Shape 83"/>
-          <p:cNvSpPr/>
-          <p:nvPr/>
-        </p:nvSpPr>
-        <p:spPr>
-          <a:xfrm>
-            <a:off x="3044952" y="4334256"/>
-            <a:ext cx="1234440" cy="1554480"/>
-          </a:xfrm>
-          <a:prstGeom prst="roundRect">
-            <a:avLst>
-              <a:gd name="adj" fmla="val 4444"/>
-            </a:avLst>
-          </a:prstGeom>
-          <a:solidFill>
-            <a:srgbClr val="F3F3F3"/>
-          </a:solidFill>
-          <a:ln w="12700">
-            <a:solidFill>
-              <a:srgbClr val="F3F3F3"/>
-            </a:solidFill>
-            <a:prstDash val="solid"/>
-          </a:ln>
-        </p:spPr>
-      </p:sp>
-      <p:sp>
-        <p:nvSpPr>
-          <p:cNvPr id="91" name="Shape 84"/>
-          <p:cNvSpPr/>
-          <p:nvPr/>
-        </p:nvSpPr>
-        <p:spPr>
-          <a:xfrm>
-            <a:off x="3438144" y="4425696"/>
-            <a:ext cx="457200" cy="457200"/>
-          </a:xfrm>
-          <a:prstGeom prst="ellipse">
-            <a:avLst/>
-          </a:prstGeom>
-          <a:solidFill>
-            <a:srgbClr val="D2651F"/>
-          </a:solidFill>
-          <a:ln w="12700">
-            <a:solidFill>
-              <a:srgbClr val="D2651F"/>
-            </a:solidFill>
-            <a:prstDash val="solid"/>
-          </a:ln>
-        </p:spPr>
-      </p:sp>
-      <p:pic>
-        <p:nvPicPr>
-          <p:cNvPr id="92" name="Image 4" descr="img/icons/wrench-white.png">    </p:cNvPr>
-          <p:cNvPicPr>
-            <a:picLocks noChangeAspect="1"/>
-          </p:cNvPicPr>
-          <p:nvPr/>
-        </p:nvPicPr>
-        <p:blipFill>
-          <a:blip r:embed="rId5"/>
-          <a:stretch>
-            <a:fillRect/>
-          </a:stretch>
-        </p:blipFill>
-        <p:spPr>
-          <a:xfrm>
-            <a:off x="3538728" y="4526280"/>
-            <a:ext cx="256032" cy="256032"/>
-          </a:xfrm>
-          <a:prstGeom prst="rect">
-            <a:avLst/>
-          </a:prstGeom>
-        </p:spPr>
-      </p:pic>
-      <p:sp>
-        <p:nvSpPr>
-          <p:cNvPr id="93" name="Text 85"/>
-          <p:cNvSpPr txBox="1"/>
-          <p:nvPr/>
-        </p:nvSpPr>
-        <p:spPr>
-          <a:xfrm>
-            <a:off x="3090672" y="4937760"/>
-            <a:ext cx="1143000" cy="219456"/>
-          </a:xfrm>
-          <a:prstGeom prst="rect">
-            <a:avLst/>
-          </a:prstGeom>
-          <a:noFill/>
-          <a:ln/>
-        </p:spPr>
-        <p:txBody>
-          <a:bodyPr wrap="square" lIns="0" tIns="0" rIns="0" bIns="0" rtlCol="0" anchor="t"/>
-          <a:lstStyle/>
-          <a:p>
-            <a:pPr algn="ctr" indent="0" marL="0">
-              <a:buNone/>
-            </a:pPr>
-            <a:r>
-              <a:rPr lang="en-US" sz="1050" b="1" dirty="0">
-                <a:solidFill>
-                  <a:srgbClr val="2B2B2B"/>
-                </a:solidFill>
-                <a:latin typeface="Calibri" pitchFamily="34" charset="0"/>
-                <a:ea typeface="Calibri" pitchFamily="34" charset="-122"/>
-                <a:cs typeface="Calibri" pitchFamily="34" charset="-120"/>
-              </a:rPr>
-              <a:t>Process</a:t>
-            </a:r>
-            <a:endParaRPr lang="en-US" sz="1050" dirty="0"/>
-          </a:p>
-        </p:txBody>
-      </p:sp>
-      <p:sp>
-        <p:nvSpPr>
-          <p:cNvPr id="94" name="Text 86"/>
-          <p:cNvSpPr txBox="1"/>
-          <p:nvPr/>
-        </p:nvSpPr>
-        <p:spPr>
-          <a:xfrm>
-            <a:off x="3108960" y="5157216"/>
-            <a:ext cx="1106424" cy="438912"/>
-          </a:xfrm>
-          <a:prstGeom prst="rect">
-            <a:avLst/>
-          </a:prstGeom>
-          <a:noFill/>
-          <a:ln/>
-        </p:spPr>
-        <p:txBody>
-          <a:bodyPr wrap="square" lIns="0" tIns="0" rIns="0" bIns="0" rtlCol="0" anchor="t"/>
-          <a:lstStyle/>
-          <a:p>
-            <a:pPr algn="ctr" indent="0" marL="0">
-              <a:buNone/>
-            </a:pPr>
-            <a:r>
-              <a:rPr lang="en-US" sz="900" dirty="0">
-                <a:solidFill>
-                  <a:srgbClr val="404040"/>
-                </a:solidFill>
-                <a:latin typeface="Calibri" pitchFamily="34" charset="0"/>
-                <a:ea typeface="Calibri" pitchFamily="34" charset="-122"/>
-                <a:cs typeface="Calibri" pitchFamily="34" charset="-120"/>
-              </a:rPr>
-              <a:t>Defects tied to heat and coil IDs</a:t>
-            </a:r>
-            <a:endParaRPr lang="en-US" sz="900" dirty="0"/>
-          </a:p>
-        </p:txBody>
-      </p:sp>
-      <p:sp>
-        <p:nvSpPr>
-          <p:cNvPr id="95" name="Text 87"/>
-          <p:cNvSpPr txBox="1"/>
-          <p:nvPr/>
-        </p:nvSpPr>
-        <p:spPr>
-          <a:xfrm>
-            <a:off x="3081528" y="5596128"/>
-            <a:ext cx="1161288" cy="256032"/>
-          </a:xfrm>
-          <a:prstGeom prst="rect">
-            <a:avLst/>
-          </a:prstGeom>
-          <a:noFill/>
-          <a:ln/>
-        </p:spPr>
-        <p:txBody>
-          <a:bodyPr wrap="square" lIns="0" tIns="0" rIns="0" bIns="0" rtlCol="0" anchor="ctr"/>
-          <a:lstStyle/>
-          <a:p>
-            <a:pPr algn="ctr" indent="0" marL="0">
-              <a:buNone/>
-            </a:pPr>
-            <a:r>
-              <a:rPr lang="en-US" sz="900" b="1" dirty="0">
-                <a:solidFill>
-                  <a:srgbClr val="D2651F"/>
-                </a:solidFill>
-                <a:latin typeface="Calibri" pitchFamily="34" charset="0"/>
-                <a:ea typeface="Calibri" pitchFamily="34" charset="-122"/>
-                <a:cs typeface="Calibri" pitchFamily="34" charset="-120"/>
-              </a:rPr>
-              <a:t>6 families, each owned</a:t>
-            </a:r>
-            <a:endParaRPr lang="en-US" sz="900" dirty="0"/>
-          </a:p>
-        </p:txBody>
-      </p:sp>
-      <p:sp>
-        <p:nvSpPr>
-          <p:cNvPr id="96" name="Shape 88"/>
-          <p:cNvSpPr/>
-          <p:nvPr/>
-        </p:nvSpPr>
-        <p:spPr>
-          <a:xfrm>
-            <a:off x="4338828" y="4334256"/>
-            <a:ext cx="1234440" cy="1554480"/>
-          </a:xfrm>
-          <a:prstGeom prst="roundRect">
-            <a:avLst>
-              <a:gd name="adj" fmla="val 4444"/>
-            </a:avLst>
-          </a:prstGeom>
-          <a:solidFill>
-            <a:srgbClr val="F3F3F3"/>
-          </a:solidFill>
-          <a:ln w="12700">
-            <a:solidFill>
-              <a:srgbClr val="F3F3F3"/>
-            </a:solidFill>
-            <a:prstDash val="solid"/>
-          </a:ln>
-        </p:spPr>
-      </p:sp>
-      <p:sp>
-        <p:nvSpPr>
-          <p:cNvPr id="97" name="Shape 89"/>
-          <p:cNvSpPr/>
-          <p:nvPr/>
-        </p:nvSpPr>
-        <p:spPr>
-          <a:xfrm>
-            <a:off x="4732020" y="4425696"/>
-            <a:ext cx="457200" cy="457200"/>
-          </a:xfrm>
-          <a:prstGeom prst="ellipse">
-            <a:avLst/>
-          </a:prstGeom>
-          <a:solidFill>
-            <a:srgbClr val="D2651F"/>
-          </a:solidFill>
-          <a:ln w="12700">
-            <a:solidFill>
-              <a:srgbClr val="D2651F"/>
-            </a:solidFill>
-            <a:prstDash val="solid"/>
-          </a:ln>
-        </p:spPr>
-      </p:sp>
-      <p:pic>
-        <p:nvPicPr>
-          <p:cNvPr id="98" name="Image 5" descr="img/icons/hard-hat-white.png">    </p:cNvPr>
-          <p:cNvPicPr>
-            <a:picLocks noChangeAspect="1"/>
-          </p:cNvPicPr>
-          <p:nvPr/>
-        </p:nvPicPr>
-        <p:blipFill>
-          <a:blip r:embed="rId6"/>
-          <a:stretch>
-            <a:fillRect/>
-          </a:stretch>
-        </p:blipFill>
-        <p:spPr>
-          <a:xfrm>
-            <a:off x="4832604" y="4526280"/>
-            <a:ext cx="256032" cy="256032"/>
-          </a:xfrm>
-          <a:prstGeom prst="rect">
-            <a:avLst/>
-          </a:prstGeom>
-        </p:spPr>
-      </p:pic>
-      <p:sp>
-        <p:nvSpPr>
-          <p:cNvPr id="99" name="Text 90"/>
-          <p:cNvSpPr txBox="1"/>
-          <p:nvPr/>
-        </p:nvSpPr>
-        <p:spPr>
-          <a:xfrm>
-            <a:off x="4384548" y="4937760"/>
-            <a:ext cx="1143000" cy="219456"/>
-          </a:xfrm>
-          <a:prstGeom prst="rect">
-            <a:avLst/>
-          </a:prstGeom>
-          <a:noFill/>
-          <a:ln/>
-        </p:spPr>
-        <p:txBody>
-          <a:bodyPr wrap="square" lIns="0" tIns="0" rIns="0" bIns="0" rtlCol="0" anchor="t"/>
-          <a:lstStyle/>
-          <a:p>
-            <a:pPr algn="ctr" indent="0" marL="0">
-              <a:buNone/>
-            </a:pPr>
-            <a:r>
-              <a:rPr lang="en-US" sz="1050" b="1" dirty="0">
-                <a:solidFill>
-                  <a:srgbClr val="2B2B2B"/>
-                </a:solidFill>
-                <a:latin typeface="Calibri" pitchFamily="34" charset="0"/>
-                <a:ea typeface="Calibri" pitchFamily="34" charset="-122"/>
-                <a:cs typeface="Calibri" pitchFamily="34" charset="-120"/>
-              </a:rPr>
-              <a:t>Safety</a:t>
-            </a:r>
-            <a:endParaRPr lang="en-US" sz="1050" dirty="0"/>
-          </a:p>
-        </p:txBody>
-      </p:sp>
-      <p:sp>
-        <p:nvSpPr>
-          <p:cNvPr id="100" name="Text 91"/>
-          <p:cNvSpPr txBox="1"/>
-          <p:nvPr/>
-        </p:nvSpPr>
-        <p:spPr>
-          <a:xfrm>
-            <a:off x="4402836" y="5157216"/>
-            <a:ext cx="1106424" cy="438912"/>
-          </a:xfrm>
-          <a:prstGeom prst="rect">
-            <a:avLst/>
-          </a:prstGeom>
-          <a:noFill/>
-          <a:ln/>
-        </p:spPr>
-        <p:txBody>
-          <a:bodyPr wrap="square" lIns="0" tIns="0" rIns="0" bIns="0" rtlCol="0" anchor="t"/>
-          <a:lstStyle/>
-          <a:p>
-            <a:pPr algn="ctr" indent="0" marL="0">
-              <a:buNone/>
-            </a:pPr>
-            <a:r>
-              <a:rPr lang="en-US" sz="900" dirty="0">
-                <a:solidFill>
-                  <a:srgbClr val="404040"/>
-                </a:solidFill>
-                <a:latin typeface="Calibri" pitchFamily="34" charset="0"/>
-                <a:ea typeface="Calibri" pitchFamily="34" charset="-122"/>
-                <a:cs typeface="Calibri" pitchFamily="34" charset="-120"/>
-              </a:rPr>
-              <a:t>Severe-defect holds prevent strip breaks</a:t>
-            </a:r>
-            <a:endParaRPr lang="en-US" sz="900" dirty="0"/>
-          </a:p>
-        </p:txBody>
-      </p:sp>
-      <p:sp>
-        <p:nvSpPr>
-          <p:cNvPr id="101" name="Text 92"/>
-          <p:cNvSpPr txBox="1"/>
-          <p:nvPr/>
-        </p:nvSpPr>
-        <p:spPr>
-          <a:xfrm>
-            <a:off x="4375404" y="5596128"/>
-            <a:ext cx="1161288" cy="256032"/>
-          </a:xfrm>
-          <a:prstGeom prst="rect">
-            <a:avLst/>
-          </a:prstGeom>
-          <a:noFill/>
-          <a:ln/>
-        </p:spPr>
-        <p:txBody>
-          <a:bodyPr wrap="square" lIns="0" tIns="0" rIns="0" bIns="0" rtlCol="0" anchor="ctr"/>
-          <a:lstStyle/>
-          <a:p>
-            <a:pPr algn="ctr" indent="0" marL="0">
-              <a:buNone/>
-            </a:pPr>
-            <a:r>
-              <a:rPr lang="en-US" sz="900" b="1" dirty="0">
-                <a:solidFill>
-                  <a:srgbClr val="D2651F"/>
-                </a:solidFill>
-                <a:latin typeface="Calibri" pitchFamily="34" charset="0"/>
-                <a:ea typeface="Calibri" pitchFamily="34" charset="-122"/>
-                <a:cs typeface="Calibri" pitchFamily="34" charset="-120"/>
-              </a:rPr>
-              <a:t>Ternium's business case</a:t>
-            </a:r>
-            <a:endParaRPr lang="en-US" sz="900" dirty="0"/>
-          </a:p>
-        </p:txBody>
-      </p:sp>
-      <p:sp>
-        <p:nvSpPr>
-          <p:cNvPr id="102" name="Shape 93"/>
-          <p:cNvSpPr/>
-          <p:nvPr/>
-        </p:nvSpPr>
-        <p:spPr>
-          <a:xfrm>
-            <a:off x="5632704" y="4334256"/>
-            <a:ext cx="1234440" cy="1554480"/>
-          </a:xfrm>
-          <a:prstGeom prst="roundRect">
-            <a:avLst>
-              <a:gd name="adj" fmla="val 4444"/>
-            </a:avLst>
-          </a:prstGeom>
-          <a:solidFill>
-            <a:srgbClr val="F3F3F3"/>
-          </a:solidFill>
-          <a:ln w="12700">
-            <a:solidFill>
-              <a:srgbClr val="F3F3F3"/>
-            </a:solidFill>
-            <a:prstDash val="solid"/>
-          </a:ln>
-        </p:spPr>
-      </p:sp>
-      <p:sp>
-        <p:nvSpPr>
-          <p:cNvPr id="103" name="Shape 94"/>
-          <p:cNvSpPr/>
-          <p:nvPr/>
-        </p:nvSpPr>
-        <p:spPr>
-          <a:xfrm>
-            <a:off x="6025896" y="4425696"/>
-            <a:ext cx="457200" cy="457200"/>
-          </a:xfrm>
-          <a:prstGeom prst="ellipse">
-            <a:avLst/>
-          </a:prstGeom>
-          <a:solidFill>
-            <a:srgbClr val="D2651F"/>
-          </a:solidFill>
-          <a:ln w="12700">
-            <a:solidFill>
-              <a:srgbClr val="D2651F"/>
-            </a:solidFill>
-            <a:prstDash val="solid"/>
-          </a:ln>
-        </p:spPr>
-      </p:sp>
-      <p:pic>
-        <p:nvPicPr>
-          <p:cNvPr id="104" name="Image 6" descr="img/icons/leaf-white.png">    </p:cNvPr>
-          <p:cNvPicPr>
-            <a:picLocks noChangeAspect="1"/>
-          </p:cNvPicPr>
-          <p:nvPr/>
-        </p:nvPicPr>
-        <p:blipFill>
-          <a:blip r:embed="rId7"/>
-          <a:stretch>
-            <a:fillRect/>
-          </a:stretch>
-        </p:blipFill>
-        <p:spPr>
-          <a:xfrm>
-            <a:off x="6126480" y="4526280"/>
-            <a:ext cx="256032" cy="256032"/>
-          </a:xfrm>
-          <a:prstGeom prst="rect">
-            <a:avLst/>
-          </a:prstGeom>
-        </p:spPr>
-      </p:pic>
-      <p:sp>
-        <p:nvSpPr>
-          <p:cNvPr id="105" name="Text 95"/>
-          <p:cNvSpPr txBox="1"/>
-          <p:nvPr/>
-        </p:nvSpPr>
-        <p:spPr>
-          <a:xfrm>
-            <a:off x="5678424" y="4937760"/>
-            <a:ext cx="1143000" cy="219456"/>
-          </a:xfrm>
-          <a:prstGeom prst="rect">
-            <a:avLst/>
-          </a:prstGeom>
-          <a:noFill/>
-          <a:ln/>
-        </p:spPr>
-        <p:txBody>
-          <a:bodyPr wrap="square" lIns="0" tIns="0" rIns="0" bIns="0" rtlCol="0" anchor="t"/>
-          <a:lstStyle/>
-          <a:p>
-            <a:pPr algn="ctr" indent="0" marL="0">
-              <a:buNone/>
-            </a:pPr>
-            <a:r>
-              <a:rPr lang="en-US" sz="1050" b="1" dirty="0">
-                <a:solidFill>
-                  <a:srgbClr val="2B2B2B"/>
-                </a:solidFill>
-                <a:latin typeface="Calibri" pitchFamily="34" charset="0"/>
-                <a:ea typeface="Calibri" pitchFamily="34" charset="-122"/>
-                <a:cs typeface="Calibri" pitchFamily="34" charset="-120"/>
-              </a:rPr>
-              <a:t>Sustainability</a:t>
-            </a:r>
-            <a:endParaRPr lang="en-US" sz="1050" dirty="0"/>
-          </a:p>
-        </p:txBody>
-      </p:sp>
-      <p:sp>
-        <p:nvSpPr>
-          <p:cNvPr id="106" name="Text 96"/>
-          <p:cNvSpPr txBox="1"/>
-          <p:nvPr/>
-        </p:nvSpPr>
-        <p:spPr>
-          <a:xfrm>
-            <a:off x="5696712" y="5157216"/>
-            <a:ext cx="1106424" cy="438912"/>
-          </a:xfrm>
-          <a:prstGeom prst="rect">
-            <a:avLst/>
-          </a:prstGeom>
-          <a:noFill/>
-          <a:ln/>
-        </p:spPr>
-        <p:txBody>
-          <a:bodyPr wrap="square" lIns="0" tIns="0" rIns="0" bIns="0" rtlCol="0" anchor="t"/>
-          <a:lstStyle/>
-          <a:p>
-            <a:pPr algn="ctr" indent="0" marL="0">
-              <a:buNone/>
-            </a:pPr>
-            <a:r>
-              <a:rPr lang="en-US" sz="900" dirty="0">
-                <a:solidFill>
-                  <a:srgbClr val="404040"/>
-                </a:solidFill>
-                <a:latin typeface="Calibri" pitchFamily="34" charset="0"/>
-                <a:ea typeface="Calibri" pitchFamily="34" charset="-122"/>
-                <a:cs typeface="Calibri" pitchFamily="34" charset="-120"/>
-              </a:rPr>
-              <a:t>Less rework and remelt; backs net zero</a:t>
-            </a:r>
-            <a:endParaRPr lang="en-US" sz="900" dirty="0"/>
-          </a:p>
-        </p:txBody>
-      </p:sp>
-      <p:sp>
-        <p:nvSpPr>
-          <p:cNvPr id="107" name="Text 97"/>
-          <p:cNvSpPr txBox="1"/>
-          <p:nvPr/>
-        </p:nvSpPr>
-        <p:spPr>
-          <a:xfrm>
-            <a:off x="5669280" y="5596128"/>
-            <a:ext cx="1161288" cy="256032"/>
-          </a:xfrm>
-          <a:prstGeom prst="rect">
-            <a:avLst/>
-          </a:prstGeom>
-          <a:noFill/>
-          <a:ln/>
-        </p:spPr>
-        <p:txBody>
-          <a:bodyPr wrap="square" lIns="0" tIns="0" rIns="0" bIns="0" rtlCol="0" anchor="ctr"/>
-          <a:lstStyle/>
-          <a:p>
-            <a:pPr algn="ctr" indent="0" marL="0">
-              <a:buNone/>
-            </a:pPr>
-            <a:r>
-              <a:rPr lang="en-US" sz="900" b="1" dirty="0">
-                <a:solidFill>
-                  <a:srgbClr val="D2651F"/>
-                </a:solidFill>
-                <a:latin typeface="Calibri" pitchFamily="34" charset="0"/>
-                <a:ea typeface="Calibri" pitchFamily="34" charset="-122"/>
-                <a:cs typeface="Calibri" pitchFamily="34" charset="-120"/>
-              </a:rPr>
-              <a:t>JSL: 1.76 tCO2e/t, FY26</a:t>
-            </a:r>
-            <a:endParaRPr lang="en-US" sz="900" dirty="0"/>
-          </a:p>
-        </p:txBody>
-      </p:sp>
-      <p:sp>
-        <p:nvSpPr>
-          <p:cNvPr id="108" name="Shape 98"/>
-          <p:cNvSpPr/>
-          <p:nvPr/>
-        </p:nvSpPr>
-        <p:spPr>
-          <a:xfrm>
-            <a:off x="6926580" y="4334256"/>
-            <a:ext cx="1234440" cy="1554480"/>
-          </a:xfrm>
-          <a:prstGeom prst="roundRect">
-            <a:avLst>
-              <a:gd name="adj" fmla="val 4444"/>
-            </a:avLst>
-          </a:prstGeom>
-          <a:solidFill>
-            <a:srgbClr val="F3F3F3"/>
-          </a:solidFill>
-          <a:ln w="12700">
-            <a:solidFill>
-              <a:srgbClr val="F3F3F3"/>
-            </a:solidFill>
-            <a:prstDash val="solid"/>
-          </a:ln>
-        </p:spPr>
-      </p:sp>
-      <p:sp>
-        <p:nvSpPr>
-          <p:cNvPr id="109" name="Shape 99"/>
-          <p:cNvSpPr/>
-          <p:nvPr/>
-        </p:nvSpPr>
-        <p:spPr>
-          <a:xfrm>
-            <a:off x="7319772" y="4425696"/>
-            <a:ext cx="457200" cy="457200"/>
-          </a:xfrm>
-          <a:prstGeom prst="ellipse">
-            <a:avLst/>
-          </a:prstGeom>
-          <a:solidFill>
-            <a:srgbClr val="D2651F"/>
-          </a:solidFill>
-          <a:ln w="12700">
-            <a:solidFill>
-              <a:srgbClr val="D2651F"/>
-            </a:solidFill>
-            <a:prstDash val="solid"/>
-          </a:ln>
-        </p:spPr>
-      </p:sp>
-      <p:pic>
-        <p:nvPicPr>
-          <p:cNvPr id="110" name="Image 7" descr="img/icons/user-check-white.png">    </p:cNvPr>
-          <p:cNvPicPr>
-            <a:picLocks noChangeAspect="1"/>
-          </p:cNvPicPr>
-          <p:nvPr/>
-        </p:nvPicPr>
-        <p:blipFill>
-          <a:blip r:embed="rId8"/>
-          <a:stretch>
-            <a:fillRect/>
-          </a:stretch>
-        </p:blipFill>
-        <p:spPr>
-          <a:xfrm>
-            <a:off x="7420356" y="4526280"/>
-            <a:ext cx="256032" cy="256032"/>
-          </a:xfrm>
-          <a:prstGeom prst="rect">
-            <a:avLst/>
-          </a:prstGeom>
-        </p:spPr>
-      </p:pic>
-      <p:sp>
-        <p:nvSpPr>
-          <p:cNvPr id="111" name="Text 100"/>
-          <p:cNvSpPr txBox="1"/>
-          <p:nvPr/>
-        </p:nvSpPr>
-        <p:spPr>
-          <a:xfrm>
-            <a:off x="6972300" y="4937760"/>
-            <a:ext cx="1143000" cy="219456"/>
-          </a:xfrm>
-          <a:prstGeom prst="rect">
-            <a:avLst/>
-          </a:prstGeom>
-          <a:noFill/>
-          <a:ln/>
-        </p:spPr>
-        <p:txBody>
-          <a:bodyPr wrap="square" lIns="0" tIns="0" rIns="0" bIns="0" rtlCol="0" anchor="t"/>
-          <a:lstStyle/>
-          <a:p>
-            <a:pPr algn="ctr" indent="0" marL="0">
-              <a:buNone/>
-            </a:pPr>
-            <a:r>
-              <a:rPr lang="en-US" sz="1050" b="1" dirty="0">
-                <a:solidFill>
-                  <a:srgbClr val="2B2B2B"/>
-                </a:solidFill>
-                <a:latin typeface="Calibri" pitchFamily="34" charset="0"/>
-                <a:ea typeface="Calibri" pitchFamily="34" charset="-122"/>
-                <a:cs typeface="Calibri" pitchFamily="34" charset="-120"/>
-              </a:rPr>
-              <a:t>People</a:t>
-            </a:r>
-            <a:endParaRPr lang="en-US" sz="1050" dirty="0"/>
-          </a:p>
-        </p:txBody>
-      </p:sp>
-      <p:sp>
-        <p:nvSpPr>
-          <p:cNvPr id="112" name="Text 101"/>
-          <p:cNvSpPr txBox="1"/>
-          <p:nvPr/>
-        </p:nvSpPr>
-        <p:spPr>
-          <a:xfrm>
-            <a:off x="6990588" y="5157216"/>
-            <a:ext cx="1106424" cy="438912"/>
-          </a:xfrm>
-          <a:prstGeom prst="rect">
-            <a:avLst/>
-          </a:prstGeom>
-          <a:noFill/>
-          <a:ln/>
-        </p:spPr>
-        <p:txBody>
-          <a:bodyPr wrap="square" lIns="0" tIns="0" rIns="0" bIns="0" rtlCol="0" anchor="t"/>
-          <a:lstStyle/>
-          <a:p>
-            <a:pPr algn="ctr" indent="0" marL="0">
-              <a:buNone/>
-            </a:pPr>
-            <a:r>
-              <a:rPr lang="en-US" sz="900" dirty="0">
-                <a:solidFill>
-                  <a:srgbClr val="404040"/>
-                </a:solidFill>
-                <a:latin typeface="Calibri" pitchFamily="34" charset="0"/>
-                <a:ea typeface="Calibri" pitchFamily="34" charset="-122"/>
-                <a:cs typeface="Calibri" pitchFamily="34" charset="-120"/>
-              </a:rPr>
-              <a:t>Inspectors move to decisions</a:t>
-            </a:r>
-            <a:endParaRPr lang="en-US" sz="900" dirty="0"/>
-          </a:p>
-        </p:txBody>
-      </p:sp>
-      <p:sp>
-        <p:nvSpPr>
-          <p:cNvPr id="113" name="Text 102"/>
-          <p:cNvSpPr txBox="1"/>
-          <p:nvPr/>
-        </p:nvSpPr>
-        <p:spPr>
-          <a:xfrm>
-            <a:off x="6963156" y="5596128"/>
-            <a:ext cx="1161288" cy="256032"/>
-          </a:xfrm>
-          <a:prstGeom prst="rect">
-            <a:avLst/>
-          </a:prstGeom>
-          <a:noFill/>
-          <a:ln/>
-        </p:spPr>
-        <p:txBody>
-          <a:bodyPr wrap="square" lIns="0" tIns="0" rIns="0" bIns="0" rtlCol="0" anchor="ctr"/>
-          <a:lstStyle/>
-          <a:p>
-            <a:pPr algn="ctr" indent="0" marL="0">
-              <a:buNone/>
-            </a:pPr>
-            <a:r>
-              <a:rPr lang="en-US" sz="900" b="1" dirty="0">
-                <a:solidFill>
-                  <a:srgbClr val="D2651F"/>
-                </a:solidFill>
-                <a:latin typeface="Calibri" pitchFamily="34" charset="0"/>
-                <a:ea typeface="Calibri" pitchFamily="34" charset="-122"/>
-                <a:cs typeface="Calibri" pitchFamily="34" charset="-120"/>
-              </a:rPr>
-              <a:t>HR AI: 95% self-served</a:t>
-            </a:r>
-            <a:endParaRPr lang="en-US" sz="900" dirty="0"/>
-          </a:p>
-        </p:txBody>
-      </p:sp>
-      <p:sp>
-        <p:nvSpPr>
-          <p:cNvPr id="114" name="Shape 103"/>
-          <p:cNvSpPr/>
-          <p:nvPr/>
-        </p:nvSpPr>
-        <p:spPr>
-          <a:xfrm>
-            <a:off x="8321040" y="4005072"/>
-            <a:ext cx="3410712" cy="1883664"/>
-          </a:xfrm>
-          <a:prstGeom prst="roundRect">
-            <a:avLst>
-              <a:gd name="adj" fmla="val 2913"/>
-            </a:avLst>
-          </a:prstGeom>
-          <a:solidFill>
-            <a:srgbClr val="2B2B2B"/>
-          </a:solidFill>
-          <a:ln w="12700">
-            <a:solidFill>
-              <a:srgbClr val="2B2B2B"/>
-            </a:solidFill>
-            <a:prstDash val="solid"/>
-          </a:ln>
-        </p:spPr>
-      </p:sp>
-      <p:sp>
-        <p:nvSpPr>
-          <p:cNvPr id="115" name="Text 104"/>
+          <p:cNvPr id="69" name="Text 57"/>
           <p:cNvSpPr txBox="1"/>
           <p:nvPr/>
         </p:nvSpPr>
@@ -33951,7 +33386,7 @@
       </p:sp>
       <p:sp>
         <p:nvSpPr>
-          <p:cNvPr id="116" name="Text 105"/>
+          <p:cNvPr id="70" name="Text 58"/>
           <p:cNvSpPr txBox="1"/>
           <p:nvPr/>
         </p:nvSpPr>
@@ -34007,7 +33442,7 @@
                 <a:ea typeface="Calibri" pitchFamily="34" charset="-122"/>
                 <a:cs typeface="Calibri" pitchFamily="34" charset="-120"/>
               </a:rPr>
-              <a:t>₹2.5-4.2 cr pilot budget</a:t>
+              <a:t>Vendor quotes for cameras and lighting in P0</a:t>
             </a:r>
             <a:endParaRPr lang="en-US" sz="1000" dirty="0"/>
           </a:p>
@@ -34057,7 +33492,7 @@
       </p:sp>
       <p:sp>
         <p:nvSpPr>
-          <p:cNvPr id="117" name="Text 106"/>
+          <p:cNvPr id="71" name="Text 59"/>
           <p:cNvSpPr txBox="1"/>
           <p:nvPr/>
         </p:nvSpPr>
@@ -34088,7 +33523,7 @@
                 <a:ea typeface="Calibri" pitchFamily="34" charset="-122"/>
                 <a:cs typeface="Calibri" pitchFamily="34" charset="-120"/>
               </a:rPr>
-              <a:t>In return: measured downgrade rate, payback and a go / no-go at month 7.</a:t>
+              <a:t>In return: the measured downgrade rate, the value captured, and a go / no-go at month 7.</a:t>
             </a:r>
             <a:endParaRPr lang="en-US" sz="950" dirty="0"/>
           </a:p>
